--- a/Project/FDE project.pptx
+++ b/Project/FDE project.pptx
@@ -4,6 +4,9 @@
   <p:sldMasterIdLst>
     <p:sldMasterId id="2147483648" r:id="rId1"/>
   </p:sldMasterIdLst>
+  <p:notesMasterIdLst>
+    <p:notesMasterId r:id="rId26"/>
+  </p:notesMasterIdLst>
   <p:sldIdLst>
     <p:sldId id="256" r:id="rId2"/>
     <p:sldId id="257" r:id="rId3"/>
@@ -19,28 +22,31 @@
     <p:sldId id="267" r:id="rId13"/>
     <p:sldId id="268" r:id="rId14"/>
     <p:sldId id="269" r:id="rId15"/>
-    <p:sldId id="270" r:id="rId16"/>
-    <p:sldId id="271" r:id="rId17"/>
-    <p:sldId id="272" r:id="rId18"/>
-    <p:sldId id="273" r:id="rId19"/>
-    <p:sldId id="274" r:id="rId20"/>
-    <p:sldId id="275" r:id="rId21"/>
-    <p:sldId id="276" r:id="rId22"/>
+    <p:sldId id="271" r:id="rId16"/>
+    <p:sldId id="275" r:id="rId17"/>
+    <p:sldId id="277" r:id="rId18"/>
+    <p:sldId id="280" r:id="rId19"/>
+    <p:sldId id="272" r:id="rId20"/>
+    <p:sldId id="273" r:id="rId21"/>
+    <p:sldId id="274" r:id="rId22"/>
+    <p:sldId id="282" r:id="rId23"/>
+    <p:sldId id="281" r:id="rId24"/>
+    <p:sldId id="276" r:id="rId25"/>
   </p:sldIdLst>
   <p:sldSz cx="18288000" cy="10287000"/>
   <p:notesSz cx="6858000" cy="9144000"/>
   <p:embeddedFontLst>
     <p:embeddedFont>
       <p:font typeface="Roca Two" panose="020B0604020202020204" charset="0"/>
-      <p:regular r:id="rId23"/>
+      <p:regular r:id="rId27"/>
     </p:embeddedFont>
     <p:embeddedFont>
       <p:font typeface="Roca Two Bold" panose="020B0604020202020204" charset="0"/>
-      <p:regular r:id="rId24"/>
+      <p:regular r:id="rId28"/>
     </p:embeddedFont>
     <p:embeddedFont>
       <p:font typeface="Roca Two Ultra-Bold" panose="020B0604020202020204" charset="0"/>
-      <p:regular r:id="rId25"/>
+      <p:regular r:id="rId29"/>
     </p:embeddedFont>
   </p:embeddedFontLst>
   <p:defaultTextStyle>
@@ -157,17 +163,25 @@
 </p:presentation>
 </file>
 
+<file path=ppt/revisionInfo.xml><?xml version="1.0" encoding="utf-8"?>
+<p1510:revInfo xmlns:a="http://schemas.openxmlformats.org/drawingml/2006/main" xmlns:r="http://schemas.openxmlformats.org/officeDocument/2006/relationships" xmlns:p1510="http://schemas.microsoft.com/office/powerpoint/2015/10/main">
+  <p1510:revLst>
+    <p1510:client id="{EB6A5344-68A9-41E7-B2E4-F2F85D9AC353}" v="31" dt="2026-10-07T03:52:15.688"/>
+  </p1510:revLst>
+</p1510:revInfo>
+</file>
+
 <file path=ppt/changesInfos/changesInfo1.xml><?xml version="1.0" encoding="utf-8"?>
 <pc:chgInfo xmlns:a="http://schemas.openxmlformats.org/drawingml/2006/main" xmlns:r="http://schemas.openxmlformats.org/officeDocument/2006/relationships" xmlns:ac="http://schemas.microsoft.com/office/drawing/2013/main/command" xmlns:pc="http://schemas.microsoft.com/office/powerpoint/2013/main/command">
   <pc:docChgLst>
     <pc:chgData name="khethana ganta" userId="c7786f2083535dee" providerId="LiveId" clId="{29500FE1-9FCC-4AEA-839A-4E7D98CCD835}"/>
-    <pc:docChg chg="modSld">
-      <pc:chgData name="khethana ganta" userId="c7786f2083535dee" providerId="LiveId" clId="{29500FE1-9FCC-4AEA-839A-4E7D98CCD835}" dt="2026-09-26T12:05:33.328" v="108" actId="1076"/>
+    <pc:docChg chg="undo custSel addSld delSld modSld sldOrd">
+      <pc:chgData name="khethana ganta" userId="c7786f2083535dee" providerId="LiveId" clId="{29500FE1-9FCC-4AEA-839A-4E7D98CCD835}" dt="2026-10-07T03:52:35.640" v="481" actId="255"/>
       <pc:docMkLst>
         <pc:docMk/>
       </pc:docMkLst>
       <pc:sldChg chg="modSp mod">
-        <pc:chgData name="khethana ganta" userId="c7786f2083535dee" providerId="LiveId" clId="{29500FE1-9FCC-4AEA-839A-4E7D98CCD835}" dt="2026-09-26T11:51:35.200" v="4" actId="1076"/>
+        <pc:chgData name="khethana ganta" userId="c7786f2083535dee" providerId="LiveId" clId="{29500FE1-9FCC-4AEA-839A-4E7D98CCD835}" dt="2026-10-07T03:37:59.009" v="415" actId="1076"/>
         <pc:sldMkLst>
           <pc:docMk/>
           <pc:sldMk cId="0" sldId="256"/>
@@ -181,7 +195,7 @@
           </ac:spMkLst>
         </pc:spChg>
         <pc:spChg chg="mod">
-          <ac:chgData name="khethana ganta" userId="c7786f2083535dee" providerId="LiveId" clId="{29500FE1-9FCC-4AEA-839A-4E7D98CCD835}" dt="2026-09-26T11:51:31.217" v="3" actId="1076"/>
+          <ac:chgData name="khethana ganta" userId="c7786f2083535dee" providerId="LiveId" clId="{29500FE1-9FCC-4AEA-839A-4E7D98CCD835}" dt="2026-10-07T03:37:59.009" v="415" actId="1076"/>
           <ac:spMkLst>
             <pc:docMk/>
             <pc:sldMk cId="0" sldId="256"/>
@@ -189,7 +203,7 @@
           </ac:spMkLst>
         </pc:spChg>
         <pc:spChg chg="mod">
-          <ac:chgData name="khethana ganta" userId="c7786f2083535dee" providerId="LiveId" clId="{29500FE1-9FCC-4AEA-839A-4E7D98CCD835}" dt="2026-09-26T11:51:23.103" v="1" actId="1076"/>
+          <ac:chgData name="khethana ganta" userId="c7786f2083535dee" providerId="LiveId" clId="{29500FE1-9FCC-4AEA-839A-4E7D98CCD835}" dt="2026-10-07T03:37:50.186" v="413" actId="1076"/>
           <ac:spMkLst>
             <pc:docMk/>
             <pc:sldMk cId="0" sldId="256"/>
@@ -197,7 +211,7 @@
           </ac:spMkLst>
         </pc:spChg>
         <pc:spChg chg="mod">
-          <ac:chgData name="khethana ganta" userId="c7786f2083535dee" providerId="LiveId" clId="{29500FE1-9FCC-4AEA-839A-4E7D98CCD835}" dt="2026-09-26T11:51:27.250" v="2" actId="1076"/>
+          <ac:chgData name="khethana ganta" userId="c7786f2083535dee" providerId="LiveId" clId="{29500FE1-9FCC-4AEA-839A-4E7D98CCD835}" dt="2026-10-07T03:37:54.776" v="414" actId="1076"/>
           <ac:spMkLst>
             <pc:docMk/>
             <pc:sldMk cId="0" sldId="256"/>
@@ -206,11 +220,19 @@
         </pc:spChg>
       </pc:sldChg>
       <pc:sldChg chg="modSp mod">
-        <pc:chgData name="khethana ganta" userId="c7786f2083535dee" providerId="LiveId" clId="{29500FE1-9FCC-4AEA-839A-4E7D98CCD835}" dt="2026-09-26T11:54:21.467" v="22" actId="1076"/>
+        <pc:chgData name="khethana ganta" userId="c7786f2083535dee" providerId="LiveId" clId="{29500FE1-9FCC-4AEA-839A-4E7D98CCD835}" dt="2026-10-07T03:44:30.342" v="472" actId="1076"/>
         <pc:sldMkLst>
           <pc:docMk/>
           <pc:sldMk cId="0" sldId="257"/>
         </pc:sldMkLst>
+        <pc:spChg chg="mod">
+          <ac:chgData name="khethana ganta" userId="c7786f2083535dee" providerId="LiveId" clId="{29500FE1-9FCC-4AEA-839A-4E7D98CCD835}" dt="2026-10-07T03:44:30.342" v="472" actId="1076"/>
+          <ac:spMkLst>
+            <pc:docMk/>
+            <pc:sldMk cId="0" sldId="257"/>
+            <ac:spMk id="7" creationId="{00000000-0000-0000-0000-000000000000}"/>
+          </ac:spMkLst>
+        </pc:spChg>
         <pc:spChg chg="mod">
           <ac:chgData name="khethana ganta" userId="c7786f2083535dee" providerId="LiveId" clId="{29500FE1-9FCC-4AEA-839A-4E7D98CCD835}" dt="2026-09-26T11:54:21.467" v="22" actId="1076"/>
           <ac:spMkLst>
@@ -545,31 +567,15 @@
           </ac:spMkLst>
         </pc:spChg>
       </pc:sldChg>
-      <pc:sldChg chg="modSp mod">
-        <pc:chgData name="khethana ganta" userId="c7786f2083535dee" providerId="LiveId" clId="{29500FE1-9FCC-4AEA-839A-4E7D98CCD835}" dt="2026-09-26T12:04:38.028" v="96" actId="1076"/>
+      <pc:sldChg chg="modSp del mod">
+        <pc:chgData name="khethana ganta" userId="c7786f2083535dee" providerId="LiveId" clId="{29500FE1-9FCC-4AEA-839A-4E7D98CCD835}" dt="2026-10-07T03:45:04.628" v="473" actId="47"/>
         <pc:sldMkLst>
           <pc:docMk/>
           <pc:sldMk cId="0" sldId="270"/>
         </pc:sldMkLst>
-        <pc:spChg chg="mod">
-          <ac:chgData name="khethana ganta" userId="c7786f2083535dee" providerId="LiveId" clId="{29500FE1-9FCC-4AEA-839A-4E7D98CCD835}" dt="2026-09-26T12:04:22.190" v="91" actId="14100"/>
-          <ac:spMkLst>
-            <pc:docMk/>
-            <pc:sldMk cId="0" sldId="270"/>
-            <ac:spMk id="2" creationId="{00000000-0000-0000-0000-000000000000}"/>
-          </ac:spMkLst>
-        </pc:spChg>
-        <pc:spChg chg="mod">
-          <ac:chgData name="khethana ganta" userId="c7786f2083535dee" providerId="LiveId" clId="{29500FE1-9FCC-4AEA-839A-4E7D98CCD835}" dt="2026-09-26T12:04:38.028" v="96" actId="1076"/>
-          <ac:spMkLst>
-            <pc:docMk/>
-            <pc:sldMk cId="0" sldId="270"/>
-            <ac:spMk id="4" creationId="{00000000-0000-0000-0000-000000000000}"/>
-          </ac:spMkLst>
-        </pc:spChg>
       </pc:sldChg>
-      <pc:sldChg chg="modSp mod">
-        <pc:chgData name="khethana ganta" userId="c7786f2083535dee" providerId="LiveId" clId="{29500FE1-9FCC-4AEA-839A-4E7D98CCD835}" dt="2026-09-26T12:05:06.976" v="101" actId="1076"/>
+      <pc:sldChg chg="addSp delSp modSp mod">
+        <pc:chgData name="khethana ganta" userId="c7786f2083535dee" providerId="LiveId" clId="{29500FE1-9FCC-4AEA-839A-4E7D98CCD835}" dt="2026-09-30T03:54:50.897" v="125" actId="47"/>
         <pc:sldMkLst>
           <pc:docMk/>
           <pc:sldMk cId="0" sldId="271"/>
@@ -598,9 +604,17 @@
             <ac:spMk id="5" creationId="{00000000-0000-0000-0000-000000000000}"/>
           </ac:spMkLst>
         </pc:spChg>
+        <pc:spChg chg="add del mod">
+          <ac:chgData name="khethana ganta" userId="c7786f2083535dee" providerId="LiveId" clId="{29500FE1-9FCC-4AEA-839A-4E7D98CCD835}" dt="2026-09-30T03:54:50.897" v="125" actId="47"/>
+          <ac:spMkLst>
+            <pc:docMk/>
+            <pc:sldMk cId="0" sldId="271"/>
+            <ac:spMk id="6" creationId="{8390F7D4-AEC8-C467-FCAB-1F7086E60B3E}"/>
+          </ac:spMkLst>
+        </pc:spChg>
       </pc:sldChg>
-      <pc:sldChg chg="modSp mod">
-        <pc:chgData name="khethana ganta" userId="c7786f2083535dee" providerId="LiveId" clId="{29500FE1-9FCC-4AEA-839A-4E7D98CCD835}" dt="2026-09-26T12:05:18.272" v="104" actId="14100"/>
+      <pc:sldChg chg="addSp modSp mod ord">
+        <pc:chgData name="khethana ganta" userId="c7786f2083535dee" providerId="LiveId" clId="{29500FE1-9FCC-4AEA-839A-4E7D98CCD835}" dt="2026-10-07T03:21:44.843" v="336" actId="1076"/>
         <pc:sldMkLst>
           <pc:docMk/>
           <pc:sldMk cId="0" sldId="272"/>
@@ -613,9 +627,25 @@
             <ac:spMk id="2" creationId="{00000000-0000-0000-0000-000000000000}"/>
           </ac:spMkLst>
         </pc:spChg>
+        <pc:spChg chg="add">
+          <ac:chgData name="khethana ganta" userId="c7786f2083535dee" providerId="LiveId" clId="{29500FE1-9FCC-4AEA-839A-4E7D98CCD835}" dt="2026-10-07T03:18:30.883" v="315" actId="22"/>
+          <ac:spMkLst>
+            <pc:docMk/>
+            <pc:sldMk cId="0" sldId="272"/>
+            <ac:spMk id="4" creationId="{5C66CE53-A3E8-0CE8-9CB8-97308F2AE9F7}"/>
+          </ac:spMkLst>
+        </pc:spChg>
+        <pc:spChg chg="add mod">
+          <ac:chgData name="khethana ganta" userId="c7786f2083535dee" providerId="LiveId" clId="{29500FE1-9FCC-4AEA-839A-4E7D98CCD835}" dt="2026-10-07T03:21:44.843" v="336" actId="1076"/>
+          <ac:spMkLst>
+            <pc:docMk/>
+            <pc:sldMk cId="0" sldId="272"/>
+            <ac:spMk id="5" creationId="{9452D9A9-45AB-B287-1F2F-E45A02F8DB3E}"/>
+          </ac:spMkLst>
+        </pc:spChg>
       </pc:sldChg>
-      <pc:sldChg chg="modSp mod">
-        <pc:chgData name="khethana ganta" userId="c7786f2083535dee" providerId="LiveId" clId="{29500FE1-9FCC-4AEA-839A-4E7D98CCD835}" dt="2026-09-26T12:05:22.711" v="105" actId="1076"/>
+      <pc:sldChg chg="addSp modSp mod ord">
+        <pc:chgData name="khethana ganta" userId="c7786f2083535dee" providerId="LiveId" clId="{29500FE1-9FCC-4AEA-839A-4E7D98CCD835}" dt="2026-10-07T03:18:27.735" v="314" actId="22"/>
         <pc:sldMkLst>
           <pc:docMk/>
           <pc:sldMk cId="0" sldId="273"/>
@@ -628,40 +658,629 @@
             <ac:spMk id="2" creationId="{00000000-0000-0000-0000-000000000000}"/>
           </ac:spMkLst>
         </pc:spChg>
+        <pc:spChg chg="add">
+          <ac:chgData name="khethana ganta" userId="c7786f2083535dee" providerId="LiveId" clId="{29500FE1-9FCC-4AEA-839A-4E7D98CCD835}" dt="2026-10-07T03:18:27.735" v="314" actId="22"/>
+          <ac:spMkLst>
+            <pc:docMk/>
+            <pc:sldMk cId="0" sldId="273"/>
+            <ac:spMk id="4" creationId="{C84A9DE6-27B9-1FEF-D101-238513B90A8B}"/>
+          </ac:spMkLst>
+        </pc:spChg>
       </pc:sldChg>
-      <pc:sldChg chg="modSp mod">
-        <pc:chgData name="khethana ganta" userId="c7786f2083535dee" providerId="LiveId" clId="{29500FE1-9FCC-4AEA-839A-4E7D98CCD835}" dt="2026-09-26T12:05:26.744" v="107" actId="14100"/>
+      <pc:sldChg chg="addSp modSp mod ord">
+        <pc:chgData name="khethana ganta" userId="c7786f2083535dee" providerId="LiveId" clId="{29500FE1-9FCC-4AEA-839A-4E7D98CCD835}" dt="2026-10-07T03:18:36.206" v="318" actId="1076"/>
         <pc:sldMkLst>
           <pc:docMk/>
           <pc:sldMk cId="0" sldId="274"/>
         </pc:sldMkLst>
         <pc:spChg chg="mod">
-          <ac:chgData name="khethana ganta" userId="c7786f2083535dee" providerId="LiveId" clId="{29500FE1-9FCC-4AEA-839A-4E7D98CCD835}" dt="2026-09-26T12:05:26.744" v="107" actId="14100"/>
+          <ac:chgData name="khethana ganta" userId="c7786f2083535dee" providerId="LiveId" clId="{29500FE1-9FCC-4AEA-839A-4E7D98CCD835}" dt="2026-10-07T03:18:36.206" v="318" actId="1076"/>
           <ac:spMkLst>
             <pc:docMk/>
             <pc:sldMk cId="0" sldId="274"/>
             <ac:spMk id="2" creationId="{00000000-0000-0000-0000-000000000000}"/>
           </ac:spMkLst>
         </pc:spChg>
+        <pc:spChg chg="add">
+          <ac:chgData name="khethana ganta" userId="c7786f2083535dee" providerId="LiveId" clId="{29500FE1-9FCC-4AEA-839A-4E7D98CCD835}" dt="2026-10-07T03:18:32.926" v="316" actId="22"/>
+          <ac:spMkLst>
+            <pc:docMk/>
+            <pc:sldMk cId="0" sldId="274"/>
+            <ac:spMk id="4" creationId="{4460941A-BFEE-27CC-0D7E-C463A3290DE3}"/>
+          </ac:spMkLst>
+        </pc:spChg>
       </pc:sldChg>
-      <pc:sldChg chg="modSp mod">
-        <pc:chgData name="khethana ganta" userId="c7786f2083535dee" providerId="LiveId" clId="{29500FE1-9FCC-4AEA-839A-4E7D98CCD835}" dt="2026-09-26T12:05:33.328" v="108" actId="1076"/>
+      <pc:sldChg chg="addSp delSp modSp mod">
+        <pc:chgData name="khethana ganta" userId="c7786f2083535dee" providerId="LiveId" clId="{29500FE1-9FCC-4AEA-839A-4E7D98CCD835}" dt="2026-10-07T03:18:10.457" v="311" actId="1076"/>
         <pc:sldMkLst>
           <pc:docMk/>
           <pc:sldMk cId="0" sldId="275"/>
         </pc:sldMkLst>
         <pc:spChg chg="mod">
-          <ac:chgData name="khethana ganta" userId="c7786f2083535dee" providerId="LiveId" clId="{29500FE1-9FCC-4AEA-839A-4E7D98CCD835}" dt="2026-09-26T12:05:33.328" v="108" actId="1076"/>
+          <ac:chgData name="khethana ganta" userId="c7786f2083535dee" providerId="LiveId" clId="{29500FE1-9FCC-4AEA-839A-4E7D98CCD835}" dt="2026-10-07T03:18:10.457" v="311" actId="1076"/>
           <ac:spMkLst>
             <pc:docMk/>
             <pc:sldMk cId="0" sldId="275"/>
             <ac:spMk id="2" creationId="{00000000-0000-0000-0000-000000000000}"/>
           </ac:spMkLst>
         </pc:spChg>
+        <pc:spChg chg="add">
+          <ac:chgData name="khethana ganta" userId="c7786f2083535dee" providerId="LiveId" clId="{29500FE1-9FCC-4AEA-839A-4E7D98CCD835}" dt="2026-10-07T03:18:04.615" v="310" actId="22"/>
+          <ac:spMkLst>
+            <pc:docMk/>
+            <pc:sldMk cId="0" sldId="275"/>
+            <ac:spMk id="4" creationId="{3024480B-3B86-7093-09E4-464EF101E96D}"/>
+          </ac:spMkLst>
+        </pc:spChg>
+      </pc:sldChg>
+      <pc:sldChg chg="addSp delSp modSp mod">
+        <pc:chgData name="khethana ganta" userId="c7786f2083535dee" providerId="LiveId" clId="{29500FE1-9FCC-4AEA-839A-4E7D98CCD835}" dt="2026-09-30T03:57:13.411" v="139"/>
+        <pc:sldMkLst>
+          <pc:docMk/>
+          <pc:sldMk cId="0" sldId="276"/>
+        </pc:sldMkLst>
+      </pc:sldChg>
+      <pc:sldChg chg="addSp delSp modSp new mod ord">
+        <pc:chgData name="khethana ganta" userId="c7786f2083535dee" providerId="LiveId" clId="{29500FE1-9FCC-4AEA-839A-4E7D98CCD835}" dt="2026-10-07T03:34:00.136" v="357" actId="1076"/>
+        <pc:sldMkLst>
+          <pc:docMk/>
+          <pc:sldMk cId="385810571" sldId="277"/>
+        </pc:sldMkLst>
+        <pc:spChg chg="add">
+          <ac:chgData name="khethana ganta" userId="c7786f2083535dee" providerId="LiveId" clId="{29500FE1-9FCC-4AEA-839A-4E7D98CCD835}" dt="2026-10-07T03:18:45.114" v="321" actId="22"/>
+          <ac:spMkLst>
+            <pc:docMk/>
+            <pc:sldMk cId="385810571" sldId="277"/>
+            <ac:spMk id="3" creationId="{7E16835B-6E62-F334-88CE-C43E8817D6A2}"/>
+          </ac:spMkLst>
+        </pc:spChg>
+        <pc:picChg chg="add mod">
+          <ac:chgData name="khethana ganta" userId="c7786f2083535dee" providerId="LiveId" clId="{29500FE1-9FCC-4AEA-839A-4E7D98CCD835}" dt="2026-10-07T03:34:00.136" v="357" actId="1076"/>
+          <ac:picMkLst>
+            <pc:docMk/>
+            <pc:sldMk cId="385810571" sldId="277"/>
+            <ac:picMk id="4" creationId="{9171A4BC-5FC7-C007-54A3-82771F0C400C}"/>
+          </ac:picMkLst>
+        </pc:picChg>
+        <pc:picChg chg="add del mod">
+          <ac:chgData name="khethana ganta" userId="c7786f2083535dee" providerId="LiveId" clId="{29500FE1-9FCC-4AEA-839A-4E7D98CCD835}" dt="2026-10-07T03:33:53.581" v="355" actId="478"/>
+          <ac:picMkLst>
+            <pc:docMk/>
+            <pc:sldMk cId="385810571" sldId="277"/>
+            <ac:picMk id="13" creationId="{DA00461B-4821-EE8F-B51C-A9FE46DFB4C5}"/>
+          </ac:picMkLst>
+        </pc:picChg>
+      </pc:sldChg>
+      <pc:sldChg chg="addSp modSp add mod">
+        <pc:chgData name="khethana ganta" userId="c7786f2083535dee" providerId="LiveId" clId="{29500FE1-9FCC-4AEA-839A-4E7D98CCD835}" dt="2026-10-07T03:35:45.510" v="377" actId="120"/>
+        <pc:sldMkLst>
+          <pc:docMk/>
+          <pc:sldMk cId="1739760983" sldId="280"/>
+        </pc:sldMkLst>
+        <pc:spChg chg="mod">
+          <ac:chgData name="khethana ganta" userId="c7786f2083535dee" providerId="LiveId" clId="{29500FE1-9FCC-4AEA-839A-4E7D98CCD835}" dt="2026-09-30T05:22:35.242" v="261" actId="1076"/>
+          <ac:spMkLst>
+            <pc:docMk/>
+            <pc:sldMk cId="1739760983" sldId="280"/>
+            <ac:spMk id="2" creationId="{7BF225D1-EC6E-430D-C5C0-935AE30A3ADF}"/>
+          </ac:spMkLst>
+        </pc:spChg>
+        <pc:spChg chg="add">
+          <ac:chgData name="khethana ganta" userId="c7786f2083535dee" providerId="LiveId" clId="{29500FE1-9FCC-4AEA-839A-4E7D98CCD835}" dt="2026-10-07T03:18:12.889" v="312" actId="22"/>
+          <ac:spMkLst>
+            <pc:docMk/>
+            <pc:sldMk cId="1739760983" sldId="280"/>
+            <ac:spMk id="5" creationId="{7B62309E-9F66-FE96-68BB-02E971190F2E}"/>
+          </ac:spMkLst>
+        </pc:spChg>
+        <pc:graphicFrameChg chg="mod modGraphic">
+          <ac:chgData name="khethana ganta" userId="c7786f2083535dee" providerId="LiveId" clId="{29500FE1-9FCC-4AEA-839A-4E7D98CCD835}" dt="2026-10-07T03:35:45.510" v="377" actId="120"/>
+          <ac:graphicFrameMkLst>
+            <pc:docMk/>
+            <pc:sldMk cId="1739760983" sldId="280"/>
+            <ac:graphicFrameMk id="3" creationId="{14FFB5E1-1EBA-9EFB-9F8B-6D88E2EC76BC}"/>
+          </ac:graphicFrameMkLst>
+        </pc:graphicFrameChg>
+      </pc:sldChg>
+      <pc:sldChg chg="addSp modSp add mod ord">
+        <pc:chgData name="khethana ganta" userId="c7786f2083535dee" providerId="LiveId" clId="{29500FE1-9FCC-4AEA-839A-4E7D98CCD835}" dt="2026-10-07T03:30:43.506" v="352" actId="114"/>
+        <pc:sldMkLst>
+          <pc:docMk/>
+          <pc:sldMk cId="4234060334" sldId="281"/>
+        </pc:sldMkLst>
+        <pc:spChg chg="mod">
+          <ac:chgData name="khethana ganta" userId="c7786f2083535dee" providerId="LiveId" clId="{29500FE1-9FCC-4AEA-839A-4E7D98CCD835}" dt="2026-10-07T03:30:43.506" v="352" actId="114"/>
+          <ac:spMkLst>
+            <pc:docMk/>
+            <pc:sldMk cId="4234060334" sldId="281"/>
+            <ac:spMk id="2" creationId="{9B2A0051-9B63-F56E-7C2F-96C00CD114BF}"/>
+          </ac:spMkLst>
+        </pc:spChg>
+        <pc:spChg chg="add mod">
+          <ac:chgData name="khethana ganta" userId="c7786f2083535dee" providerId="LiveId" clId="{29500FE1-9FCC-4AEA-839A-4E7D98CCD835}" dt="2026-10-07T03:30:37.038" v="349" actId="1076"/>
+          <ac:spMkLst>
+            <pc:docMk/>
+            <pc:sldMk cId="4234060334" sldId="281"/>
+            <ac:spMk id="3" creationId="{63EFD13F-83F5-F865-EF9C-10512A41726F}"/>
+          </ac:spMkLst>
+        </pc:spChg>
+        <pc:spChg chg="add">
+          <ac:chgData name="khethana ganta" userId="c7786f2083535dee" providerId="LiveId" clId="{29500FE1-9FCC-4AEA-839A-4E7D98CCD835}" dt="2026-10-07T03:18:16.009" v="313" actId="22"/>
+          <ac:spMkLst>
+            <pc:docMk/>
+            <pc:sldMk cId="4234060334" sldId="281"/>
+            <ac:spMk id="5" creationId="{4F9C8FC0-87E8-1F23-CC04-680222108499}"/>
+          </ac:spMkLst>
+        </pc:spChg>
+      </pc:sldChg>
+      <pc:sldChg chg="addSp delSp modSp add mod">
+        <pc:chgData name="khethana ganta" userId="c7786f2083535dee" providerId="LiveId" clId="{29500FE1-9FCC-4AEA-839A-4E7D98CCD835}" dt="2026-10-07T03:52:35.640" v="481" actId="255"/>
+        <pc:sldMkLst>
+          <pc:docMk/>
+          <pc:sldMk cId="1477619284" sldId="282"/>
+        </pc:sldMkLst>
+        <pc:spChg chg="del">
+          <ac:chgData name="khethana ganta" userId="c7786f2083535dee" providerId="LiveId" clId="{29500FE1-9FCC-4AEA-839A-4E7D98CCD835}" dt="2026-10-07T03:31:05.885" v="354" actId="478"/>
+          <ac:spMkLst>
+            <pc:docMk/>
+            <pc:sldMk cId="1477619284" sldId="282"/>
+            <ac:spMk id="2" creationId="{D802F312-D232-E2E4-32BA-B1140630B1E4}"/>
+          </ac:spMkLst>
+        </pc:spChg>
+        <pc:spChg chg="add mod">
+          <ac:chgData name="khethana ganta" userId="c7786f2083535dee" providerId="LiveId" clId="{29500FE1-9FCC-4AEA-839A-4E7D98CCD835}" dt="2026-10-07T03:52:35.640" v="481" actId="255"/>
+          <ac:spMkLst>
+            <pc:docMk/>
+            <pc:sldMk cId="1477619284" sldId="282"/>
+            <ac:spMk id="3" creationId="{4B676355-F24A-E288-144C-6999E7FD8B64}"/>
+          </ac:spMkLst>
+        </pc:spChg>
+        <pc:spChg chg="add mod">
+          <ac:chgData name="khethana ganta" userId="c7786f2083535dee" providerId="LiveId" clId="{29500FE1-9FCC-4AEA-839A-4E7D98CCD835}" dt="2026-10-07T03:37:20.248" v="409" actId="1076"/>
+          <ac:spMkLst>
+            <pc:docMk/>
+            <pc:sldMk cId="1477619284" sldId="282"/>
+            <ac:spMk id="5" creationId="{A521B974-5D8D-6C56-6EA6-6333D0400425}"/>
+          </ac:spMkLst>
+        </pc:spChg>
       </pc:sldChg>
     </pc:docChg>
   </pc:docChgLst>
 </pc:chgInfo>
+</file>
+
+<file path=ppt/notesMasters/notesMaster1.xml><?xml version="1.0" encoding="utf-8"?>
+<p:notesMaster xmlns:a="http://schemas.openxmlformats.org/drawingml/2006/main" xmlns:r="http://schemas.openxmlformats.org/officeDocument/2006/relationships" xmlns:p="http://schemas.openxmlformats.org/presentationml/2006/main">
+  <p:cSld>
+    <p:bg>
+      <p:bgRef idx="1001">
+        <a:schemeClr val="bg1"/>
+      </p:bgRef>
+    </p:bg>
+    <p:spTree>
+      <p:nvGrpSpPr>
+        <p:cNvPr id="1" name=""/>
+        <p:cNvGrpSpPr/>
+        <p:nvPr/>
+      </p:nvGrpSpPr>
+      <p:grpSpPr>
+        <a:xfrm>
+          <a:off x="0" y="0"/>
+          <a:ext cx="0" cy="0"/>
+          <a:chOff x="0" y="0"/>
+          <a:chExt cx="0" cy="0"/>
+        </a:xfrm>
+      </p:grpSpPr>
+      <p:sp>
+        <p:nvSpPr>
+          <p:cNvPr id="2" name="Header Placeholder 1"/>
+          <p:cNvSpPr>
+            <a:spLocks noGrp="1"/>
+          </p:cNvSpPr>
+          <p:nvPr>
+            <p:ph type="hdr" sz="quarter"/>
+          </p:nvPr>
+        </p:nvSpPr>
+        <p:spPr>
+          <a:xfrm>
+            <a:off x="0" y="0"/>
+            <a:ext cx="2971800" cy="458788"/>
+          </a:xfrm>
+          <a:prstGeom prst="rect">
+            <a:avLst/>
+          </a:prstGeom>
+        </p:spPr>
+        <p:txBody>
+          <a:bodyPr vert="horz" lIns="91440" tIns="45720" rIns="91440" bIns="45720" rtlCol="0"/>
+          <a:lstStyle>
+            <a:lvl1pPr algn="l">
+              <a:defRPr sz="1200"/>
+            </a:lvl1pPr>
+          </a:lstStyle>
+          <a:p>
+            <a:endParaRPr lang="en-IN"/>
+          </a:p>
+        </p:txBody>
+      </p:sp>
+      <p:sp>
+        <p:nvSpPr>
+          <p:cNvPr id="3" name="Date Placeholder 2"/>
+          <p:cNvSpPr>
+            <a:spLocks noGrp="1"/>
+          </p:cNvSpPr>
+          <p:nvPr>
+            <p:ph type="dt" idx="1"/>
+          </p:nvPr>
+        </p:nvSpPr>
+        <p:spPr>
+          <a:xfrm>
+            <a:off x="3884613" y="0"/>
+            <a:ext cx="2971800" cy="458788"/>
+          </a:xfrm>
+          <a:prstGeom prst="rect">
+            <a:avLst/>
+          </a:prstGeom>
+        </p:spPr>
+        <p:txBody>
+          <a:bodyPr vert="horz" lIns="91440" tIns="45720" rIns="91440" bIns="45720" rtlCol="0"/>
+          <a:lstStyle>
+            <a:lvl1pPr algn="r">
+              <a:defRPr sz="1200"/>
+            </a:lvl1pPr>
+          </a:lstStyle>
+          <a:p>
+            <a:fld id="{D1FA8E43-EA19-4686-A30F-9019A14486D4}" type="datetimeFigureOut">
+              <a:rPr lang="en-IN" smtClean="0"/>
+              <a:t>07-10-2026</a:t>
+            </a:fld>
+            <a:endParaRPr lang="en-IN"/>
+          </a:p>
+        </p:txBody>
+      </p:sp>
+      <p:sp>
+        <p:nvSpPr>
+          <p:cNvPr id="4" name="Slide Image Placeholder 3"/>
+          <p:cNvSpPr>
+            <a:spLocks noGrp="1" noRot="1" noChangeAspect="1"/>
+          </p:cNvSpPr>
+          <p:nvPr>
+            <p:ph type="sldImg" idx="2"/>
+          </p:nvPr>
+        </p:nvSpPr>
+        <p:spPr>
+          <a:xfrm>
+            <a:off x="685800" y="1143000"/>
+            <a:ext cx="5486400" cy="3086100"/>
+          </a:xfrm>
+          <a:prstGeom prst="rect">
+            <a:avLst/>
+          </a:prstGeom>
+          <a:noFill/>
+          <a:ln w="12700">
+            <a:solidFill>
+              <a:prstClr val="black"/>
+            </a:solidFill>
+          </a:ln>
+        </p:spPr>
+        <p:txBody>
+          <a:bodyPr vert="horz" lIns="91440" tIns="45720" rIns="91440" bIns="45720" rtlCol="0" anchor="ctr"/>
+          <a:lstStyle/>
+          <a:p>
+            <a:endParaRPr lang="en-IN"/>
+          </a:p>
+        </p:txBody>
+      </p:sp>
+      <p:sp>
+        <p:nvSpPr>
+          <p:cNvPr id="5" name="Notes Placeholder 4"/>
+          <p:cNvSpPr>
+            <a:spLocks noGrp="1"/>
+          </p:cNvSpPr>
+          <p:nvPr>
+            <p:ph type="body" sz="quarter" idx="3"/>
+          </p:nvPr>
+        </p:nvSpPr>
+        <p:spPr>
+          <a:xfrm>
+            <a:off x="685800" y="4400550"/>
+            <a:ext cx="5486400" cy="3600450"/>
+          </a:xfrm>
+          <a:prstGeom prst="rect">
+            <a:avLst/>
+          </a:prstGeom>
+        </p:spPr>
+        <p:txBody>
+          <a:bodyPr vert="horz" lIns="91440" tIns="45720" rIns="91440" bIns="45720" rtlCol="0"/>
+          <a:lstStyle/>
+          <a:p>
+            <a:pPr lvl="0"/>
+            <a:r>
+              <a:rPr lang="en-US"/>
+              <a:t>Click to edit Master text styles</a:t>
+            </a:r>
+          </a:p>
+          <a:p>
+            <a:pPr lvl="1"/>
+            <a:r>
+              <a:rPr lang="en-US"/>
+              <a:t>Second level</a:t>
+            </a:r>
+          </a:p>
+          <a:p>
+            <a:pPr lvl="2"/>
+            <a:r>
+              <a:rPr lang="en-US"/>
+              <a:t>Third level</a:t>
+            </a:r>
+          </a:p>
+          <a:p>
+            <a:pPr lvl="3"/>
+            <a:r>
+              <a:rPr lang="en-US"/>
+              <a:t>Fourth level</a:t>
+            </a:r>
+          </a:p>
+          <a:p>
+            <a:pPr lvl="4"/>
+            <a:r>
+              <a:rPr lang="en-US"/>
+              <a:t>Fifth level</a:t>
+            </a:r>
+            <a:endParaRPr lang="en-IN"/>
+          </a:p>
+        </p:txBody>
+      </p:sp>
+      <p:sp>
+        <p:nvSpPr>
+          <p:cNvPr id="6" name="Footer Placeholder 5"/>
+          <p:cNvSpPr>
+            <a:spLocks noGrp="1"/>
+          </p:cNvSpPr>
+          <p:nvPr>
+            <p:ph type="ftr" sz="quarter" idx="4"/>
+          </p:nvPr>
+        </p:nvSpPr>
+        <p:spPr>
+          <a:xfrm>
+            <a:off x="0" y="8685213"/>
+            <a:ext cx="2971800" cy="458787"/>
+          </a:xfrm>
+          <a:prstGeom prst="rect">
+            <a:avLst/>
+          </a:prstGeom>
+        </p:spPr>
+        <p:txBody>
+          <a:bodyPr vert="horz" lIns="91440" tIns="45720" rIns="91440" bIns="45720" rtlCol="0" anchor="b"/>
+          <a:lstStyle>
+            <a:lvl1pPr algn="l">
+              <a:defRPr sz="1200"/>
+            </a:lvl1pPr>
+          </a:lstStyle>
+          <a:p>
+            <a:endParaRPr lang="en-IN"/>
+          </a:p>
+        </p:txBody>
+      </p:sp>
+      <p:sp>
+        <p:nvSpPr>
+          <p:cNvPr id="7" name="Slide Number Placeholder 6"/>
+          <p:cNvSpPr>
+            <a:spLocks noGrp="1"/>
+          </p:cNvSpPr>
+          <p:nvPr>
+            <p:ph type="sldNum" sz="quarter" idx="5"/>
+          </p:nvPr>
+        </p:nvSpPr>
+        <p:spPr>
+          <a:xfrm>
+            <a:off x="3884613" y="8685213"/>
+            <a:ext cx="2971800" cy="458787"/>
+          </a:xfrm>
+          <a:prstGeom prst="rect">
+            <a:avLst/>
+          </a:prstGeom>
+        </p:spPr>
+        <p:txBody>
+          <a:bodyPr vert="horz" lIns="91440" tIns="45720" rIns="91440" bIns="45720" rtlCol="0" anchor="b"/>
+          <a:lstStyle>
+            <a:lvl1pPr algn="r">
+              <a:defRPr sz="1200"/>
+            </a:lvl1pPr>
+          </a:lstStyle>
+          <a:p>
+            <a:fld id="{0EABD524-93AB-4B3D-9D7B-9CFABD4F6712}" type="slidenum">
+              <a:rPr lang="en-IN" smtClean="0"/>
+              <a:t>‹#›</a:t>
+            </a:fld>
+            <a:endParaRPr lang="en-IN"/>
+          </a:p>
+        </p:txBody>
+      </p:sp>
+    </p:spTree>
+    <p:extLst>
+      <p:ext uri="{BB962C8B-B14F-4D97-AF65-F5344CB8AC3E}">
+        <p14:creationId xmlns:p14="http://schemas.microsoft.com/office/powerpoint/2010/main" val="1167082422"/>
+      </p:ext>
+    </p:extLst>
+  </p:cSld>
+  <p:clrMap bg1="lt1" tx1="dk1" bg2="lt2" tx2="dk2" accent1="accent1" accent2="accent2" accent3="accent3" accent4="accent4" accent5="accent5" accent6="accent6" hlink="hlink" folHlink="folHlink"/>
+  <p:notesStyle>
+    <a:lvl1pPr marL="0" algn="l" defTabSz="914400" rtl="0" eaLnBrk="1" latinLnBrk="0" hangingPunct="1">
+      <a:defRPr sz="1200" kern="1200">
+        <a:solidFill>
+          <a:schemeClr val="tx1"/>
+        </a:solidFill>
+        <a:latin typeface="+mn-lt"/>
+        <a:ea typeface="+mn-ea"/>
+        <a:cs typeface="+mn-cs"/>
+      </a:defRPr>
+    </a:lvl1pPr>
+    <a:lvl2pPr marL="457200" algn="l" defTabSz="914400" rtl="0" eaLnBrk="1" latinLnBrk="0" hangingPunct="1">
+      <a:defRPr sz="1200" kern="1200">
+        <a:solidFill>
+          <a:schemeClr val="tx1"/>
+        </a:solidFill>
+        <a:latin typeface="+mn-lt"/>
+        <a:ea typeface="+mn-ea"/>
+        <a:cs typeface="+mn-cs"/>
+      </a:defRPr>
+    </a:lvl2pPr>
+    <a:lvl3pPr marL="914400" algn="l" defTabSz="914400" rtl="0" eaLnBrk="1" latinLnBrk="0" hangingPunct="1">
+      <a:defRPr sz="1200" kern="1200">
+        <a:solidFill>
+          <a:schemeClr val="tx1"/>
+        </a:solidFill>
+        <a:latin typeface="+mn-lt"/>
+        <a:ea typeface="+mn-ea"/>
+        <a:cs typeface="+mn-cs"/>
+      </a:defRPr>
+    </a:lvl3pPr>
+    <a:lvl4pPr marL="1371600" algn="l" defTabSz="914400" rtl="0" eaLnBrk="1" latinLnBrk="0" hangingPunct="1">
+      <a:defRPr sz="1200" kern="1200">
+        <a:solidFill>
+          <a:schemeClr val="tx1"/>
+        </a:solidFill>
+        <a:latin typeface="+mn-lt"/>
+        <a:ea typeface="+mn-ea"/>
+        <a:cs typeface="+mn-cs"/>
+      </a:defRPr>
+    </a:lvl4pPr>
+    <a:lvl5pPr marL="1828800" algn="l" defTabSz="914400" rtl="0" eaLnBrk="1" latinLnBrk="0" hangingPunct="1">
+      <a:defRPr sz="1200" kern="1200">
+        <a:solidFill>
+          <a:schemeClr val="tx1"/>
+        </a:solidFill>
+        <a:latin typeface="+mn-lt"/>
+        <a:ea typeface="+mn-ea"/>
+        <a:cs typeface="+mn-cs"/>
+      </a:defRPr>
+    </a:lvl5pPr>
+    <a:lvl6pPr marL="2286000" algn="l" defTabSz="914400" rtl="0" eaLnBrk="1" latinLnBrk="0" hangingPunct="1">
+      <a:defRPr sz="1200" kern="1200">
+        <a:solidFill>
+          <a:schemeClr val="tx1"/>
+        </a:solidFill>
+        <a:latin typeface="+mn-lt"/>
+        <a:ea typeface="+mn-ea"/>
+        <a:cs typeface="+mn-cs"/>
+      </a:defRPr>
+    </a:lvl6pPr>
+    <a:lvl7pPr marL="2743200" algn="l" defTabSz="914400" rtl="0" eaLnBrk="1" latinLnBrk="0" hangingPunct="1">
+      <a:defRPr sz="1200" kern="1200">
+        <a:solidFill>
+          <a:schemeClr val="tx1"/>
+        </a:solidFill>
+        <a:latin typeface="+mn-lt"/>
+        <a:ea typeface="+mn-ea"/>
+        <a:cs typeface="+mn-cs"/>
+      </a:defRPr>
+    </a:lvl7pPr>
+    <a:lvl8pPr marL="3200400" algn="l" defTabSz="914400" rtl="0" eaLnBrk="1" latinLnBrk="0" hangingPunct="1">
+      <a:defRPr sz="1200" kern="1200">
+        <a:solidFill>
+          <a:schemeClr val="tx1"/>
+        </a:solidFill>
+        <a:latin typeface="+mn-lt"/>
+        <a:ea typeface="+mn-ea"/>
+        <a:cs typeface="+mn-cs"/>
+      </a:defRPr>
+    </a:lvl8pPr>
+    <a:lvl9pPr marL="3657600" algn="l" defTabSz="914400" rtl="0" eaLnBrk="1" latinLnBrk="0" hangingPunct="1">
+      <a:defRPr sz="1200" kern="1200">
+        <a:solidFill>
+          <a:schemeClr val="tx1"/>
+        </a:solidFill>
+        <a:latin typeface="+mn-lt"/>
+        <a:ea typeface="+mn-ea"/>
+        <a:cs typeface="+mn-cs"/>
+      </a:defRPr>
+    </a:lvl9pPr>
+  </p:notesStyle>
+</p:notesMaster>
+</file>
+
+<file path=ppt/notesSlides/notesSlide1.xml><?xml version="1.0" encoding="utf-8"?>
+<p:notes xmlns:a="http://schemas.openxmlformats.org/drawingml/2006/main" xmlns:r="http://schemas.openxmlformats.org/officeDocument/2006/relationships" xmlns:p="http://schemas.openxmlformats.org/presentationml/2006/main">
+  <p:cSld>
+    <p:spTree>
+      <p:nvGrpSpPr>
+        <p:cNvPr id="1" name=""/>
+        <p:cNvGrpSpPr/>
+        <p:nvPr/>
+      </p:nvGrpSpPr>
+      <p:grpSpPr>
+        <a:xfrm>
+          <a:off x="0" y="0"/>
+          <a:ext cx="0" cy="0"/>
+          <a:chOff x="0" y="0"/>
+          <a:chExt cx="0" cy="0"/>
+        </a:xfrm>
+      </p:grpSpPr>
+      <p:sp>
+        <p:nvSpPr>
+          <p:cNvPr id="2" name="Slide Image Placeholder 1"/>
+          <p:cNvSpPr>
+            <a:spLocks noGrp="1" noRot="1" noChangeAspect="1"/>
+          </p:cNvSpPr>
+          <p:nvPr>
+            <p:ph type="sldImg"/>
+          </p:nvPr>
+        </p:nvSpPr>
+        <p:spPr/>
+      </p:sp>
+      <p:sp>
+        <p:nvSpPr>
+          <p:cNvPr id="3" name="Notes Placeholder 2"/>
+          <p:cNvSpPr>
+            <a:spLocks noGrp="1"/>
+          </p:cNvSpPr>
+          <p:nvPr>
+            <p:ph type="body" idx="1"/>
+          </p:nvPr>
+        </p:nvSpPr>
+        <p:spPr/>
+        <p:txBody>
+          <a:bodyPr/>
+          <a:lstStyle/>
+          <a:p>
+            <a:endParaRPr lang="en-IN" dirty="0"/>
+          </a:p>
+        </p:txBody>
+      </p:sp>
+      <p:sp>
+        <p:nvSpPr>
+          <p:cNvPr id="4" name="Slide Number Placeholder 3"/>
+          <p:cNvSpPr>
+            <a:spLocks noGrp="1"/>
+          </p:cNvSpPr>
+          <p:nvPr>
+            <p:ph type="sldNum" sz="quarter" idx="5"/>
+          </p:nvPr>
+        </p:nvSpPr>
+        <p:spPr/>
+        <p:txBody>
+          <a:bodyPr/>
+          <a:lstStyle/>
+          <a:p>
+            <a:fld id="{0EABD524-93AB-4B3D-9D7B-9CFABD4F6712}" type="slidenum">
+              <a:rPr lang="en-IN" smtClean="0"/>
+              <a:t>18</a:t>
+            </a:fld>
+            <a:endParaRPr lang="en-IN"/>
+          </a:p>
+        </p:txBody>
+      </p:sp>
+    </p:spTree>
+    <p:extLst>
+      <p:ext uri="{BB962C8B-B14F-4D97-AF65-F5344CB8AC3E}">
+        <p14:creationId xmlns:p14="http://schemas.microsoft.com/office/powerpoint/2010/main" val="2509389836"/>
+      </p:ext>
+    </p:extLst>
+  </p:cSld>
+  <p:clrMapOvr>
+    <a:masterClrMapping/>
+  </p:clrMapOvr>
+</p:notes>
 </file>
 
 <file path=ppt/slideLayouts/slideLayout1.xml><?xml version="1.0" encoding="utf-8"?>
@@ -844,7 +1463,7 @@
             <a:fld id="{1D8BD707-D9CF-40AE-B4C6-C98DA3205C09}" type="datetimeFigureOut">
               <a:rPr lang="en-US" smtClean="0"/>
               <a:pPr/>
-              <a:t>9/26/2026</a:t>
+              <a:t>10/7/2026</a:t>
             </a:fld>
             <a:endParaRPr lang="en-US"/>
           </a:p>
@@ -1009,7 +1628,7 @@
             <a:fld id="{1D8BD707-D9CF-40AE-B4C6-C98DA3205C09}" type="datetimeFigureOut">
               <a:rPr lang="en-US" smtClean="0"/>
               <a:pPr/>
-              <a:t>9/26/2026</a:t>
+              <a:t>10/7/2026</a:t>
             </a:fld>
             <a:endParaRPr lang="en-US"/>
           </a:p>
@@ -1184,7 +1803,7 @@
             <a:fld id="{1D8BD707-D9CF-40AE-B4C6-C98DA3205C09}" type="datetimeFigureOut">
               <a:rPr lang="en-US" smtClean="0"/>
               <a:pPr/>
-              <a:t>9/26/2026</a:t>
+              <a:t>10/7/2026</a:t>
             </a:fld>
             <a:endParaRPr lang="en-US"/>
           </a:p>
@@ -1349,7 +1968,7 @@
             <a:fld id="{1D8BD707-D9CF-40AE-B4C6-C98DA3205C09}" type="datetimeFigureOut">
               <a:rPr lang="en-US" smtClean="0"/>
               <a:pPr/>
-              <a:t>9/26/2026</a:t>
+              <a:t>10/7/2026</a:t>
             </a:fld>
             <a:endParaRPr lang="en-US"/>
           </a:p>
@@ -1591,7 +2210,7 @@
             <a:fld id="{1D8BD707-D9CF-40AE-B4C6-C98DA3205C09}" type="datetimeFigureOut">
               <a:rPr lang="en-US" smtClean="0"/>
               <a:pPr/>
-              <a:t>9/26/2026</a:t>
+              <a:t>10/7/2026</a:t>
             </a:fld>
             <a:endParaRPr lang="en-US"/>
           </a:p>
@@ -1873,7 +2492,7 @@
             <a:fld id="{1D8BD707-D9CF-40AE-B4C6-C98DA3205C09}" type="datetimeFigureOut">
               <a:rPr lang="en-US" smtClean="0"/>
               <a:pPr/>
-              <a:t>9/26/2026</a:t>
+              <a:t>10/7/2026</a:t>
             </a:fld>
             <a:endParaRPr lang="en-US"/>
           </a:p>
@@ -2289,7 +2908,7 @@
             <a:fld id="{1D8BD707-D9CF-40AE-B4C6-C98DA3205C09}" type="datetimeFigureOut">
               <a:rPr lang="en-US" smtClean="0"/>
               <a:pPr/>
-              <a:t>9/26/2026</a:t>
+              <a:t>10/7/2026</a:t>
             </a:fld>
             <a:endParaRPr lang="en-US"/>
           </a:p>
@@ -2403,7 +3022,7 @@
             <a:fld id="{1D8BD707-D9CF-40AE-B4C6-C98DA3205C09}" type="datetimeFigureOut">
               <a:rPr lang="en-US" smtClean="0"/>
               <a:pPr/>
-              <a:t>9/26/2026</a:t>
+              <a:t>10/7/2026</a:t>
             </a:fld>
             <a:endParaRPr lang="en-US"/>
           </a:p>
@@ -2495,7 +3114,7 @@
             <a:fld id="{1D8BD707-D9CF-40AE-B4C6-C98DA3205C09}" type="datetimeFigureOut">
               <a:rPr lang="en-US" smtClean="0"/>
               <a:pPr/>
-              <a:t>9/26/2026</a:t>
+              <a:t>10/7/2026</a:t>
             </a:fld>
             <a:endParaRPr lang="en-US"/>
           </a:p>
@@ -2767,7 +3386,7 @@
             <a:fld id="{1D8BD707-D9CF-40AE-B4C6-C98DA3205C09}" type="datetimeFigureOut">
               <a:rPr lang="en-US" smtClean="0"/>
               <a:pPr/>
-              <a:t>9/26/2026</a:t>
+              <a:t>10/7/2026</a:t>
             </a:fld>
             <a:endParaRPr lang="en-US"/>
           </a:p>
@@ -3016,7 +3635,7 @@
             <a:fld id="{1D8BD707-D9CF-40AE-B4C6-C98DA3205C09}" type="datetimeFigureOut">
               <a:rPr lang="en-US" smtClean="0"/>
               <a:pPr/>
-              <a:t>9/26/2026</a:t>
+              <a:t>10/7/2026</a:t>
             </a:fld>
             <a:endParaRPr lang="en-US"/>
           </a:p>
@@ -3224,7 +3843,7 @@
             <a:fld id="{1D8BD707-D9CF-40AE-B4C6-C98DA3205C09}" type="datetimeFigureOut">
               <a:rPr lang="en-US" smtClean="0"/>
               <a:pPr/>
-              <a:t>9/26/2026</a:t>
+              <a:t>10/7/2026</a:t>
             </a:fld>
             <a:endParaRPr lang="en-US"/>
           </a:p>
@@ -4085,7 +4704,7 @@
         </p:nvSpPr>
         <p:spPr>
           <a:xfrm>
-            <a:off x="7734585" y="5220514"/>
+            <a:off x="7734584" y="5488694"/>
             <a:ext cx="3391892" cy="1727200"/>
           </a:xfrm>
           <a:prstGeom prst="rect">
@@ -4192,7 +4811,7 @@
         </p:nvSpPr>
         <p:spPr>
           <a:xfrm>
-            <a:off x="6312711" y="8522383"/>
+            <a:off x="6263142" y="8699842"/>
             <a:ext cx="6334777" cy="1461939"/>
           </a:xfrm>
           <a:prstGeom prst="rect">
@@ -4328,7 +4947,7 @@
         </p:nvSpPr>
         <p:spPr>
           <a:xfrm>
-            <a:off x="7295429" y="7142546"/>
+            <a:off x="7349732" y="7292046"/>
             <a:ext cx="4114252" cy="1407796"/>
           </a:xfrm>
           <a:custGeom>
@@ -9316,388 +9935,6 @@
         </p:nvSpPr>
         <p:spPr>
           <a:xfrm>
-            <a:off x="6189918" y="141605"/>
-            <a:ext cx="6154481" cy="936154"/>
-          </a:xfrm>
-          <a:prstGeom prst="rect">
-            <a:avLst/>
-          </a:prstGeom>
-        </p:spPr>
-        <p:txBody>
-          <a:bodyPr wrap="square" lIns="0" tIns="0" rIns="0" bIns="0" rtlCol="0" anchor="t">
-            <a:spAutoFit/>
-          </a:bodyPr>
-          <a:lstStyle/>
-          <a:p>
-            <a:pPr algn="ctr">
-              <a:lnSpc>
-                <a:spcPts val="7279"/>
-              </a:lnSpc>
-              <a:spcBef>
-                <a:spcPct val="0"/>
-              </a:spcBef>
-            </a:pPr>
-            <a:r>
-              <a:rPr lang="en-US" sz="5199" b="1" dirty="0">
-                <a:solidFill>
-                  <a:srgbClr val="FFFFFF"/>
-                </a:solidFill>
-                <a:latin typeface="Roca Two Bold"/>
-                <a:ea typeface="Roca Two Bold"/>
-                <a:cs typeface="Roca Two Bold"/>
-                <a:sym typeface="Roca Two Bold"/>
-              </a:rPr>
-              <a:t>Implementation</a:t>
-            </a:r>
-          </a:p>
-        </p:txBody>
-      </p:sp>
-      <p:sp>
-        <p:nvSpPr>
-          <p:cNvPr id="3" name="Freeform 3"/>
-          <p:cNvSpPr/>
-          <p:nvPr/>
-        </p:nvSpPr>
-        <p:spPr>
-          <a:xfrm>
-            <a:off x="0" y="-194638"/>
-            <a:ext cx="2881617" cy="1223338"/>
-          </a:xfrm>
-          <a:custGeom>
-            <a:avLst/>
-            <a:gdLst/>
-            <a:ahLst/>
-            <a:cxnLst/>
-            <a:rect l="l" t="t" r="r" b="b"/>
-            <a:pathLst>
-              <a:path w="2881617" h="1223338">
-                <a:moveTo>
-                  <a:pt x="0" y="0"/>
-                </a:moveTo>
-                <a:lnTo>
-                  <a:pt x="2881617" y="0"/>
-                </a:lnTo>
-                <a:lnTo>
-                  <a:pt x="2881617" y="1223338"/>
-                </a:lnTo>
-                <a:lnTo>
-                  <a:pt x="0" y="1223338"/>
-                </a:lnTo>
-                <a:lnTo>
-                  <a:pt x="0" y="0"/>
-                </a:lnTo>
-                <a:close/>
-              </a:path>
-            </a:pathLst>
-          </a:custGeom>
-          <a:blipFill>
-            <a:blip r:embed="rId2"/>
-            <a:stretch>
-              <a:fillRect t="-46829" b="-28253"/>
-            </a:stretch>
-          </a:blipFill>
-        </p:spPr>
-      </p:sp>
-      <p:sp>
-        <p:nvSpPr>
-          <p:cNvPr id="4" name="TextBox 4"/>
-          <p:cNvSpPr txBox="1"/>
-          <p:nvPr/>
-        </p:nvSpPr>
-        <p:spPr>
-          <a:xfrm>
-            <a:off x="152400" y="1572962"/>
-            <a:ext cx="17602200" cy="8502328"/>
-          </a:xfrm>
-          <a:prstGeom prst="rect">
-            <a:avLst/>
-          </a:prstGeom>
-        </p:spPr>
-        <p:txBody>
-          <a:bodyPr wrap="square" lIns="0" tIns="0" rIns="0" bIns="0" rtlCol="0" anchor="t">
-            <a:spAutoFit/>
-          </a:bodyPr>
-          <a:lstStyle/>
-          <a:p>
-            <a:pPr marL="604532" lvl="1" indent="-302266" algn="l">
-              <a:lnSpc>
-                <a:spcPts val="3920"/>
-              </a:lnSpc>
-              <a:buFont typeface="Arial"/>
-              <a:buChar char="•"/>
-            </a:pPr>
-            <a:r>
-              <a:rPr lang="en-US" sz="2800" b="1" dirty="0">
-                <a:solidFill>
-                  <a:srgbClr val="FFFFFF"/>
-                </a:solidFill>
-                <a:latin typeface="Roca Two Bold"/>
-                <a:ea typeface="Roca Two Bold"/>
-                <a:cs typeface="Roca Two Bold"/>
-                <a:sym typeface="Roca Two Bold"/>
-              </a:rPr>
-              <a:t>Generated Manufacturing Data: Created a simulated manufacturing dataset representing production, sensor, inventory, maintenance, and quality records.</a:t>
-            </a:r>
-          </a:p>
-          <a:p>
-            <a:pPr marL="604532" lvl="1" indent="-302266" algn="l">
-              <a:lnSpc>
-                <a:spcPts val="3920"/>
-              </a:lnSpc>
-              <a:buFont typeface="Arial"/>
-              <a:buChar char="•"/>
-            </a:pPr>
-            <a:r>
-              <a:rPr lang="en-US" sz="2800" b="1" dirty="0">
-                <a:solidFill>
-                  <a:srgbClr val="FFFFFF"/>
-                </a:solidFill>
-                <a:latin typeface="Roca Two Bold"/>
-                <a:ea typeface="Roca Two Bold"/>
-                <a:cs typeface="Roca Two Bold"/>
-                <a:sym typeface="Roca Two Bold"/>
-              </a:rPr>
-              <a:t>Local Data Ingestion: Used a </a:t>
-            </a:r>
-            <a:r>
-              <a:rPr lang="en-US" sz="2800" b="1" dirty="0" err="1">
-                <a:solidFill>
-                  <a:srgbClr val="FFFFFF"/>
-                </a:solidFill>
-                <a:latin typeface="Roca Two Bold"/>
-                <a:ea typeface="Roca Two Bold"/>
-                <a:cs typeface="Roca Two Bold"/>
-                <a:sym typeface="Roca Two Bold"/>
-              </a:rPr>
-              <a:t>FileBus</a:t>
-            </a:r>
-            <a:r>
-              <a:rPr lang="en-US" sz="2800" b="1" dirty="0">
-                <a:solidFill>
-                  <a:srgbClr val="FFFFFF"/>
-                </a:solidFill>
-                <a:latin typeface="Roca Two Bold"/>
-                <a:ea typeface="Roca Two Bold"/>
-                <a:cs typeface="Roca Two Bold"/>
-                <a:sym typeface="Roca Two Bold"/>
-              </a:rPr>
-              <a:t>-based topic simulation to represent how continuous data would be received through Kafka in the production environment.</a:t>
-            </a:r>
-          </a:p>
-          <a:p>
-            <a:pPr marL="604532" lvl="1" indent="-302266" algn="l">
-              <a:lnSpc>
-                <a:spcPts val="3920"/>
-              </a:lnSpc>
-              <a:buFont typeface="Arial"/>
-              <a:buChar char="•"/>
-            </a:pPr>
-            <a:r>
-              <a:rPr lang="en-US" sz="2800" b="1" dirty="0">
-                <a:solidFill>
-                  <a:srgbClr val="FFFFFF"/>
-                </a:solidFill>
-                <a:latin typeface="Roca Two Bold"/>
-                <a:ea typeface="Roca Two Bold"/>
-                <a:cs typeface="Roca Two Bold"/>
-                <a:sym typeface="Roca Two Bold"/>
-              </a:rPr>
-              <a:t>ETL Processing: Used Pandas to perform data extraction, cleaning, transformation, and preparation of manufacturing records.</a:t>
-            </a:r>
-          </a:p>
-          <a:p>
-            <a:pPr marL="604532" lvl="1" indent="-302266" algn="l">
-              <a:lnSpc>
-                <a:spcPts val="3920"/>
-              </a:lnSpc>
-              <a:buFont typeface="Arial"/>
-              <a:buChar char="•"/>
-            </a:pPr>
-            <a:r>
-              <a:rPr lang="en-US" sz="2800" b="1" dirty="0">
-                <a:solidFill>
-                  <a:srgbClr val="FFFFFF"/>
-                </a:solidFill>
-                <a:latin typeface="Roca Two Bold"/>
-                <a:ea typeface="Roca Two Bold"/>
-                <a:cs typeface="Roca Two Bold"/>
-                <a:sym typeface="Roca Two Bold"/>
-              </a:rPr>
-              <a:t>Data Quality Validation: Applied automated checks for missing, duplicate, inconsistent, and invalid records.</a:t>
-            </a:r>
-          </a:p>
-          <a:p>
-            <a:pPr marL="604532" lvl="1" indent="-302266" algn="l">
-              <a:lnSpc>
-                <a:spcPts val="3920"/>
-              </a:lnSpc>
-              <a:buFont typeface="Arial"/>
-              <a:buChar char="•"/>
-            </a:pPr>
-            <a:r>
-              <a:rPr lang="en-US" sz="2800" b="1" dirty="0">
-                <a:solidFill>
-                  <a:srgbClr val="FFFFFF"/>
-                </a:solidFill>
-                <a:latin typeface="Roca Two Bold"/>
-                <a:ea typeface="Roca Two Bold"/>
-                <a:cs typeface="Roca Two Bold"/>
-                <a:sym typeface="Roca Two Bold"/>
-              </a:rPr>
-              <a:t>Data Quarantine: Identified invalid records and separated them from valid data for further analysis.</a:t>
-            </a:r>
-          </a:p>
-          <a:p>
-            <a:pPr marL="604532" lvl="1" indent="-302266" algn="l">
-              <a:lnSpc>
-                <a:spcPts val="3920"/>
-              </a:lnSpc>
-              <a:buFont typeface="Arial"/>
-              <a:buChar char="•"/>
-            </a:pPr>
-            <a:r>
-              <a:rPr lang="en-US" sz="2800" b="1" dirty="0">
-                <a:solidFill>
-                  <a:srgbClr val="FFFFFF"/>
-                </a:solidFill>
-                <a:latin typeface="Roca Two Bold"/>
-                <a:ea typeface="Roca Two Bold"/>
-                <a:cs typeface="Roca Two Bold"/>
-                <a:sym typeface="Roca Two Bold"/>
-              </a:rPr>
-              <a:t>Local Data Storage: Used SQLite to store the cleaned and validated manufacturing data in the laptop demo.</a:t>
-            </a:r>
-          </a:p>
-          <a:p>
-            <a:pPr marL="604532" lvl="1" indent="-302266" algn="l">
-              <a:lnSpc>
-                <a:spcPts val="3920"/>
-              </a:lnSpc>
-              <a:buFont typeface="Arial"/>
-              <a:buChar char="•"/>
-            </a:pPr>
-            <a:r>
-              <a:rPr lang="en-US" sz="2800" b="1" dirty="0">
-                <a:solidFill>
-                  <a:srgbClr val="FFFFFF"/>
-                </a:solidFill>
-                <a:latin typeface="Roca Two Bold"/>
-                <a:ea typeface="Roca Two Bold"/>
-                <a:cs typeface="Roca Two Bold"/>
-                <a:sym typeface="Roca Two Bold"/>
-              </a:rPr>
-              <a:t>Quality Analysis: Compared data quality before and after ETL, showing improvement from 91.3% to 100% in the demonstrated results.</a:t>
-            </a:r>
-          </a:p>
-          <a:p>
-            <a:pPr marL="604532" lvl="1" indent="-302266" algn="l">
-              <a:lnSpc>
-                <a:spcPts val="3920"/>
-              </a:lnSpc>
-              <a:buFont typeface="Arial"/>
-              <a:buChar char="•"/>
-            </a:pPr>
-            <a:r>
-              <a:rPr lang="en-US" sz="2800" b="1" dirty="0">
-                <a:solidFill>
-                  <a:srgbClr val="FFFFFF"/>
-                </a:solidFill>
-                <a:latin typeface="Roca Two Bold"/>
-                <a:ea typeface="Roca Two Bold"/>
-                <a:cs typeface="Roca Two Bold"/>
-                <a:sym typeface="Roca Two Bold"/>
-              </a:rPr>
-              <a:t>Dashboard: Developed a dashboard to display quality scores, valid and quarantined records, source-wise quality improvement, and raw vs. cleaned data.</a:t>
-            </a:r>
-          </a:p>
-          <a:p>
-            <a:pPr marL="604532" lvl="1" indent="-302266" algn="l">
-              <a:lnSpc>
-                <a:spcPts val="3920"/>
-              </a:lnSpc>
-              <a:buFont typeface="Arial"/>
-              <a:buChar char="•"/>
-            </a:pPr>
-            <a:r>
-              <a:rPr lang="en-US" sz="2800" b="1" dirty="0">
-                <a:solidFill>
-                  <a:srgbClr val="FFFFFF"/>
-                </a:solidFill>
-                <a:latin typeface="Roca Two Bold"/>
-                <a:ea typeface="Roca Two Bold"/>
-                <a:cs typeface="Roca Two Bold"/>
-                <a:sym typeface="Roca Two Bold"/>
-              </a:rPr>
-              <a:t>Production Architecture: The same pipeline is designed to support Kafka → </a:t>
-            </a:r>
-            <a:r>
-              <a:rPr lang="en-US" sz="2800" b="1" dirty="0" err="1">
-                <a:solidFill>
-                  <a:srgbClr val="FFFFFF"/>
-                </a:solidFill>
-                <a:latin typeface="Roca Two Bold"/>
-                <a:ea typeface="Roca Two Bold"/>
-                <a:cs typeface="Roca Two Bold"/>
-                <a:sym typeface="Roca Two Bold"/>
-              </a:rPr>
-              <a:t>PySpark</a:t>
-            </a:r>
-            <a:r>
-              <a:rPr lang="en-US" sz="2800" b="1" dirty="0">
-                <a:solidFill>
-                  <a:srgbClr val="FFFFFF"/>
-                </a:solidFill>
-                <a:latin typeface="Roca Two Bold"/>
-                <a:ea typeface="Roca Two Bold"/>
-                <a:cs typeface="Roca Two Bold"/>
-                <a:sym typeface="Roca Two Bold"/>
-              </a:rPr>
-              <a:t> → Data Quality → MySQL when the required services are enabled.</a:t>
-            </a:r>
-          </a:p>
-        </p:txBody>
-      </p:sp>
-    </p:spTree>
-  </p:cSld>
-  <p:clrMapOvr>
-    <a:masterClrMapping/>
-  </p:clrMapOvr>
-</p:sld>
-</file>
-
-<file path=ppt/slides/slide16.xml><?xml version="1.0" encoding="utf-8"?>
-<p:sld xmlns:a="http://schemas.openxmlformats.org/drawingml/2006/main" xmlns:r="http://schemas.openxmlformats.org/officeDocument/2006/relationships" xmlns:p="http://schemas.openxmlformats.org/presentationml/2006/main">
-  <p:cSld>
-    <p:bg>
-      <p:bgPr>
-        <a:solidFill>
-          <a:srgbClr val="DC882D"/>
-        </a:solidFill>
-        <a:effectLst/>
-      </p:bgPr>
-    </p:bg>
-    <p:spTree>
-      <p:nvGrpSpPr>
-        <p:cNvPr id="1" name=""/>
-        <p:cNvGrpSpPr/>
-        <p:nvPr/>
-      </p:nvGrpSpPr>
-      <p:grpSpPr>
-        <a:xfrm>
-          <a:off x="0" y="0"/>
-          <a:ext cx="0" cy="0"/>
-          <a:chOff x="0" y="0"/>
-          <a:chExt cx="0" cy="0"/>
-        </a:xfrm>
-      </p:grpSpPr>
-      <p:sp>
-        <p:nvSpPr>
-          <p:cNvPr id="2" name="TextBox 2"/>
-          <p:cNvSpPr txBox="1"/>
-          <p:nvPr/>
-        </p:nvSpPr>
-        <p:spPr>
-          <a:xfrm>
             <a:off x="4808320" y="141605"/>
             <a:ext cx="9720835" cy="897682"/>
           </a:xfrm>
@@ -10388,6 +10625,523 @@
           </a:p>
         </p:txBody>
       </p:sp>
+      <p:sp>
+        <p:nvSpPr>
+          <p:cNvPr id="6" name="TextBox 5">
+            <a:extLst>
+              <a:ext uri="{FF2B5EF4-FFF2-40B4-BE49-F238E27FC236}">
+                <a16:creationId xmlns:a16="http://schemas.microsoft.com/office/drawing/2014/main" id="{8390F7D4-AEC8-C467-FCAB-1F7086E60B3E}"/>
+              </a:ext>
+            </a:extLst>
+          </p:cNvPr>
+          <p:cNvSpPr txBox="1"/>
+          <p:nvPr/>
+        </p:nvSpPr>
+        <p:spPr>
+          <a:xfrm>
+            <a:off x="1039660" y="5674290"/>
+            <a:ext cx="184731" cy="369332"/>
+          </a:xfrm>
+          <a:prstGeom prst="rect">
+            <a:avLst/>
+          </a:prstGeom>
+          <a:noFill/>
+        </p:spPr>
+        <p:txBody>
+          <a:bodyPr wrap="none" rtlCol="0">
+            <a:spAutoFit/>
+          </a:bodyPr>
+          <a:lstStyle/>
+          <a:p>
+            <a:endParaRPr lang="en-IN" dirty="0"/>
+          </a:p>
+        </p:txBody>
+      </p:sp>
+    </p:spTree>
+  </p:cSld>
+  <p:clrMapOvr>
+    <a:masterClrMapping/>
+  </p:clrMapOvr>
+</p:sld>
+</file>
+
+<file path=ppt/slides/slide16.xml><?xml version="1.0" encoding="utf-8"?>
+<p:sld xmlns:a="http://schemas.openxmlformats.org/drawingml/2006/main" xmlns:r="http://schemas.openxmlformats.org/officeDocument/2006/relationships" xmlns:p="http://schemas.openxmlformats.org/presentationml/2006/main">
+  <p:cSld>
+    <p:bg>
+      <p:bgPr>
+        <a:solidFill>
+          <a:srgbClr val="DC882D"/>
+        </a:solidFill>
+        <a:effectLst/>
+      </p:bgPr>
+    </p:bg>
+    <p:spTree>
+      <p:nvGrpSpPr>
+        <p:cNvPr id="1" name=""/>
+        <p:cNvGrpSpPr/>
+        <p:nvPr/>
+      </p:nvGrpSpPr>
+      <p:grpSpPr>
+        <a:xfrm>
+          <a:off x="0" y="0"/>
+          <a:ext cx="0" cy="0"/>
+          <a:chOff x="0" y="0"/>
+          <a:chExt cx="0" cy="0"/>
+        </a:xfrm>
+      </p:grpSpPr>
+      <p:sp>
+        <p:nvSpPr>
+          <p:cNvPr id="2" name="TextBox 2"/>
+          <p:cNvSpPr txBox="1"/>
+          <p:nvPr/>
+        </p:nvSpPr>
+        <p:spPr>
+          <a:xfrm>
+            <a:off x="562003" y="1080370"/>
+            <a:ext cx="17163994" cy="8359138"/>
+          </a:xfrm>
+          <a:prstGeom prst="rect">
+            <a:avLst/>
+          </a:prstGeom>
+        </p:spPr>
+        <p:txBody>
+          <a:bodyPr lIns="0" tIns="0" rIns="0" bIns="0" rtlCol="0" anchor="t">
+            <a:spAutoFit/>
+          </a:bodyPr>
+          <a:lstStyle/>
+          <a:p>
+            <a:pPr algn="just">
+              <a:lnSpc>
+                <a:spcPts val="3360"/>
+              </a:lnSpc>
+              <a:spcBef>
+                <a:spcPct val="0"/>
+              </a:spcBef>
+            </a:pPr>
+            <a:r>
+              <a:rPr lang="en-US" sz="2400" b="1" dirty="0">
+                <a:solidFill>
+                  <a:srgbClr val="FFFFFF"/>
+                </a:solidFill>
+                <a:latin typeface="Roca Two Bold"/>
+                <a:ea typeface="Roca Two Bold"/>
+                <a:cs typeface="Roca Two Bold"/>
+                <a:sym typeface="Roca Two Bold"/>
+              </a:rPr>
+              <a:t>Code Quality</a:t>
+            </a:r>
+          </a:p>
+          <a:p>
+            <a:pPr marL="518175" lvl="1" indent="-259087" algn="l">
+              <a:lnSpc>
+                <a:spcPts val="3360"/>
+              </a:lnSpc>
+              <a:buFont typeface="Arial"/>
+              <a:buChar char="•"/>
+            </a:pPr>
+            <a:r>
+              <a:rPr lang="en-US" sz="2400" b="1" dirty="0">
+                <a:solidFill>
+                  <a:srgbClr val="FFFFFF"/>
+                </a:solidFill>
+                <a:latin typeface="Roca Two Bold"/>
+                <a:ea typeface="Roca Two Bold"/>
+                <a:cs typeface="Roca Two Bold"/>
+                <a:sym typeface="Roca Two Bold"/>
+              </a:rPr>
+              <a:t>Modular Design: ETL, data quality, storage, and dashboard components are organized into separate modules for easier maintenance.</a:t>
+            </a:r>
+          </a:p>
+          <a:p>
+            <a:pPr marL="518175" lvl="1" indent="-259087" algn="l">
+              <a:lnSpc>
+                <a:spcPts val="3360"/>
+              </a:lnSpc>
+              <a:buFont typeface="Arial"/>
+              <a:buChar char="•"/>
+            </a:pPr>
+            <a:r>
+              <a:rPr lang="en-US" sz="2400" b="1" dirty="0">
+                <a:solidFill>
+                  <a:srgbClr val="FFFFFF"/>
+                </a:solidFill>
+                <a:latin typeface="Roca Two Bold"/>
+                <a:ea typeface="Roca Two Bold"/>
+                <a:cs typeface="Roca Two Bold"/>
+                <a:sym typeface="Roca Two Bold"/>
+              </a:rPr>
+              <a:t>Readable &amp; Structured Code: Clear naming, organized functions, and consistent coding practices are followed.</a:t>
+            </a:r>
+          </a:p>
+          <a:p>
+            <a:pPr marL="518175" lvl="1" indent="-259087" algn="l">
+              <a:lnSpc>
+                <a:spcPts val="3360"/>
+              </a:lnSpc>
+              <a:buFont typeface="Arial"/>
+              <a:buChar char="•"/>
+            </a:pPr>
+            <a:r>
+              <a:rPr lang="en-US" sz="2400" b="1" dirty="0">
+                <a:solidFill>
+                  <a:srgbClr val="FFFFFF"/>
+                </a:solidFill>
+                <a:latin typeface="Roca Two Bold"/>
+                <a:ea typeface="Roca Two Bold"/>
+                <a:cs typeface="Roca Two Bold"/>
+                <a:sym typeface="Roca Two Bold"/>
+              </a:rPr>
+              <a:t>Error Handling: Data validation and exception handling help manage missing, invalid, and inconsistent manufacturing data.</a:t>
+            </a:r>
+          </a:p>
+          <a:p>
+            <a:pPr marL="518175" lvl="1" indent="-259087" algn="l">
+              <a:lnSpc>
+                <a:spcPts val="3360"/>
+              </a:lnSpc>
+              <a:buFont typeface="Arial"/>
+              <a:buChar char="•"/>
+            </a:pPr>
+            <a:r>
+              <a:rPr lang="en-US" sz="2400" b="1" dirty="0">
+                <a:solidFill>
+                  <a:srgbClr val="FFFFFF"/>
+                </a:solidFill>
+                <a:latin typeface="Roca Two Bold"/>
+                <a:ea typeface="Roca Two Bold"/>
+                <a:cs typeface="Roca Two Bold"/>
+                <a:sym typeface="Roca Two Bold"/>
+              </a:rPr>
+              <a:t>Data Quality Checks: Automated validation rules are used to identify and separate invalid records from clean data.</a:t>
+            </a:r>
+          </a:p>
+          <a:p>
+            <a:pPr marL="518175" lvl="1" indent="-259087" algn="l">
+              <a:lnSpc>
+                <a:spcPts val="3360"/>
+              </a:lnSpc>
+              <a:buFont typeface="Arial"/>
+              <a:buChar char="•"/>
+            </a:pPr>
+            <a:r>
+              <a:rPr lang="en-US" sz="2400" b="1" dirty="0">
+                <a:solidFill>
+                  <a:srgbClr val="FFFFFF"/>
+                </a:solidFill>
+                <a:latin typeface="Roca Two Bold"/>
+                <a:ea typeface="Roca Two Bold"/>
+                <a:cs typeface="Roca Two Bold"/>
+                <a:sym typeface="Roca Two Bold"/>
+              </a:rPr>
+              <a:t>Version Control: Git is used for tracking code changes and managing project development.</a:t>
+            </a:r>
+          </a:p>
+          <a:p>
+            <a:pPr algn="l">
+              <a:lnSpc>
+                <a:spcPts val="3360"/>
+              </a:lnSpc>
+            </a:pPr>
+            <a:endParaRPr lang="en-US" sz="2400" b="1" dirty="0">
+              <a:solidFill>
+                <a:srgbClr val="FFFFFF"/>
+              </a:solidFill>
+              <a:latin typeface="Roca Two Bold"/>
+              <a:ea typeface="Roca Two Bold"/>
+              <a:cs typeface="Roca Two Bold"/>
+              <a:sym typeface="Roca Two Bold"/>
+            </a:endParaRPr>
+          </a:p>
+          <a:p>
+            <a:pPr algn="l">
+              <a:lnSpc>
+                <a:spcPts val="3360"/>
+              </a:lnSpc>
+            </a:pPr>
+            <a:r>
+              <a:rPr lang="en-US" sz="2400" b="1" dirty="0">
+                <a:solidFill>
+                  <a:srgbClr val="FFFFFF"/>
+                </a:solidFill>
+                <a:latin typeface="Roca Two Bold"/>
+                <a:ea typeface="Roca Two Bold"/>
+                <a:cs typeface="Roca Two Bold"/>
+                <a:sym typeface="Roca Two Bold"/>
+              </a:rPr>
+              <a:t>Functionality</a:t>
+            </a:r>
+          </a:p>
+          <a:p>
+            <a:pPr marL="518175" lvl="1" indent="-259087" algn="l">
+              <a:lnSpc>
+                <a:spcPts val="3360"/>
+              </a:lnSpc>
+              <a:buFont typeface="Arial"/>
+              <a:buChar char="•"/>
+            </a:pPr>
+            <a:r>
+              <a:rPr lang="en-US" sz="2400" b="1" dirty="0">
+                <a:solidFill>
+                  <a:srgbClr val="FFFFFF"/>
+                </a:solidFill>
+                <a:latin typeface="Roca Two Bold"/>
+                <a:ea typeface="Roca Two Bold"/>
+                <a:cs typeface="Roca Two Bold"/>
+                <a:sym typeface="Roca Two Bold"/>
+              </a:rPr>
+              <a:t>Data Generation: Simulated manufacturing data is generated to represent production, sensor, inventory, maintenance, and quality records.</a:t>
+            </a:r>
+          </a:p>
+          <a:p>
+            <a:pPr marL="518175" lvl="1" indent="-259087" algn="l">
+              <a:lnSpc>
+                <a:spcPts val="3360"/>
+              </a:lnSpc>
+              <a:buFont typeface="Arial"/>
+              <a:buChar char="•"/>
+            </a:pPr>
+            <a:r>
+              <a:rPr lang="en-US" sz="2400" b="1" dirty="0">
+                <a:solidFill>
+                  <a:srgbClr val="FFFFFF"/>
+                </a:solidFill>
+                <a:latin typeface="Roca Two Bold"/>
+                <a:ea typeface="Roca Two Bold"/>
+                <a:cs typeface="Roca Two Bold"/>
+                <a:sym typeface="Roca Two Bold"/>
+              </a:rPr>
+              <a:t>Local Data Ingestion: </a:t>
+            </a:r>
+            <a:r>
+              <a:rPr lang="en-US" sz="2400" b="1" dirty="0" err="1">
+                <a:solidFill>
+                  <a:srgbClr val="FFFFFF"/>
+                </a:solidFill>
+                <a:latin typeface="Roca Two Bold"/>
+                <a:ea typeface="Roca Two Bold"/>
+                <a:cs typeface="Roca Two Bold"/>
+                <a:sym typeface="Roca Two Bold"/>
+              </a:rPr>
+              <a:t>FileBus</a:t>
+            </a:r>
+            <a:r>
+              <a:rPr lang="en-US" sz="2400" b="1" dirty="0">
+                <a:solidFill>
+                  <a:srgbClr val="FFFFFF"/>
+                </a:solidFill>
+                <a:latin typeface="Roca Two Bold"/>
+                <a:ea typeface="Roca Two Bold"/>
+                <a:cs typeface="Roca Two Bold"/>
+                <a:sym typeface="Roca Two Bold"/>
+              </a:rPr>
+              <a:t> is used to simulate the streaming/topic layer for the laptop demonstration.</a:t>
+            </a:r>
+          </a:p>
+          <a:p>
+            <a:pPr marL="518175" lvl="1" indent="-259087" algn="l">
+              <a:lnSpc>
+                <a:spcPts val="3360"/>
+              </a:lnSpc>
+              <a:buFont typeface="Arial"/>
+              <a:buChar char="•"/>
+            </a:pPr>
+            <a:r>
+              <a:rPr lang="en-US" sz="2400" b="1" dirty="0">
+                <a:solidFill>
+                  <a:srgbClr val="FFFFFF"/>
+                </a:solidFill>
+                <a:latin typeface="Roca Two Bold"/>
+                <a:ea typeface="Roca Two Bold"/>
+                <a:cs typeface="Roca Two Bold"/>
+                <a:sym typeface="Roca Two Bold"/>
+              </a:rPr>
+              <a:t>ETL Processing: Pandas performs data cleaning, transformation, validation, and preparation.</a:t>
+            </a:r>
+          </a:p>
+          <a:p>
+            <a:pPr marL="518175" lvl="1" indent="-259087" algn="l">
+              <a:lnSpc>
+                <a:spcPts val="3360"/>
+              </a:lnSpc>
+              <a:buFont typeface="Arial"/>
+              <a:buChar char="•"/>
+            </a:pPr>
+            <a:r>
+              <a:rPr lang="en-US" sz="2400" b="1" dirty="0">
+                <a:solidFill>
+                  <a:srgbClr val="FFFFFF"/>
+                </a:solidFill>
+                <a:latin typeface="Roca Two Bold"/>
+                <a:ea typeface="Roca Two Bold"/>
+                <a:cs typeface="Roca Two Bold"/>
+                <a:sym typeface="Roca Two Bold"/>
+              </a:rPr>
+              <a:t>Data Quality Validation: Quality checks identify missing, duplicate, inconsistent, and invalid records.</a:t>
+            </a:r>
+          </a:p>
+          <a:p>
+            <a:pPr marL="518175" lvl="1" indent="-259087" algn="l">
+              <a:lnSpc>
+                <a:spcPts val="3360"/>
+              </a:lnSpc>
+              <a:buFont typeface="Arial"/>
+              <a:buChar char="•"/>
+            </a:pPr>
+            <a:r>
+              <a:rPr lang="en-US" sz="2400" b="1" dirty="0">
+                <a:solidFill>
+                  <a:srgbClr val="FFFFFF"/>
+                </a:solidFill>
+                <a:latin typeface="Roca Two Bold"/>
+                <a:ea typeface="Roca Two Bold"/>
+                <a:cs typeface="Roca Two Bold"/>
+                <a:sym typeface="Roca Two Bold"/>
+              </a:rPr>
+              <a:t>Data Quarantine: Invalid records are separated while valid records are retained for further processing.</a:t>
+            </a:r>
+          </a:p>
+          <a:p>
+            <a:pPr marL="518175" lvl="1" indent="-259087" algn="l">
+              <a:lnSpc>
+                <a:spcPts val="3360"/>
+              </a:lnSpc>
+              <a:buFont typeface="Arial"/>
+              <a:buChar char="•"/>
+            </a:pPr>
+            <a:r>
+              <a:rPr lang="en-US" sz="2400" b="1" dirty="0">
+                <a:solidFill>
+                  <a:srgbClr val="FFFFFF"/>
+                </a:solidFill>
+                <a:latin typeface="Roca Two Bold"/>
+                <a:ea typeface="Roca Two Bold"/>
+                <a:cs typeface="Roca Two Bold"/>
+                <a:sym typeface="Roca Two Bold"/>
+              </a:rPr>
+              <a:t>Data Storage: SQLite stores the cleaned and validated manufacturing data in the local demo.</a:t>
+            </a:r>
+          </a:p>
+          <a:p>
+            <a:pPr marL="518175" lvl="1" indent="-259087" algn="l">
+              <a:lnSpc>
+                <a:spcPts val="3360"/>
+              </a:lnSpc>
+              <a:buFont typeface="Arial"/>
+              <a:buChar char="•"/>
+            </a:pPr>
+            <a:r>
+              <a:rPr lang="en-US" sz="2400" b="1" dirty="0">
+                <a:solidFill>
+                  <a:srgbClr val="FFFFFF"/>
+                </a:solidFill>
+                <a:latin typeface="Roca Two Bold"/>
+                <a:ea typeface="Roca Two Bold"/>
+                <a:cs typeface="Roca Two Bold"/>
+                <a:sym typeface="Roca Two Bold"/>
+              </a:rPr>
+              <a:t>Dashboard: Displays quality improvement, valid and quarantined records, source-wise results, and raw vs. cleaned data.</a:t>
+            </a:r>
+          </a:p>
+          <a:p>
+            <a:pPr marL="518175" lvl="1" indent="-259087" algn="l">
+              <a:lnSpc>
+                <a:spcPts val="3360"/>
+              </a:lnSpc>
+              <a:buFont typeface="Arial"/>
+              <a:buChar char="•"/>
+            </a:pPr>
+            <a:r>
+              <a:rPr lang="en-US" sz="2400" b="1" dirty="0">
+                <a:solidFill>
+                  <a:srgbClr val="FFFFFF"/>
+                </a:solidFill>
+                <a:latin typeface="Roca Two Bold"/>
+                <a:ea typeface="Roca Two Bold"/>
+                <a:cs typeface="Roca Two Bold"/>
+                <a:sym typeface="Roca Two Bold"/>
+              </a:rPr>
+              <a:t>Production Scalability: The architecture can be extended to Kafka, </a:t>
+            </a:r>
+            <a:r>
+              <a:rPr lang="en-US" sz="2400" b="1" dirty="0" err="1">
+                <a:solidFill>
+                  <a:srgbClr val="FFFFFF"/>
+                </a:solidFill>
+                <a:latin typeface="Roca Two Bold"/>
+                <a:ea typeface="Roca Two Bold"/>
+                <a:cs typeface="Roca Two Bold"/>
+                <a:sym typeface="Roca Two Bold"/>
+              </a:rPr>
+              <a:t>PySpark</a:t>
+            </a:r>
+            <a:r>
+              <a:rPr lang="en-US" sz="2400" b="1" dirty="0">
+                <a:solidFill>
+                  <a:srgbClr val="FFFFFF"/>
+                </a:solidFill>
+                <a:latin typeface="Roca Two Bold"/>
+                <a:ea typeface="Roca Two Bold"/>
+                <a:cs typeface="Roca Two Bold"/>
+                <a:sym typeface="Roca Two Bold"/>
+              </a:rPr>
+              <a:t>, and MySQL for full deployment.</a:t>
+            </a:r>
+          </a:p>
+        </p:txBody>
+      </p:sp>
+      <p:sp>
+        <p:nvSpPr>
+          <p:cNvPr id="4" name="Freeform 3">
+            <a:extLst>
+              <a:ext uri="{FF2B5EF4-FFF2-40B4-BE49-F238E27FC236}">
+                <a16:creationId xmlns:a16="http://schemas.microsoft.com/office/drawing/2014/main" id="{3024480B-3B86-7093-09E4-464EF101E96D}"/>
+              </a:ext>
+            </a:extLst>
+          </p:cNvPr>
+          <p:cNvSpPr/>
+          <p:nvPr/>
+        </p:nvSpPr>
+        <p:spPr>
+          <a:xfrm>
+            <a:off x="0" y="-194638"/>
+            <a:ext cx="2881617" cy="1223338"/>
+          </a:xfrm>
+          <a:custGeom>
+            <a:avLst/>
+            <a:gdLst/>
+            <a:ahLst/>
+            <a:cxnLst/>
+            <a:rect l="l" t="t" r="r" b="b"/>
+            <a:pathLst>
+              <a:path w="2881617" h="1223338">
+                <a:moveTo>
+                  <a:pt x="0" y="0"/>
+                </a:moveTo>
+                <a:lnTo>
+                  <a:pt x="2881617" y="0"/>
+                </a:lnTo>
+                <a:lnTo>
+                  <a:pt x="2881617" y="1223338"/>
+                </a:lnTo>
+                <a:lnTo>
+                  <a:pt x="0" y="1223338"/>
+                </a:lnTo>
+                <a:lnTo>
+                  <a:pt x="0" y="0"/>
+                </a:lnTo>
+                <a:close/>
+              </a:path>
+            </a:pathLst>
+          </a:custGeom>
+          <a:blipFill>
+            <a:blip r:embed="rId2"/>
+            <a:stretch>
+              <a:fillRect t="-46829" b="-28253"/>
+            </a:stretch>
+          </a:blipFill>
+        </p:spPr>
+      </p:sp>
     </p:spTree>
   </p:cSld>
   <p:clrMapOvr>
@@ -10397,6 +11151,1725 @@
 </file>
 
 <file path=ppt/slides/slide17.xml><?xml version="1.0" encoding="utf-8"?>
+<p:sld xmlns:a="http://schemas.openxmlformats.org/drawingml/2006/main" xmlns:r="http://schemas.openxmlformats.org/officeDocument/2006/relationships" xmlns:p="http://schemas.openxmlformats.org/presentationml/2006/main">
+  <p:cSld>
+    <p:spTree>
+      <p:nvGrpSpPr>
+        <p:cNvPr id="1" name=""/>
+        <p:cNvGrpSpPr/>
+        <p:nvPr/>
+      </p:nvGrpSpPr>
+      <p:grpSpPr>
+        <a:xfrm>
+          <a:off x="0" y="0"/>
+          <a:ext cx="0" cy="0"/>
+          <a:chOff x="0" y="0"/>
+          <a:chExt cx="0" cy="0"/>
+        </a:xfrm>
+      </p:grpSpPr>
+      <p:sp>
+        <p:nvSpPr>
+          <p:cNvPr id="3" name="Freeform 3">
+            <a:extLst>
+              <a:ext uri="{FF2B5EF4-FFF2-40B4-BE49-F238E27FC236}">
+                <a16:creationId xmlns:a16="http://schemas.microsoft.com/office/drawing/2014/main" id="{7E16835B-6E62-F334-88CE-C43E8817D6A2}"/>
+              </a:ext>
+            </a:extLst>
+          </p:cNvPr>
+          <p:cNvSpPr/>
+          <p:nvPr/>
+        </p:nvSpPr>
+        <p:spPr>
+          <a:xfrm>
+            <a:off x="0" y="-194638"/>
+            <a:ext cx="2881617" cy="1223338"/>
+          </a:xfrm>
+          <a:custGeom>
+            <a:avLst/>
+            <a:gdLst/>
+            <a:ahLst/>
+            <a:cxnLst/>
+            <a:rect l="l" t="t" r="r" b="b"/>
+            <a:pathLst>
+              <a:path w="2881617" h="1223338">
+                <a:moveTo>
+                  <a:pt x="0" y="0"/>
+                </a:moveTo>
+                <a:lnTo>
+                  <a:pt x="2881617" y="0"/>
+                </a:lnTo>
+                <a:lnTo>
+                  <a:pt x="2881617" y="1223338"/>
+                </a:lnTo>
+                <a:lnTo>
+                  <a:pt x="0" y="1223338"/>
+                </a:lnTo>
+                <a:lnTo>
+                  <a:pt x="0" y="0"/>
+                </a:lnTo>
+                <a:close/>
+              </a:path>
+            </a:pathLst>
+          </a:custGeom>
+          <a:blipFill>
+            <a:blip r:embed="rId2"/>
+            <a:stretch>
+              <a:fillRect t="-46829" b="-28253"/>
+            </a:stretch>
+          </a:blipFill>
+        </p:spPr>
+      </p:sp>
+      <p:pic>
+        <p:nvPicPr>
+          <p:cNvPr id="4" name="Picture 3">
+            <a:extLst>
+              <a:ext uri="{FF2B5EF4-FFF2-40B4-BE49-F238E27FC236}">
+                <a16:creationId xmlns:a16="http://schemas.microsoft.com/office/drawing/2014/main" id="{9171A4BC-5FC7-C007-54A3-82771F0C400C}"/>
+              </a:ext>
+            </a:extLst>
+          </p:cNvPr>
+          <p:cNvPicPr>
+            <a:picLocks noChangeAspect="1"/>
+          </p:cNvPicPr>
+          <p:nvPr/>
+        </p:nvPicPr>
+        <p:blipFill>
+          <a:blip r:embed="rId3"/>
+          <a:stretch>
+            <a:fillRect/>
+          </a:stretch>
+        </p:blipFill>
+        <p:spPr>
+          <a:xfrm>
+            <a:off x="1262062" y="1238250"/>
+            <a:ext cx="15763875" cy="9048750"/>
+          </a:xfrm>
+          <a:prstGeom prst="rect">
+            <a:avLst/>
+          </a:prstGeom>
+        </p:spPr>
+      </p:pic>
+    </p:spTree>
+    <p:extLst>
+      <p:ext uri="{BB962C8B-B14F-4D97-AF65-F5344CB8AC3E}">
+        <p14:creationId xmlns:p14="http://schemas.microsoft.com/office/powerpoint/2010/main" val="385810571"/>
+      </p:ext>
+    </p:extLst>
+  </p:cSld>
+  <p:clrMapOvr>
+    <a:masterClrMapping/>
+  </p:clrMapOvr>
+</p:sld>
+</file>
+
+<file path=ppt/slides/slide18.xml><?xml version="1.0" encoding="utf-8"?>
+<p:sld xmlns:a="http://schemas.openxmlformats.org/drawingml/2006/main" xmlns:r="http://schemas.openxmlformats.org/officeDocument/2006/relationships" xmlns:p="http://schemas.openxmlformats.org/presentationml/2006/main">
+  <p:cSld>
+    <p:bg>
+      <p:bgPr>
+        <a:solidFill>
+          <a:srgbClr val="DC882D"/>
+        </a:solidFill>
+        <a:effectLst/>
+      </p:bgPr>
+    </p:bg>
+    <p:spTree>
+      <p:nvGrpSpPr>
+        <p:cNvPr id="1" name="">
+          <a:extLst>
+            <a:ext uri="{FF2B5EF4-FFF2-40B4-BE49-F238E27FC236}">
+              <a16:creationId xmlns:a16="http://schemas.microsoft.com/office/drawing/2014/main" id="{7585EDB7-DBD0-7767-84EA-50B0BE08BD4A}"/>
+            </a:ext>
+          </a:extLst>
+        </p:cNvPr>
+        <p:cNvGrpSpPr/>
+        <p:nvPr/>
+      </p:nvGrpSpPr>
+      <p:grpSpPr>
+        <a:xfrm>
+          <a:off x="0" y="0"/>
+          <a:ext cx="0" cy="0"/>
+          <a:chOff x="0" y="0"/>
+          <a:chExt cx="0" cy="0"/>
+        </a:xfrm>
+      </p:grpSpPr>
+      <p:sp>
+        <p:nvSpPr>
+          <p:cNvPr id="2" name="TextBox 2">
+            <a:extLst>
+              <a:ext uri="{FF2B5EF4-FFF2-40B4-BE49-F238E27FC236}">
+                <a16:creationId xmlns:a16="http://schemas.microsoft.com/office/drawing/2014/main" id="{7BF225D1-EC6E-430D-C5C0-935AE30A3ADF}"/>
+              </a:ext>
+            </a:extLst>
+          </p:cNvPr>
+          <p:cNvSpPr txBox="1"/>
+          <p:nvPr/>
+        </p:nvSpPr>
+        <p:spPr>
+          <a:xfrm>
+            <a:off x="562003" y="800100"/>
+            <a:ext cx="17163994" cy="897682"/>
+          </a:xfrm>
+          <a:prstGeom prst="rect">
+            <a:avLst/>
+          </a:prstGeom>
+        </p:spPr>
+        <p:txBody>
+          <a:bodyPr lIns="0" tIns="0" rIns="0" bIns="0" rtlCol="0" anchor="t">
+            <a:spAutoFit/>
+          </a:bodyPr>
+          <a:lstStyle/>
+          <a:p>
+            <a:pPr algn="ctr">
+              <a:lnSpc>
+                <a:spcPts val="3360"/>
+              </a:lnSpc>
+              <a:spcBef>
+                <a:spcPct val="0"/>
+              </a:spcBef>
+            </a:pPr>
+            <a:r>
+              <a:rPr lang="en-US" sz="3200" b="1" dirty="0">
+                <a:solidFill>
+                  <a:srgbClr val="FFFFFF"/>
+                </a:solidFill>
+                <a:latin typeface="Roca Two" panose="020B0604020202020204" charset="0"/>
+                <a:ea typeface="Calibri" pitchFamily="34" charset="-122"/>
+                <a:cs typeface="Calibri" pitchFamily="34" charset="-120"/>
+              </a:rPr>
+              <a:t>Comparison: Existing Approach vs </a:t>
+            </a:r>
+            <a:r>
+              <a:rPr lang="en-US" sz="3200" b="1" dirty="0" err="1">
+                <a:solidFill>
+                  <a:srgbClr val="FFFFFF"/>
+                </a:solidFill>
+                <a:latin typeface="Roca Two" panose="020B0604020202020204" charset="0"/>
+                <a:ea typeface="Calibri" pitchFamily="34" charset="-122"/>
+                <a:cs typeface="Calibri" pitchFamily="34" charset="-120"/>
+              </a:rPr>
+              <a:t>DataForge</a:t>
+            </a:r>
+            <a:endParaRPr lang="en-US" sz="3200" dirty="0">
+              <a:latin typeface="Roca Two" panose="020B0604020202020204" charset="0"/>
+            </a:endParaRPr>
+          </a:p>
+          <a:p>
+            <a:pPr algn="just">
+              <a:lnSpc>
+                <a:spcPts val="3360"/>
+              </a:lnSpc>
+              <a:spcBef>
+                <a:spcPct val="0"/>
+              </a:spcBef>
+            </a:pPr>
+            <a:endParaRPr lang="en-US" sz="2400" b="1" dirty="0">
+              <a:solidFill>
+                <a:srgbClr val="FFFFFF"/>
+              </a:solidFill>
+              <a:latin typeface="Roca Two Bold"/>
+              <a:ea typeface="Roca Two Bold"/>
+              <a:cs typeface="Roca Two Bold"/>
+              <a:sym typeface="Roca Two Bold"/>
+            </a:endParaRPr>
+          </a:p>
+        </p:txBody>
+      </p:sp>
+      <p:graphicFrame>
+        <p:nvGraphicFramePr>
+          <p:cNvPr id="3" name="Table 2">
+            <a:extLst>
+              <a:ext uri="{FF2B5EF4-FFF2-40B4-BE49-F238E27FC236}">
+                <a16:creationId xmlns:a16="http://schemas.microsoft.com/office/drawing/2014/main" id="{14FFB5E1-1EBA-9EFB-9F8B-6D88E2EC76BC}"/>
+              </a:ext>
+            </a:extLst>
+          </p:cNvPr>
+          <p:cNvGraphicFramePr>
+            <a:graphicFrameLocks noGrp="1"/>
+          </p:cNvGraphicFramePr>
+          <p:nvPr>
+            <p:extLst>
+              <p:ext uri="{D42A27DB-BD31-4B8C-83A1-F6EECF244321}">
+                <p14:modId xmlns:p14="http://schemas.microsoft.com/office/powerpoint/2010/main" val="4294392942"/>
+              </p:ext>
+            </p:extLst>
+          </p:nvPr>
+        </p:nvGraphicFramePr>
+        <p:xfrm>
+          <a:off x="1295400" y="2476500"/>
+          <a:ext cx="16154400" cy="5913120"/>
+        </p:xfrm>
+        <a:graphic>
+          <a:graphicData uri="http://schemas.openxmlformats.org/drawingml/2006/table">
+            <a:tbl>
+              <a:tblPr/>
+              <a:tblGrid>
+                <a:gridCol w="2952882">
+                  <a:extLst>
+                    <a:ext uri="{9D8B030D-6E8A-4147-A177-3AD203B41FA5}">
+                      <a16:colId xmlns:a16="http://schemas.microsoft.com/office/drawing/2014/main" val="828260347"/>
+                    </a:ext>
+                  </a:extLst>
+                </a:gridCol>
+                <a:gridCol w="2952882">
+                  <a:extLst>
+                    <a:ext uri="{9D8B030D-6E8A-4147-A177-3AD203B41FA5}">
+                      <a16:colId xmlns:a16="http://schemas.microsoft.com/office/drawing/2014/main" val="3602171664"/>
+                    </a:ext>
+                  </a:extLst>
+                </a:gridCol>
+                <a:gridCol w="3085836">
+                  <a:extLst>
+                    <a:ext uri="{9D8B030D-6E8A-4147-A177-3AD203B41FA5}">
+                      <a16:colId xmlns:a16="http://schemas.microsoft.com/office/drawing/2014/main" val="3755862501"/>
+                    </a:ext>
+                  </a:extLst>
+                </a:gridCol>
+                <a:gridCol w="3581400">
+                  <a:extLst>
+                    <a:ext uri="{9D8B030D-6E8A-4147-A177-3AD203B41FA5}">
+                      <a16:colId xmlns:a16="http://schemas.microsoft.com/office/drawing/2014/main" val="428045263"/>
+                    </a:ext>
+                  </a:extLst>
+                </a:gridCol>
+                <a:gridCol w="3581400">
+                  <a:extLst>
+                    <a:ext uri="{9D8B030D-6E8A-4147-A177-3AD203B41FA5}">
+                      <a16:colId xmlns:a16="http://schemas.microsoft.com/office/drawing/2014/main" val="2504184529"/>
+                    </a:ext>
+                  </a:extLst>
+                </a:gridCol>
+              </a:tblGrid>
+              <a:tr h="489446">
+                <a:tc>
+                  <a:txBody>
+                    <a:bodyPr/>
+                    <a:lstStyle/>
+                    <a:p>
+                      <a:pPr algn="l">
+                        <a:lnSpc>
+                          <a:spcPct val="150000"/>
+                        </a:lnSpc>
+                        <a:buNone/>
+                      </a:pPr>
+                      <a:r>
+                        <a:rPr lang="en-IN" sz="2800" b="1">
+                          <a:solidFill>
+                            <a:schemeClr val="bg2"/>
+                          </a:solidFill>
+                          <a:latin typeface="Roca Two" panose="020B0604020202020204" charset="0"/>
+                        </a:rPr>
+                        <a:t>Performance Metric</a:t>
+                      </a:r>
+                      <a:endParaRPr lang="en-IN" sz="2800">
+                        <a:solidFill>
+                          <a:schemeClr val="bg2"/>
+                        </a:solidFill>
+                        <a:latin typeface="Roca Two" panose="020B0604020202020204" charset="0"/>
+                      </a:endParaRPr>
+                    </a:p>
+                  </a:txBody>
+                  <a:tcPr anchor="ctr">
+                    <a:lnL w="12700" cap="flat" cmpd="sng" algn="ctr">
+                      <a:solidFill>
+                        <a:srgbClr val="000000"/>
+                      </a:solidFill>
+                      <a:prstDash val="solid"/>
+                      <a:round/>
+                      <a:headEnd type="none" w="med" len="med"/>
+                      <a:tailEnd type="none" w="med" len="med"/>
+                    </a:lnL>
+                    <a:lnR w="12700" cap="flat" cmpd="sng" algn="ctr">
+                      <a:solidFill>
+                        <a:srgbClr val="000000"/>
+                      </a:solidFill>
+                      <a:prstDash val="solid"/>
+                      <a:round/>
+                      <a:headEnd type="none" w="med" len="med"/>
+                      <a:tailEnd type="none" w="med" len="med"/>
+                    </a:lnR>
+                    <a:lnT w="12700" cap="flat" cmpd="sng" algn="ctr">
+                      <a:solidFill>
+                        <a:srgbClr val="000000"/>
+                      </a:solidFill>
+                      <a:prstDash val="solid"/>
+                      <a:round/>
+                      <a:headEnd type="none" w="med" len="med"/>
+                      <a:tailEnd type="none" w="med" len="med"/>
+                    </a:lnT>
+                    <a:lnB w="12700" cap="flat" cmpd="sng" algn="ctr">
+                      <a:solidFill>
+                        <a:srgbClr val="000000"/>
+                      </a:solidFill>
+                      <a:prstDash val="solid"/>
+                      <a:round/>
+                      <a:headEnd type="none" w="med" len="med"/>
+                      <a:tailEnd type="none" w="med" len="med"/>
+                    </a:lnB>
+                  </a:tcPr>
+                </a:tc>
+                <a:tc>
+                  <a:txBody>
+                    <a:bodyPr/>
+                    <a:lstStyle/>
+                    <a:p>
+                      <a:pPr algn="l">
+                        <a:lnSpc>
+                          <a:spcPct val="150000"/>
+                        </a:lnSpc>
+                        <a:buNone/>
+                      </a:pPr>
+                      <a:r>
+                        <a:rPr lang="en-IN" sz="2800" b="1">
+                          <a:solidFill>
+                            <a:schemeClr val="bg2"/>
+                          </a:solidFill>
+                          <a:latin typeface="Roca Two" panose="020B0604020202020204" charset="0"/>
+                        </a:rPr>
+                        <a:t>Existing Approach</a:t>
+                      </a:r>
+                      <a:endParaRPr lang="en-IN" sz="2800">
+                        <a:solidFill>
+                          <a:schemeClr val="bg2"/>
+                        </a:solidFill>
+                        <a:latin typeface="Roca Two" panose="020B0604020202020204" charset="0"/>
+                      </a:endParaRPr>
+                    </a:p>
+                  </a:txBody>
+                  <a:tcPr anchor="ctr">
+                    <a:lnL w="12700" cap="flat" cmpd="sng" algn="ctr">
+                      <a:solidFill>
+                        <a:srgbClr val="000000"/>
+                      </a:solidFill>
+                      <a:prstDash val="solid"/>
+                      <a:round/>
+                      <a:headEnd type="none" w="med" len="med"/>
+                      <a:tailEnd type="none" w="med" len="med"/>
+                    </a:lnL>
+                    <a:lnR w="12700" cap="flat" cmpd="sng" algn="ctr">
+                      <a:solidFill>
+                        <a:srgbClr val="000000"/>
+                      </a:solidFill>
+                      <a:prstDash val="solid"/>
+                      <a:round/>
+                      <a:headEnd type="none" w="med" len="med"/>
+                      <a:tailEnd type="none" w="med" len="med"/>
+                    </a:lnR>
+                    <a:lnT w="12700" cap="flat" cmpd="sng" algn="ctr">
+                      <a:solidFill>
+                        <a:srgbClr val="000000"/>
+                      </a:solidFill>
+                      <a:prstDash val="solid"/>
+                      <a:round/>
+                      <a:headEnd type="none" w="med" len="med"/>
+                      <a:tailEnd type="none" w="med" len="med"/>
+                    </a:lnT>
+                    <a:lnB w="12700" cap="flat" cmpd="sng" algn="ctr">
+                      <a:solidFill>
+                        <a:srgbClr val="000000"/>
+                      </a:solidFill>
+                      <a:prstDash val="solid"/>
+                      <a:round/>
+                      <a:headEnd type="none" w="med" len="med"/>
+                      <a:tailEnd type="none" w="med" len="med"/>
+                    </a:lnB>
+                  </a:tcPr>
+                </a:tc>
+                <a:tc>
+                  <a:txBody>
+                    <a:bodyPr/>
+                    <a:lstStyle/>
+                    <a:p>
+                      <a:pPr algn="l">
+                        <a:lnSpc>
+                          <a:spcPct val="150000"/>
+                        </a:lnSpc>
+                        <a:buNone/>
+                      </a:pPr>
+                      <a:r>
+                        <a:rPr lang="en-IN" sz="2800" b="1">
+                          <a:solidFill>
+                            <a:schemeClr val="bg2"/>
+                          </a:solidFill>
+                          <a:latin typeface="Roca Two" panose="020B0604020202020204" charset="0"/>
+                        </a:rPr>
+                        <a:t>DataForge</a:t>
+                      </a:r>
+                      <a:endParaRPr lang="en-IN" sz="2800">
+                        <a:solidFill>
+                          <a:schemeClr val="bg2"/>
+                        </a:solidFill>
+                        <a:latin typeface="Roca Two" panose="020B0604020202020204" charset="0"/>
+                      </a:endParaRPr>
+                    </a:p>
+                  </a:txBody>
+                  <a:tcPr anchor="ctr">
+                    <a:lnL w="12700" cap="flat" cmpd="sng" algn="ctr">
+                      <a:solidFill>
+                        <a:srgbClr val="000000"/>
+                      </a:solidFill>
+                      <a:prstDash val="solid"/>
+                      <a:round/>
+                      <a:headEnd type="none" w="med" len="med"/>
+                      <a:tailEnd type="none" w="med" len="med"/>
+                    </a:lnL>
+                    <a:lnR w="12700" cap="flat" cmpd="sng" algn="ctr">
+                      <a:solidFill>
+                        <a:srgbClr val="000000"/>
+                      </a:solidFill>
+                      <a:prstDash val="solid"/>
+                      <a:round/>
+                      <a:headEnd type="none" w="med" len="med"/>
+                      <a:tailEnd type="none" w="med" len="med"/>
+                    </a:lnR>
+                    <a:lnT w="12700" cap="flat" cmpd="sng" algn="ctr">
+                      <a:solidFill>
+                        <a:srgbClr val="000000"/>
+                      </a:solidFill>
+                      <a:prstDash val="solid"/>
+                      <a:round/>
+                      <a:headEnd type="none" w="med" len="med"/>
+                      <a:tailEnd type="none" w="med" len="med"/>
+                    </a:lnT>
+                    <a:lnB w="12700" cap="flat" cmpd="sng" algn="ctr">
+                      <a:solidFill>
+                        <a:srgbClr val="000000"/>
+                      </a:solidFill>
+                      <a:prstDash val="solid"/>
+                      <a:round/>
+                      <a:headEnd type="none" w="med" len="med"/>
+                      <a:tailEnd type="none" w="med" len="med"/>
+                    </a:lnB>
+                  </a:tcPr>
+                </a:tc>
+                <a:tc>
+                  <a:txBody>
+                    <a:bodyPr/>
+                    <a:lstStyle/>
+                    <a:p>
+                      <a:pPr algn="l">
+                        <a:lnSpc>
+                          <a:spcPct val="150000"/>
+                        </a:lnSpc>
+                        <a:buNone/>
+                      </a:pPr>
+                      <a:r>
+                        <a:rPr lang="en-IN" sz="2800" b="1">
+                          <a:solidFill>
+                            <a:schemeClr val="bg2"/>
+                          </a:solidFill>
+                          <a:latin typeface="Roca Two" panose="020B0604020202020204" charset="0"/>
+                        </a:rPr>
+                        <a:t>Comparison</a:t>
+                      </a:r>
+                      <a:endParaRPr lang="en-IN" sz="2800">
+                        <a:solidFill>
+                          <a:schemeClr val="bg2"/>
+                        </a:solidFill>
+                        <a:latin typeface="Roca Two" panose="020B0604020202020204" charset="0"/>
+                      </a:endParaRPr>
+                    </a:p>
+                  </a:txBody>
+                  <a:tcPr anchor="ctr">
+                    <a:lnL w="12700" cap="flat" cmpd="sng" algn="ctr">
+                      <a:solidFill>
+                        <a:srgbClr val="000000"/>
+                      </a:solidFill>
+                      <a:prstDash val="solid"/>
+                      <a:round/>
+                      <a:headEnd type="none" w="med" len="med"/>
+                      <a:tailEnd type="none" w="med" len="med"/>
+                    </a:lnL>
+                    <a:lnR w="12700" cap="flat" cmpd="sng" algn="ctr">
+                      <a:solidFill>
+                        <a:srgbClr val="000000"/>
+                      </a:solidFill>
+                      <a:prstDash val="solid"/>
+                      <a:round/>
+                      <a:headEnd type="none" w="med" len="med"/>
+                      <a:tailEnd type="none" w="med" len="med"/>
+                    </a:lnR>
+                    <a:lnT w="12700" cap="flat" cmpd="sng" algn="ctr">
+                      <a:solidFill>
+                        <a:srgbClr val="000000"/>
+                      </a:solidFill>
+                      <a:prstDash val="solid"/>
+                      <a:round/>
+                      <a:headEnd type="none" w="med" len="med"/>
+                      <a:tailEnd type="none" w="med" len="med"/>
+                    </a:lnT>
+                    <a:lnB w="12700" cap="flat" cmpd="sng" algn="ctr">
+                      <a:solidFill>
+                        <a:srgbClr val="000000"/>
+                      </a:solidFill>
+                      <a:prstDash val="solid"/>
+                      <a:round/>
+                      <a:headEnd type="none" w="med" len="med"/>
+                      <a:tailEnd type="none" w="med" len="med"/>
+                    </a:lnB>
+                  </a:tcPr>
+                </a:tc>
+                <a:tc>
+                  <a:txBody>
+                    <a:bodyPr/>
+                    <a:lstStyle/>
+                    <a:p>
+                      <a:pPr algn="l">
+                        <a:lnSpc>
+                          <a:spcPct val="150000"/>
+                        </a:lnSpc>
+                        <a:buNone/>
+                      </a:pPr>
+                      <a:r>
+                        <a:rPr lang="en-IN" sz="2800" b="1">
+                          <a:solidFill>
+                            <a:schemeClr val="bg2"/>
+                          </a:solidFill>
+                          <a:latin typeface="Roca Two" panose="020B0604020202020204" charset="0"/>
+                        </a:rPr>
+                        <a:t>Performance Metric</a:t>
+                      </a:r>
+                      <a:endParaRPr lang="en-IN" sz="2800">
+                        <a:solidFill>
+                          <a:schemeClr val="bg2"/>
+                        </a:solidFill>
+                        <a:latin typeface="Roca Two" panose="020B0604020202020204" charset="0"/>
+                      </a:endParaRPr>
+                    </a:p>
+                  </a:txBody>
+                  <a:tcPr anchor="ctr">
+                    <a:lnL w="12700" cap="flat" cmpd="sng" algn="ctr">
+                      <a:solidFill>
+                        <a:srgbClr val="000000"/>
+                      </a:solidFill>
+                      <a:prstDash val="solid"/>
+                      <a:round/>
+                      <a:headEnd type="none" w="med" len="med"/>
+                      <a:tailEnd type="none" w="med" len="med"/>
+                    </a:lnL>
+                    <a:lnR w="12700" cap="flat" cmpd="sng" algn="ctr">
+                      <a:solidFill>
+                        <a:srgbClr val="000000"/>
+                      </a:solidFill>
+                      <a:prstDash val="solid"/>
+                      <a:round/>
+                      <a:headEnd type="none" w="med" len="med"/>
+                      <a:tailEnd type="none" w="med" len="med"/>
+                    </a:lnR>
+                    <a:lnT w="12700" cap="flat" cmpd="sng" algn="ctr">
+                      <a:solidFill>
+                        <a:srgbClr val="000000"/>
+                      </a:solidFill>
+                      <a:prstDash val="solid"/>
+                      <a:round/>
+                      <a:headEnd type="none" w="med" len="med"/>
+                      <a:tailEnd type="none" w="med" len="med"/>
+                    </a:lnT>
+                    <a:lnB w="12700" cap="flat" cmpd="sng" algn="ctr">
+                      <a:solidFill>
+                        <a:srgbClr val="000000"/>
+                      </a:solidFill>
+                      <a:prstDash val="solid"/>
+                      <a:round/>
+                      <a:headEnd type="none" w="med" len="med"/>
+                      <a:tailEnd type="none" w="med" len="med"/>
+                    </a:lnB>
+                  </a:tcPr>
+                </a:tc>
+                <a:extLst>
+                  <a:ext uri="{0D108BD9-81ED-4DB2-BD59-A6C34878D82A}">
+                    <a16:rowId xmlns:a16="http://schemas.microsoft.com/office/drawing/2014/main" val="4164045187"/>
+                  </a:ext>
+                </a:extLst>
+              </a:tr>
+              <a:tr h="489446">
+                <a:tc>
+                  <a:txBody>
+                    <a:bodyPr/>
+                    <a:lstStyle/>
+                    <a:p>
+                      <a:pPr algn="l">
+                        <a:lnSpc>
+                          <a:spcPct val="150000"/>
+                        </a:lnSpc>
+                        <a:buNone/>
+                      </a:pPr>
+                      <a:r>
+                        <a:rPr lang="en-IN" sz="2800" b="1">
+                          <a:solidFill>
+                            <a:schemeClr val="bg2"/>
+                          </a:solidFill>
+                          <a:latin typeface="Roca Two" panose="020B0604020202020204" charset="0"/>
+                        </a:rPr>
+                        <a:t>Throughput</a:t>
+                      </a:r>
+                      <a:endParaRPr lang="en-IN" sz="2800">
+                        <a:solidFill>
+                          <a:schemeClr val="bg2"/>
+                        </a:solidFill>
+                        <a:latin typeface="Roca Two" panose="020B0604020202020204" charset="0"/>
+                      </a:endParaRPr>
+                    </a:p>
+                  </a:txBody>
+                  <a:tcPr anchor="ctr">
+                    <a:lnL w="12700" cap="flat" cmpd="sng" algn="ctr">
+                      <a:solidFill>
+                        <a:srgbClr val="000000"/>
+                      </a:solidFill>
+                      <a:prstDash val="solid"/>
+                      <a:round/>
+                      <a:headEnd type="none" w="med" len="med"/>
+                      <a:tailEnd type="none" w="med" len="med"/>
+                    </a:lnL>
+                    <a:lnR w="12700" cap="flat" cmpd="sng" algn="ctr">
+                      <a:solidFill>
+                        <a:srgbClr val="000000"/>
+                      </a:solidFill>
+                      <a:prstDash val="solid"/>
+                      <a:round/>
+                      <a:headEnd type="none" w="med" len="med"/>
+                      <a:tailEnd type="none" w="med" len="med"/>
+                    </a:lnR>
+                    <a:lnT w="12700" cap="flat" cmpd="sng" algn="ctr">
+                      <a:solidFill>
+                        <a:srgbClr val="000000"/>
+                      </a:solidFill>
+                      <a:prstDash val="solid"/>
+                      <a:round/>
+                      <a:headEnd type="none" w="med" len="med"/>
+                      <a:tailEnd type="none" w="med" len="med"/>
+                    </a:lnT>
+                    <a:lnB w="12700" cap="flat" cmpd="sng" algn="ctr">
+                      <a:solidFill>
+                        <a:srgbClr val="000000"/>
+                      </a:solidFill>
+                      <a:prstDash val="solid"/>
+                      <a:round/>
+                      <a:headEnd type="none" w="med" len="med"/>
+                      <a:tailEnd type="none" w="med" len="med"/>
+                    </a:lnB>
+                  </a:tcPr>
+                </a:tc>
+                <a:tc>
+                  <a:txBody>
+                    <a:bodyPr/>
+                    <a:lstStyle/>
+                    <a:p>
+                      <a:pPr algn="l">
+                        <a:lnSpc>
+                          <a:spcPct val="150000"/>
+                        </a:lnSpc>
+                        <a:buNone/>
+                      </a:pPr>
+                      <a:r>
+                        <a:rPr lang="en-IN" sz="2800" dirty="0">
+                          <a:solidFill>
+                            <a:schemeClr val="bg2"/>
+                          </a:solidFill>
+                          <a:latin typeface="Roca Two" panose="020B0604020202020204" charset="0"/>
+                        </a:rPr>
+                        <a:t>77.7 K records/min</a:t>
+                      </a:r>
+                    </a:p>
+                  </a:txBody>
+                  <a:tcPr anchor="ctr">
+                    <a:lnL w="12700" cap="flat" cmpd="sng" algn="ctr">
+                      <a:solidFill>
+                        <a:srgbClr val="000000"/>
+                      </a:solidFill>
+                      <a:prstDash val="solid"/>
+                      <a:round/>
+                      <a:headEnd type="none" w="med" len="med"/>
+                      <a:tailEnd type="none" w="med" len="med"/>
+                    </a:lnL>
+                    <a:lnR w="12700" cap="flat" cmpd="sng" algn="ctr">
+                      <a:solidFill>
+                        <a:srgbClr val="000000"/>
+                      </a:solidFill>
+                      <a:prstDash val="solid"/>
+                      <a:round/>
+                      <a:headEnd type="none" w="med" len="med"/>
+                      <a:tailEnd type="none" w="med" len="med"/>
+                    </a:lnR>
+                    <a:lnT w="12700" cap="flat" cmpd="sng" algn="ctr">
+                      <a:solidFill>
+                        <a:srgbClr val="000000"/>
+                      </a:solidFill>
+                      <a:prstDash val="solid"/>
+                      <a:round/>
+                      <a:headEnd type="none" w="med" len="med"/>
+                      <a:tailEnd type="none" w="med" len="med"/>
+                    </a:lnT>
+                    <a:lnB w="12700" cap="flat" cmpd="sng" algn="ctr">
+                      <a:solidFill>
+                        <a:srgbClr val="000000"/>
+                      </a:solidFill>
+                      <a:prstDash val="solid"/>
+                      <a:round/>
+                      <a:headEnd type="none" w="med" len="med"/>
+                      <a:tailEnd type="none" w="med" len="med"/>
+                    </a:lnB>
+                  </a:tcPr>
+                </a:tc>
+                <a:tc>
+                  <a:txBody>
+                    <a:bodyPr/>
+                    <a:lstStyle/>
+                    <a:p>
+                      <a:pPr algn="l">
+                        <a:lnSpc>
+                          <a:spcPct val="150000"/>
+                        </a:lnSpc>
+                        <a:buNone/>
+                      </a:pPr>
+                      <a:r>
+                        <a:rPr lang="en-IN" sz="2800" dirty="0">
+                          <a:solidFill>
+                            <a:schemeClr val="bg2"/>
+                          </a:solidFill>
+                          <a:latin typeface="Roca Two" panose="020B0604020202020204" charset="0"/>
+                        </a:rPr>
+                        <a:t>60.6 </a:t>
+                      </a:r>
+                    </a:p>
+                    <a:p>
+                      <a:pPr algn="l">
+                        <a:lnSpc>
+                          <a:spcPct val="150000"/>
+                        </a:lnSpc>
+                        <a:buNone/>
+                      </a:pPr>
+                      <a:r>
+                        <a:rPr lang="en-IN" sz="2800" dirty="0">
+                          <a:solidFill>
+                            <a:schemeClr val="bg2"/>
+                          </a:solidFill>
+                          <a:latin typeface="Roca Two" panose="020B0604020202020204" charset="0"/>
+                        </a:rPr>
+                        <a:t>K records/min</a:t>
+                      </a:r>
+                    </a:p>
+                  </a:txBody>
+                  <a:tcPr anchor="ctr">
+                    <a:lnL w="12700" cap="flat" cmpd="sng" algn="ctr">
+                      <a:solidFill>
+                        <a:srgbClr val="000000"/>
+                      </a:solidFill>
+                      <a:prstDash val="solid"/>
+                      <a:round/>
+                      <a:headEnd type="none" w="med" len="med"/>
+                      <a:tailEnd type="none" w="med" len="med"/>
+                    </a:lnL>
+                    <a:lnR w="12700" cap="flat" cmpd="sng" algn="ctr">
+                      <a:solidFill>
+                        <a:srgbClr val="000000"/>
+                      </a:solidFill>
+                      <a:prstDash val="solid"/>
+                      <a:round/>
+                      <a:headEnd type="none" w="med" len="med"/>
+                      <a:tailEnd type="none" w="med" len="med"/>
+                    </a:lnR>
+                    <a:lnT w="12700" cap="flat" cmpd="sng" algn="ctr">
+                      <a:solidFill>
+                        <a:srgbClr val="000000"/>
+                      </a:solidFill>
+                      <a:prstDash val="solid"/>
+                      <a:round/>
+                      <a:headEnd type="none" w="med" len="med"/>
+                      <a:tailEnd type="none" w="med" len="med"/>
+                    </a:lnT>
+                    <a:lnB w="12700" cap="flat" cmpd="sng" algn="ctr">
+                      <a:solidFill>
+                        <a:srgbClr val="000000"/>
+                      </a:solidFill>
+                      <a:prstDash val="solid"/>
+                      <a:round/>
+                      <a:headEnd type="none" w="med" len="med"/>
+                      <a:tailEnd type="none" w="med" len="med"/>
+                    </a:lnB>
+                  </a:tcPr>
+                </a:tc>
+                <a:tc>
+                  <a:txBody>
+                    <a:bodyPr/>
+                    <a:lstStyle/>
+                    <a:p>
+                      <a:pPr algn="l">
+                        <a:lnSpc>
+                          <a:spcPct val="150000"/>
+                        </a:lnSpc>
+                        <a:buNone/>
+                      </a:pPr>
+                      <a:r>
+                        <a:rPr lang="en-IN" sz="2800">
+                          <a:solidFill>
+                            <a:schemeClr val="bg2"/>
+                          </a:solidFill>
+                          <a:latin typeface="Roca Two" panose="020B0604020202020204" charset="0"/>
+                        </a:rPr>
+                        <a:t>Existing approach is faster</a:t>
+                      </a:r>
+                    </a:p>
+                  </a:txBody>
+                  <a:tcPr anchor="ctr">
+                    <a:lnL w="12700" cap="flat" cmpd="sng" algn="ctr">
+                      <a:solidFill>
+                        <a:srgbClr val="000000"/>
+                      </a:solidFill>
+                      <a:prstDash val="solid"/>
+                      <a:round/>
+                      <a:headEnd type="none" w="med" len="med"/>
+                      <a:tailEnd type="none" w="med" len="med"/>
+                    </a:lnL>
+                    <a:lnR w="12700" cap="flat" cmpd="sng" algn="ctr">
+                      <a:solidFill>
+                        <a:srgbClr val="000000"/>
+                      </a:solidFill>
+                      <a:prstDash val="solid"/>
+                      <a:round/>
+                      <a:headEnd type="none" w="med" len="med"/>
+                      <a:tailEnd type="none" w="med" len="med"/>
+                    </a:lnR>
+                    <a:lnT w="12700" cap="flat" cmpd="sng" algn="ctr">
+                      <a:solidFill>
+                        <a:srgbClr val="000000"/>
+                      </a:solidFill>
+                      <a:prstDash val="solid"/>
+                      <a:round/>
+                      <a:headEnd type="none" w="med" len="med"/>
+                      <a:tailEnd type="none" w="med" len="med"/>
+                    </a:lnT>
+                    <a:lnB w="12700" cap="flat" cmpd="sng" algn="ctr">
+                      <a:solidFill>
+                        <a:srgbClr val="000000"/>
+                      </a:solidFill>
+                      <a:prstDash val="solid"/>
+                      <a:round/>
+                      <a:headEnd type="none" w="med" len="med"/>
+                      <a:tailEnd type="none" w="med" len="med"/>
+                    </a:lnB>
+                  </a:tcPr>
+                </a:tc>
+                <a:tc>
+                  <a:txBody>
+                    <a:bodyPr/>
+                    <a:lstStyle/>
+                    <a:p>
+                      <a:pPr algn="l">
+                        <a:lnSpc>
+                          <a:spcPct val="150000"/>
+                        </a:lnSpc>
+                        <a:buNone/>
+                      </a:pPr>
+                      <a:r>
+                        <a:rPr lang="en-IN" sz="2800" b="1" dirty="0">
+                          <a:solidFill>
+                            <a:schemeClr val="bg2"/>
+                          </a:solidFill>
+                          <a:latin typeface="Roca Two" panose="020B0604020202020204" charset="0"/>
+                        </a:rPr>
+                        <a:t>Throughput</a:t>
+                      </a:r>
+                      <a:endParaRPr lang="en-IN" sz="2800" dirty="0">
+                        <a:solidFill>
+                          <a:schemeClr val="bg2"/>
+                        </a:solidFill>
+                        <a:latin typeface="Roca Two" panose="020B0604020202020204" charset="0"/>
+                      </a:endParaRPr>
+                    </a:p>
+                  </a:txBody>
+                  <a:tcPr anchor="ctr">
+                    <a:lnL w="12700" cap="flat" cmpd="sng" algn="ctr">
+                      <a:solidFill>
+                        <a:srgbClr val="000000"/>
+                      </a:solidFill>
+                      <a:prstDash val="solid"/>
+                      <a:round/>
+                      <a:headEnd type="none" w="med" len="med"/>
+                      <a:tailEnd type="none" w="med" len="med"/>
+                    </a:lnL>
+                    <a:lnR w="12700" cap="flat" cmpd="sng" algn="ctr">
+                      <a:solidFill>
+                        <a:srgbClr val="000000"/>
+                      </a:solidFill>
+                      <a:prstDash val="solid"/>
+                      <a:round/>
+                      <a:headEnd type="none" w="med" len="med"/>
+                      <a:tailEnd type="none" w="med" len="med"/>
+                    </a:lnR>
+                    <a:lnT w="12700" cap="flat" cmpd="sng" algn="ctr">
+                      <a:solidFill>
+                        <a:srgbClr val="000000"/>
+                      </a:solidFill>
+                      <a:prstDash val="solid"/>
+                      <a:round/>
+                      <a:headEnd type="none" w="med" len="med"/>
+                      <a:tailEnd type="none" w="med" len="med"/>
+                    </a:lnT>
+                    <a:lnB w="12700" cap="flat" cmpd="sng" algn="ctr">
+                      <a:solidFill>
+                        <a:srgbClr val="000000"/>
+                      </a:solidFill>
+                      <a:prstDash val="solid"/>
+                      <a:round/>
+                      <a:headEnd type="none" w="med" len="med"/>
+                      <a:tailEnd type="none" w="med" len="med"/>
+                    </a:lnB>
+                  </a:tcPr>
+                </a:tc>
+                <a:extLst>
+                  <a:ext uri="{0D108BD9-81ED-4DB2-BD59-A6C34878D82A}">
+                    <a16:rowId xmlns:a16="http://schemas.microsoft.com/office/drawing/2014/main" val="3450449799"/>
+                  </a:ext>
+                </a:extLst>
+              </a:tr>
+              <a:tr h="489446">
+                <a:tc>
+                  <a:txBody>
+                    <a:bodyPr/>
+                    <a:lstStyle/>
+                    <a:p>
+                      <a:pPr algn="l">
+                        <a:lnSpc>
+                          <a:spcPct val="150000"/>
+                        </a:lnSpc>
+                        <a:buNone/>
+                      </a:pPr>
+                      <a:r>
+                        <a:rPr lang="en-IN" sz="2800" b="1">
+                          <a:solidFill>
+                            <a:schemeClr val="bg2"/>
+                          </a:solidFill>
+                          <a:latin typeface="Roca Two" panose="020B0604020202020204" charset="0"/>
+                        </a:rPr>
+                        <a:t>Time Efficiency</a:t>
+                      </a:r>
+                      <a:endParaRPr lang="en-IN" sz="2800">
+                        <a:solidFill>
+                          <a:schemeClr val="bg2"/>
+                        </a:solidFill>
+                        <a:latin typeface="Roca Two" panose="020B0604020202020204" charset="0"/>
+                      </a:endParaRPr>
+                    </a:p>
+                  </a:txBody>
+                  <a:tcPr anchor="ctr">
+                    <a:lnL w="12700" cap="flat" cmpd="sng" algn="ctr">
+                      <a:solidFill>
+                        <a:srgbClr val="000000"/>
+                      </a:solidFill>
+                      <a:prstDash val="solid"/>
+                      <a:round/>
+                      <a:headEnd type="none" w="med" len="med"/>
+                      <a:tailEnd type="none" w="med" len="med"/>
+                    </a:lnL>
+                    <a:lnR w="12700" cap="flat" cmpd="sng" algn="ctr">
+                      <a:solidFill>
+                        <a:srgbClr val="000000"/>
+                      </a:solidFill>
+                      <a:prstDash val="solid"/>
+                      <a:round/>
+                      <a:headEnd type="none" w="med" len="med"/>
+                      <a:tailEnd type="none" w="med" len="med"/>
+                    </a:lnR>
+                    <a:lnT w="12700" cap="flat" cmpd="sng" algn="ctr">
+                      <a:solidFill>
+                        <a:srgbClr val="000000"/>
+                      </a:solidFill>
+                      <a:prstDash val="solid"/>
+                      <a:round/>
+                      <a:headEnd type="none" w="med" len="med"/>
+                      <a:tailEnd type="none" w="med" len="med"/>
+                    </a:lnT>
+                    <a:lnB w="12700" cap="flat" cmpd="sng" algn="ctr">
+                      <a:solidFill>
+                        <a:srgbClr val="000000"/>
+                      </a:solidFill>
+                      <a:prstDash val="solid"/>
+                      <a:round/>
+                      <a:headEnd type="none" w="med" len="med"/>
+                      <a:tailEnd type="none" w="med" len="med"/>
+                    </a:lnB>
+                  </a:tcPr>
+                </a:tc>
+                <a:tc>
+                  <a:txBody>
+                    <a:bodyPr/>
+                    <a:lstStyle/>
+                    <a:p>
+                      <a:pPr algn="l">
+                        <a:lnSpc>
+                          <a:spcPct val="150000"/>
+                        </a:lnSpc>
+                        <a:buNone/>
+                      </a:pPr>
+                      <a:r>
+                        <a:rPr lang="en-IN" sz="2800">
+                          <a:solidFill>
+                            <a:schemeClr val="bg2"/>
+                          </a:solidFill>
+                          <a:latin typeface="Roca Two" panose="020B0604020202020204" charset="0"/>
+                        </a:rPr>
+                        <a:t>0.77 sec/1K records</a:t>
+                      </a:r>
+                    </a:p>
+                  </a:txBody>
+                  <a:tcPr anchor="ctr">
+                    <a:lnL w="12700" cap="flat" cmpd="sng" algn="ctr">
+                      <a:solidFill>
+                        <a:srgbClr val="000000"/>
+                      </a:solidFill>
+                      <a:prstDash val="solid"/>
+                      <a:round/>
+                      <a:headEnd type="none" w="med" len="med"/>
+                      <a:tailEnd type="none" w="med" len="med"/>
+                    </a:lnL>
+                    <a:lnR w="12700" cap="flat" cmpd="sng" algn="ctr">
+                      <a:solidFill>
+                        <a:srgbClr val="000000"/>
+                      </a:solidFill>
+                      <a:prstDash val="solid"/>
+                      <a:round/>
+                      <a:headEnd type="none" w="med" len="med"/>
+                      <a:tailEnd type="none" w="med" len="med"/>
+                    </a:lnR>
+                    <a:lnT w="12700" cap="flat" cmpd="sng" algn="ctr">
+                      <a:solidFill>
+                        <a:srgbClr val="000000"/>
+                      </a:solidFill>
+                      <a:prstDash val="solid"/>
+                      <a:round/>
+                      <a:headEnd type="none" w="med" len="med"/>
+                      <a:tailEnd type="none" w="med" len="med"/>
+                    </a:lnT>
+                    <a:lnB w="12700" cap="flat" cmpd="sng" algn="ctr">
+                      <a:solidFill>
+                        <a:srgbClr val="000000"/>
+                      </a:solidFill>
+                      <a:prstDash val="solid"/>
+                      <a:round/>
+                      <a:headEnd type="none" w="med" len="med"/>
+                      <a:tailEnd type="none" w="med" len="med"/>
+                    </a:lnB>
+                  </a:tcPr>
+                </a:tc>
+                <a:tc>
+                  <a:txBody>
+                    <a:bodyPr/>
+                    <a:lstStyle/>
+                    <a:p>
+                      <a:pPr algn="l">
+                        <a:lnSpc>
+                          <a:spcPct val="150000"/>
+                        </a:lnSpc>
+                        <a:buNone/>
+                      </a:pPr>
+                      <a:r>
+                        <a:rPr lang="en-IN" sz="2800" dirty="0">
+                          <a:solidFill>
+                            <a:schemeClr val="bg2"/>
+                          </a:solidFill>
+                          <a:latin typeface="Roca Two" panose="020B0604020202020204" charset="0"/>
+                        </a:rPr>
+                        <a:t>1.50 </a:t>
+                      </a:r>
+                    </a:p>
+                    <a:p>
+                      <a:pPr algn="l">
+                        <a:lnSpc>
+                          <a:spcPct val="150000"/>
+                        </a:lnSpc>
+                        <a:buNone/>
+                      </a:pPr>
+                      <a:r>
+                        <a:rPr lang="en-IN" sz="2800" dirty="0">
+                          <a:solidFill>
+                            <a:schemeClr val="bg2"/>
+                          </a:solidFill>
+                          <a:latin typeface="Roca Two" panose="020B0604020202020204" charset="0"/>
+                        </a:rPr>
+                        <a:t>sec/1K records</a:t>
+                      </a:r>
+                    </a:p>
+                  </a:txBody>
+                  <a:tcPr anchor="ctr">
+                    <a:lnL w="12700" cap="flat" cmpd="sng" algn="ctr">
+                      <a:solidFill>
+                        <a:srgbClr val="000000"/>
+                      </a:solidFill>
+                      <a:prstDash val="solid"/>
+                      <a:round/>
+                      <a:headEnd type="none" w="med" len="med"/>
+                      <a:tailEnd type="none" w="med" len="med"/>
+                    </a:lnL>
+                    <a:lnR w="12700" cap="flat" cmpd="sng" algn="ctr">
+                      <a:solidFill>
+                        <a:srgbClr val="000000"/>
+                      </a:solidFill>
+                      <a:prstDash val="solid"/>
+                      <a:round/>
+                      <a:headEnd type="none" w="med" len="med"/>
+                      <a:tailEnd type="none" w="med" len="med"/>
+                    </a:lnR>
+                    <a:lnT w="12700" cap="flat" cmpd="sng" algn="ctr">
+                      <a:solidFill>
+                        <a:srgbClr val="000000"/>
+                      </a:solidFill>
+                      <a:prstDash val="solid"/>
+                      <a:round/>
+                      <a:headEnd type="none" w="med" len="med"/>
+                      <a:tailEnd type="none" w="med" len="med"/>
+                    </a:lnT>
+                    <a:lnB w="12700" cap="flat" cmpd="sng" algn="ctr">
+                      <a:solidFill>
+                        <a:srgbClr val="000000"/>
+                      </a:solidFill>
+                      <a:prstDash val="solid"/>
+                      <a:round/>
+                      <a:headEnd type="none" w="med" len="med"/>
+                      <a:tailEnd type="none" w="med" len="med"/>
+                    </a:lnB>
+                  </a:tcPr>
+                </a:tc>
+                <a:tc>
+                  <a:txBody>
+                    <a:bodyPr/>
+                    <a:lstStyle/>
+                    <a:p>
+                      <a:pPr algn="l">
+                        <a:lnSpc>
+                          <a:spcPct val="150000"/>
+                        </a:lnSpc>
+                        <a:buNone/>
+                      </a:pPr>
+                      <a:r>
+                        <a:rPr lang="en-IN" sz="2800">
+                          <a:solidFill>
+                            <a:schemeClr val="bg2"/>
+                          </a:solidFill>
+                          <a:latin typeface="Roca Two" panose="020B0604020202020204" charset="0"/>
+                        </a:rPr>
+                        <a:t>Existing approach is faster</a:t>
+                      </a:r>
+                    </a:p>
+                  </a:txBody>
+                  <a:tcPr anchor="ctr">
+                    <a:lnL w="12700" cap="flat" cmpd="sng" algn="ctr">
+                      <a:solidFill>
+                        <a:srgbClr val="000000"/>
+                      </a:solidFill>
+                      <a:prstDash val="solid"/>
+                      <a:round/>
+                      <a:headEnd type="none" w="med" len="med"/>
+                      <a:tailEnd type="none" w="med" len="med"/>
+                    </a:lnL>
+                    <a:lnR w="12700" cap="flat" cmpd="sng" algn="ctr">
+                      <a:solidFill>
+                        <a:srgbClr val="000000"/>
+                      </a:solidFill>
+                      <a:prstDash val="solid"/>
+                      <a:round/>
+                      <a:headEnd type="none" w="med" len="med"/>
+                      <a:tailEnd type="none" w="med" len="med"/>
+                    </a:lnR>
+                    <a:lnT w="12700" cap="flat" cmpd="sng" algn="ctr">
+                      <a:solidFill>
+                        <a:srgbClr val="000000"/>
+                      </a:solidFill>
+                      <a:prstDash val="solid"/>
+                      <a:round/>
+                      <a:headEnd type="none" w="med" len="med"/>
+                      <a:tailEnd type="none" w="med" len="med"/>
+                    </a:lnT>
+                    <a:lnB w="12700" cap="flat" cmpd="sng" algn="ctr">
+                      <a:solidFill>
+                        <a:srgbClr val="000000"/>
+                      </a:solidFill>
+                      <a:prstDash val="solid"/>
+                      <a:round/>
+                      <a:headEnd type="none" w="med" len="med"/>
+                      <a:tailEnd type="none" w="med" len="med"/>
+                    </a:lnB>
+                  </a:tcPr>
+                </a:tc>
+                <a:tc>
+                  <a:txBody>
+                    <a:bodyPr/>
+                    <a:lstStyle/>
+                    <a:p>
+                      <a:pPr algn="l">
+                        <a:lnSpc>
+                          <a:spcPct val="150000"/>
+                        </a:lnSpc>
+                        <a:buNone/>
+                      </a:pPr>
+                      <a:r>
+                        <a:rPr lang="en-IN" sz="2800" b="1">
+                          <a:solidFill>
+                            <a:schemeClr val="bg2"/>
+                          </a:solidFill>
+                          <a:latin typeface="Roca Two" panose="020B0604020202020204" charset="0"/>
+                        </a:rPr>
+                        <a:t>Time Efficiency</a:t>
+                      </a:r>
+                      <a:endParaRPr lang="en-IN" sz="2800">
+                        <a:solidFill>
+                          <a:schemeClr val="bg2"/>
+                        </a:solidFill>
+                        <a:latin typeface="Roca Two" panose="020B0604020202020204" charset="0"/>
+                      </a:endParaRPr>
+                    </a:p>
+                  </a:txBody>
+                  <a:tcPr anchor="ctr">
+                    <a:lnL w="12700" cap="flat" cmpd="sng" algn="ctr">
+                      <a:solidFill>
+                        <a:srgbClr val="000000"/>
+                      </a:solidFill>
+                      <a:prstDash val="solid"/>
+                      <a:round/>
+                      <a:headEnd type="none" w="med" len="med"/>
+                      <a:tailEnd type="none" w="med" len="med"/>
+                    </a:lnL>
+                    <a:lnR w="12700" cap="flat" cmpd="sng" algn="ctr">
+                      <a:solidFill>
+                        <a:srgbClr val="000000"/>
+                      </a:solidFill>
+                      <a:prstDash val="solid"/>
+                      <a:round/>
+                      <a:headEnd type="none" w="med" len="med"/>
+                      <a:tailEnd type="none" w="med" len="med"/>
+                    </a:lnR>
+                    <a:lnT w="12700" cap="flat" cmpd="sng" algn="ctr">
+                      <a:solidFill>
+                        <a:srgbClr val="000000"/>
+                      </a:solidFill>
+                      <a:prstDash val="solid"/>
+                      <a:round/>
+                      <a:headEnd type="none" w="med" len="med"/>
+                      <a:tailEnd type="none" w="med" len="med"/>
+                    </a:lnT>
+                    <a:lnB w="12700" cap="flat" cmpd="sng" algn="ctr">
+                      <a:solidFill>
+                        <a:srgbClr val="000000"/>
+                      </a:solidFill>
+                      <a:prstDash val="solid"/>
+                      <a:round/>
+                      <a:headEnd type="none" w="med" len="med"/>
+                      <a:tailEnd type="none" w="med" len="med"/>
+                    </a:lnB>
+                  </a:tcPr>
+                </a:tc>
+                <a:extLst>
+                  <a:ext uri="{0D108BD9-81ED-4DB2-BD59-A6C34878D82A}">
+                    <a16:rowId xmlns:a16="http://schemas.microsoft.com/office/drawing/2014/main" val="1289609121"/>
+                  </a:ext>
+                </a:extLst>
+              </a:tr>
+              <a:tr h="559696">
+                <a:tc>
+                  <a:txBody>
+                    <a:bodyPr/>
+                    <a:lstStyle/>
+                    <a:p>
+                      <a:pPr algn="l">
+                        <a:lnSpc>
+                          <a:spcPct val="150000"/>
+                        </a:lnSpc>
+                        <a:buNone/>
+                      </a:pPr>
+                      <a:r>
+                        <a:rPr lang="en-IN" sz="2800" b="1">
+                          <a:solidFill>
+                            <a:schemeClr val="bg2"/>
+                          </a:solidFill>
+                          <a:latin typeface="Roca Two" panose="020B0604020202020204" charset="0"/>
+                        </a:rPr>
+                        <a:t>Invalid Records Caught</a:t>
+                      </a:r>
+                      <a:endParaRPr lang="en-IN" sz="2800">
+                        <a:solidFill>
+                          <a:schemeClr val="bg2"/>
+                        </a:solidFill>
+                        <a:latin typeface="Roca Two" panose="020B0604020202020204" charset="0"/>
+                      </a:endParaRPr>
+                    </a:p>
+                  </a:txBody>
+                  <a:tcPr anchor="ctr">
+                    <a:lnL w="12700" cap="flat" cmpd="sng" algn="ctr">
+                      <a:solidFill>
+                        <a:srgbClr val="000000"/>
+                      </a:solidFill>
+                      <a:prstDash val="solid"/>
+                      <a:round/>
+                      <a:headEnd type="none" w="med" len="med"/>
+                      <a:tailEnd type="none" w="med" len="med"/>
+                    </a:lnL>
+                    <a:lnR w="12700" cap="flat" cmpd="sng" algn="ctr">
+                      <a:solidFill>
+                        <a:srgbClr val="000000"/>
+                      </a:solidFill>
+                      <a:prstDash val="solid"/>
+                      <a:round/>
+                      <a:headEnd type="none" w="med" len="med"/>
+                      <a:tailEnd type="none" w="med" len="med"/>
+                    </a:lnR>
+                    <a:lnT w="12700" cap="flat" cmpd="sng" algn="ctr">
+                      <a:solidFill>
+                        <a:srgbClr val="000000"/>
+                      </a:solidFill>
+                      <a:prstDash val="solid"/>
+                      <a:round/>
+                      <a:headEnd type="none" w="med" len="med"/>
+                      <a:tailEnd type="none" w="med" len="med"/>
+                    </a:lnT>
+                    <a:lnB w="12700" cap="flat" cmpd="sng" algn="ctr">
+                      <a:solidFill>
+                        <a:srgbClr val="000000"/>
+                      </a:solidFill>
+                      <a:prstDash val="solid"/>
+                      <a:round/>
+                      <a:headEnd type="none" w="med" len="med"/>
+                      <a:tailEnd type="none" w="med" len="med"/>
+                    </a:lnB>
+                  </a:tcPr>
+                </a:tc>
+                <a:tc>
+                  <a:txBody>
+                    <a:bodyPr/>
+                    <a:lstStyle/>
+                    <a:p>
+                      <a:pPr algn="l">
+                        <a:lnSpc>
+                          <a:spcPct val="150000"/>
+                        </a:lnSpc>
+                        <a:buNone/>
+                      </a:pPr>
+                      <a:r>
+                        <a:rPr lang="en-IN" sz="2800" dirty="0">
+                          <a:solidFill>
+                            <a:schemeClr val="bg2"/>
+                          </a:solidFill>
+                          <a:latin typeface="Roca Two" panose="020B0604020202020204" charset="0"/>
+                        </a:rPr>
+                        <a:t>4.3%</a:t>
+                      </a:r>
+                    </a:p>
+                  </a:txBody>
+                  <a:tcPr anchor="ctr">
+                    <a:lnL w="12700" cap="flat" cmpd="sng" algn="ctr">
+                      <a:solidFill>
+                        <a:srgbClr val="000000"/>
+                      </a:solidFill>
+                      <a:prstDash val="solid"/>
+                      <a:round/>
+                      <a:headEnd type="none" w="med" len="med"/>
+                      <a:tailEnd type="none" w="med" len="med"/>
+                    </a:lnL>
+                    <a:lnR w="12700" cap="flat" cmpd="sng" algn="ctr">
+                      <a:solidFill>
+                        <a:srgbClr val="000000"/>
+                      </a:solidFill>
+                      <a:prstDash val="solid"/>
+                      <a:round/>
+                      <a:headEnd type="none" w="med" len="med"/>
+                      <a:tailEnd type="none" w="med" len="med"/>
+                    </a:lnR>
+                    <a:lnT w="12700" cap="flat" cmpd="sng" algn="ctr">
+                      <a:solidFill>
+                        <a:srgbClr val="000000"/>
+                      </a:solidFill>
+                      <a:prstDash val="solid"/>
+                      <a:round/>
+                      <a:headEnd type="none" w="med" len="med"/>
+                      <a:tailEnd type="none" w="med" len="med"/>
+                    </a:lnT>
+                    <a:lnB w="12700" cap="flat" cmpd="sng" algn="ctr">
+                      <a:solidFill>
+                        <a:srgbClr val="000000"/>
+                      </a:solidFill>
+                      <a:prstDash val="solid"/>
+                      <a:round/>
+                      <a:headEnd type="none" w="med" len="med"/>
+                      <a:tailEnd type="none" w="med" len="med"/>
+                    </a:lnB>
+                  </a:tcPr>
+                </a:tc>
+                <a:tc>
+                  <a:txBody>
+                    <a:bodyPr/>
+                    <a:lstStyle/>
+                    <a:p>
+                      <a:pPr algn="l">
+                        <a:lnSpc>
+                          <a:spcPct val="150000"/>
+                        </a:lnSpc>
+                        <a:buNone/>
+                      </a:pPr>
+                      <a:r>
+                        <a:rPr lang="en-IN" sz="2800" b="1">
+                          <a:solidFill>
+                            <a:schemeClr val="bg2"/>
+                          </a:solidFill>
+                          <a:latin typeface="Roca Two" panose="020B0604020202020204" charset="0"/>
+                        </a:rPr>
+                        <a:t>12.8%</a:t>
+                      </a:r>
+                      <a:endParaRPr lang="en-IN" sz="2800">
+                        <a:solidFill>
+                          <a:schemeClr val="bg2"/>
+                        </a:solidFill>
+                        <a:latin typeface="Roca Two" panose="020B0604020202020204" charset="0"/>
+                      </a:endParaRPr>
+                    </a:p>
+                  </a:txBody>
+                  <a:tcPr anchor="ctr">
+                    <a:lnL w="12700" cap="flat" cmpd="sng" algn="ctr">
+                      <a:solidFill>
+                        <a:srgbClr val="000000"/>
+                      </a:solidFill>
+                      <a:prstDash val="solid"/>
+                      <a:round/>
+                      <a:headEnd type="none" w="med" len="med"/>
+                      <a:tailEnd type="none" w="med" len="med"/>
+                    </a:lnL>
+                    <a:lnR w="12700" cap="flat" cmpd="sng" algn="ctr">
+                      <a:solidFill>
+                        <a:srgbClr val="000000"/>
+                      </a:solidFill>
+                      <a:prstDash val="solid"/>
+                      <a:round/>
+                      <a:headEnd type="none" w="med" len="med"/>
+                      <a:tailEnd type="none" w="med" len="med"/>
+                    </a:lnR>
+                    <a:lnT w="12700" cap="flat" cmpd="sng" algn="ctr">
+                      <a:solidFill>
+                        <a:srgbClr val="000000"/>
+                      </a:solidFill>
+                      <a:prstDash val="solid"/>
+                      <a:round/>
+                      <a:headEnd type="none" w="med" len="med"/>
+                      <a:tailEnd type="none" w="med" len="med"/>
+                    </a:lnT>
+                    <a:lnB w="12700" cap="flat" cmpd="sng" algn="ctr">
+                      <a:solidFill>
+                        <a:srgbClr val="000000"/>
+                      </a:solidFill>
+                      <a:prstDash val="solid"/>
+                      <a:round/>
+                      <a:headEnd type="none" w="med" len="med"/>
+                      <a:tailEnd type="none" w="med" len="med"/>
+                    </a:lnB>
+                  </a:tcPr>
+                </a:tc>
+                <a:tc>
+                  <a:txBody>
+                    <a:bodyPr/>
+                    <a:lstStyle/>
+                    <a:p>
+                      <a:pPr algn="l">
+                        <a:lnSpc>
+                          <a:spcPct val="150000"/>
+                        </a:lnSpc>
+                        <a:buNone/>
+                      </a:pPr>
+                      <a:r>
+                        <a:rPr lang="en-IN" sz="2800" b="1">
+                          <a:solidFill>
+                            <a:schemeClr val="bg2"/>
+                          </a:solidFill>
+                          <a:latin typeface="Roca Two" panose="020B0604020202020204" charset="0"/>
+                        </a:rPr>
+                        <a:t>DataForge detects more invalid records</a:t>
+                      </a:r>
+                      <a:endParaRPr lang="en-IN" sz="2800">
+                        <a:solidFill>
+                          <a:schemeClr val="bg2"/>
+                        </a:solidFill>
+                        <a:latin typeface="Roca Two" panose="020B0604020202020204" charset="0"/>
+                      </a:endParaRPr>
+                    </a:p>
+                  </a:txBody>
+                  <a:tcPr anchor="ctr">
+                    <a:lnL w="12700" cap="flat" cmpd="sng" algn="ctr">
+                      <a:solidFill>
+                        <a:srgbClr val="000000"/>
+                      </a:solidFill>
+                      <a:prstDash val="solid"/>
+                      <a:round/>
+                      <a:headEnd type="none" w="med" len="med"/>
+                      <a:tailEnd type="none" w="med" len="med"/>
+                    </a:lnL>
+                    <a:lnR w="12700" cap="flat" cmpd="sng" algn="ctr">
+                      <a:solidFill>
+                        <a:srgbClr val="000000"/>
+                      </a:solidFill>
+                      <a:prstDash val="solid"/>
+                      <a:round/>
+                      <a:headEnd type="none" w="med" len="med"/>
+                      <a:tailEnd type="none" w="med" len="med"/>
+                    </a:lnR>
+                    <a:lnT w="12700" cap="flat" cmpd="sng" algn="ctr">
+                      <a:solidFill>
+                        <a:srgbClr val="000000"/>
+                      </a:solidFill>
+                      <a:prstDash val="solid"/>
+                      <a:round/>
+                      <a:headEnd type="none" w="med" len="med"/>
+                      <a:tailEnd type="none" w="med" len="med"/>
+                    </a:lnT>
+                    <a:lnB w="12700" cap="flat" cmpd="sng" algn="ctr">
+                      <a:solidFill>
+                        <a:srgbClr val="000000"/>
+                      </a:solidFill>
+                      <a:prstDash val="solid"/>
+                      <a:round/>
+                      <a:headEnd type="none" w="med" len="med"/>
+                      <a:tailEnd type="none" w="med" len="med"/>
+                    </a:lnB>
+                  </a:tcPr>
+                </a:tc>
+                <a:tc>
+                  <a:txBody>
+                    <a:bodyPr/>
+                    <a:lstStyle/>
+                    <a:p>
+                      <a:pPr algn="l">
+                        <a:lnSpc>
+                          <a:spcPct val="150000"/>
+                        </a:lnSpc>
+                        <a:buNone/>
+                      </a:pPr>
+                      <a:r>
+                        <a:rPr lang="en-IN" sz="2800" b="1" dirty="0">
+                          <a:solidFill>
+                            <a:schemeClr val="bg2"/>
+                          </a:solidFill>
+                          <a:latin typeface="Roca Two" panose="020B0604020202020204" charset="0"/>
+                        </a:rPr>
+                        <a:t>Invalid Records Caught</a:t>
+                      </a:r>
+                      <a:endParaRPr lang="en-IN" sz="2800" dirty="0">
+                        <a:solidFill>
+                          <a:schemeClr val="bg2"/>
+                        </a:solidFill>
+                        <a:latin typeface="Roca Two" panose="020B0604020202020204" charset="0"/>
+                      </a:endParaRPr>
+                    </a:p>
+                  </a:txBody>
+                  <a:tcPr anchor="ctr">
+                    <a:lnL w="12700" cap="flat" cmpd="sng" algn="ctr">
+                      <a:solidFill>
+                        <a:srgbClr val="000000"/>
+                      </a:solidFill>
+                      <a:prstDash val="solid"/>
+                      <a:round/>
+                      <a:headEnd type="none" w="med" len="med"/>
+                      <a:tailEnd type="none" w="med" len="med"/>
+                    </a:lnL>
+                    <a:lnR w="12700" cap="flat" cmpd="sng" algn="ctr">
+                      <a:solidFill>
+                        <a:srgbClr val="000000"/>
+                      </a:solidFill>
+                      <a:prstDash val="solid"/>
+                      <a:round/>
+                      <a:headEnd type="none" w="med" len="med"/>
+                      <a:tailEnd type="none" w="med" len="med"/>
+                    </a:lnR>
+                    <a:lnT w="12700" cap="flat" cmpd="sng" algn="ctr">
+                      <a:solidFill>
+                        <a:srgbClr val="000000"/>
+                      </a:solidFill>
+                      <a:prstDash val="solid"/>
+                      <a:round/>
+                      <a:headEnd type="none" w="med" len="med"/>
+                      <a:tailEnd type="none" w="med" len="med"/>
+                    </a:lnT>
+                    <a:lnB w="12700" cap="flat" cmpd="sng" algn="ctr">
+                      <a:solidFill>
+                        <a:srgbClr val="000000"/>
+                      </a:solidFill>
+                      <a:prstDash val="solid"/>
+                      <a:round/>
+                      <a:headEnd type="none" w="med" len="med"/>
+                      <a:tailEnd type="none" w="med" len="med"/>
+                    </a:lnB>
+                  </a:tcPr>
+                </a:tc>
+                <a:extLst>
+                  <a:ext uri="{0D108BD9-81ED-4DB2-BD59-A6C34878D82A}">
+                    <a16:rowId xmlns:a16="http://schemas.microsoft.com/office/drawing/2014/main" val="3684641913"/>
+                  </a:ext>
+                </a:extLst>
+              </a:tr>
+            </a:tbl>
+          </a:graphicData>
+        </a:graphic>
+      </p:graphicFrame>
+      <p:sp>
+        <p:nvSpPr>
+          <p:cNvPr id="5" name="Freeform 3">
+            <a:extLst>
+              <a:ext uri="{FF2B5EF4-FFF2-40B4-BE49-F238E27FC236}">
+                <a16:creationId xmlns:a16="http://schemas.microsoft.com/office/drawing/2014/main" id="{7B62309E-9F66-FE96-68BB-02E971190F2E}"/>
+              </a:ext>
+            </a:extLst>
+          </p:cNvPr>
+          <p:cNvSpPr/>
+          <p:nvPr/>
+        </p:nvSpPr>
+        <p:spPr>
+          <a:xfrm>
+            <a:off x="0" y="-194638"/>
+            <a:ext cx="2881617" cy="1223338"/>
+          </a:xfrm>
+          <a:custGeom>
+            <a:avLst/>
+            <a:gdLst/>
+            <a:ahLst/>
+            <a:cxnLst/>
+            <a:rect l="l" t="t" r="r" b="b"/>
+            <a:pathLst>
+              <a:path w="2881617" h="1223338">
+                <a:moveTo>
+                  <a:pt x="0" y="0"/>
+                </a:moveTo>
+                <a:lnTo>
+                  <a:pt x="2881617" y="0"/>
+                </a:lnTo>
+                <a:lnTo>
+                  <a:pt x="2881617" y="1223338"/>
+                </a:lnTo>
+                <a:lnTo>
+                  <a:pt x="0" y="1223338"/>
+                </a:lnTo>
+                <a:lnTo>
+                  <a:pt x="0" y="0"/>
+                </a:lnTo>
+                <a:close/>
+              </a:path>
+            </a:pathLst>
+          </a:custGeom>
+          <a:blipFill>
+            <a:blip r:embed="rId3"/>
+            <a:stretch>
+              <a:fillRect t="-46829" b="-28253"/>
+            </a:stretch>
+          </a:blipFill>
+        </p:spPr>
+      </p:sp>
+    </p:spTree>
+    <p:extLst>
+      <p:ext uri="{BB962C8B-B14F-4D97-AF65-F5344CB8AC3E}">
+        <p14:creationId xmlns:p14="http://schemas.microsoft.com/office/powerpoint/2010/main" val="1739760983"/>
+      </p:ext>
+    </p:extLst>
+  </p:cSld>
+  <p:clrMapOvr>
+    <a:masterClrMapping/>
+  </p:clrMapOvr>
+</p:sld>
+</file>
+
+<file path=ppt/slides/slide19.xml><?xml version="1.0" encoding="utf-8"?>
 <p:sld xmlns:a="http://schemas.openxmlformats.org/drawingml/2006/main" xmlns:r="http://schemas.openxmlformats.org/officeDocument/2006/relationships" xmlns:p="http://schemas.openxmlformats.org/presentationml/2006/main">
   <p:cSld>
     <p:bg>
@@ -10467,49 +12940,22 @@
           </a:blipFill>
         </p:spPr>
       </p:sp>
-    </p:spTree>
-  </p:cSld>
-  <p:clrMapOvr>
-    <a:masterClrMapping/>
-  </p:clrMapOvr>
-</p:sld>
-</file>
-
-<file path=ppt/slides/slide18.xml><?xml version="1.0" encoding="utf-8"?>
-<p:sld xmlns:a="http://schemas.openxmlformats.org/drawingml/2006/main" xmlns:r="http://schemas.openxmlformats.org/officeDocument/2006/relationships" xmlns:p="http://schemas.openxmlformats.org/presentationml/2006/main">
-  <p:cSld>
-    <p:bg>
-      <p:bgPr>
-        <a:solidFill>
-          <a:srgbClr val="DC882D"/>
-        </a:solidFill>
-        <a:effectLst/>
-      </p:bgPr>
-    </p:bg>
-    <p:spTree>
-      <p:nvGrpSpPr>
-        <p:cNvPr id="1" name=""/>
-        <p:cNvGrpSpPr/>
-        <p:nvPr/>
-      </p:nvGrpSpPr>
-      <p:grpSpPr>
-        <a:xfrm>
-          <a:off x="0" y="0"/>
-          <a:ext cx="0" cy="0"/>
-          <a:chOff x="0" y="0"/>
-          <a:chExt cx="0" cy="0"/>
-        </a:xfrm>
-      </p:grpSpPr>
       <p:sp>
         <p:nvSpPr>
-          <p:cNvPr id="2" name="Freeform 2"/>
+          <p:cNvPr id="4" name="Freeform 3">
+            <a:extLst>
+              <a:ext uri="{FF2B5EF4-FFF2-40B4-BE49-F238E27FC236}">
+                <a16:creationId xmlns:a16="http://schemas.microsoft.com/office/drawing/2014/main" id="{5C66CE53-A3E8-0CE8-9CB8-97308F2AE9F7}"/>
+              </a:ext>
+            </a:extLst>
+          </p:cNvPr>
           <p:cNvSpPr/>
           <p:nvPr/>
         </p:nvSpPr>
         <p:spPr>
           <a:xfrm>
-            <a:off x="0" y="2171700"/>
-            <a:ext cx="18288000" cy="6630753"/>
+            <a:off x="0" y="-194638"/>
+            <a:ext cx="2881617" cy="1223338"/>
           </a:xfrm>
           <a:custGeom>
             <a:avLst/>
@@ -10518,18 +12964,18 @@
             <a:cxnLst/>
             <a:rect l="l" t="t" r="r" b="b"/>
             <a:pathLst>
-              <a:path w="18288000" h="6630753">
+              <a:path w="2881617" h="1223338">
                 <a:moveTo>
                   <a:pt x="0" y="0"/>
                 </a:moveTo>
                 <a:lnTo>
-                  <a:pt x="18288000" y="0"/>
+                  <a:pt x="2881617" y="0"/>
                 </a:lnTo>
                 <a:lnTo>
-                  <a:pt x="18288000" y="6630753"/>
+                  <a:pt x="2881617" y="1223338"/>
                 </a:lnTo>
                 <a:lnTo>
-                  <a:pt x="0" y="6630753"/>
+                  <a:pt x="0" y="1223338"/>
                 </a:lnTo>
                 <a:lnTo>
                   <a:pt x="0" y="0"/>
@@ -10539,91 +12985,58 @@
             </a:pathLst>
           </a:custGeom>
           <a:blipFill>
-            <a:blip r:embed="rId2"/>
+            <a:blip r:embed="rId3"/>
             <a:stretch>
-              <a:fillRect l="-4492" r="-2881" b="-1105"/>
+              <a:fillRect t="-46829" b="-28253"/>
             </a:stretch>
           </a:blipFill>
         </p:spPr>
       </p:sp>
-    </p:spTree>
-  </p:cSld>
-  <p:clrMapOvr>
-    <a:masterClrMapping/>
-  </p:clrMapOvr>
-</p:sld>
-</file>
-
-<file path=ppt/slides/slide19.xml><?xml version="1.0" encoding="utf-8"?>
-<p:sld xmlns:a="http://schemas.openxmlformats.org/drawingml/2006/main" xmlns:r="http://schemas.openxmlformats.org/officeDocument/2006/relationships" xmlns:p="http://schemas.openxmlformats.org/presentationml/2006/main">
-  <p:cSld>
-    <p:bg>
-      <p:bgPr>
-        <a:solidFill>
-          <a:srgbClr val="DC882D"/>
-        </a:solidFill>
-        <a:effectLst/>
-      </p:bgPr>
-    </p:bg>
-    <p:spTree>
-      <p:nvGrpSpPr>
-        <p:cNvPr id="1" name=""/>
-        <p:cNvGrpSpPr/>
-        <p:nvPr/>
-      </p:nvGrpSpPr>
-      <p:grpSpPr>
-        <a:xfrm>
-          <a:off x="0" y="0"/>
-          <a:ext cx="0" cy="0"/>
-          <a:chOff x="0" y="0"/>
-          <a:chExt cx="0" cy="0"/>
-        </a:xfrm>
-      </p:grpSpPr>
       <p:sp>
         <p:nvSpPr>
-          <p:cNvPr id="2" name="Freeform 2"/>
-          <p:cNvSpPr/>
+          <p:cNvPr id="5" name="TextBox 4">
+            <a:extLst>
+              <a:ext uri="{FF2B5EF4-FFF2-40B4-BE49-F238E27FC236}">
+                <a16:creationId xmlns:a16="http://schemas.microsoft.com/office/drawing/2014/main" id="{9452D9A9-45AB-B287-1F2F-E45A02F8DB3E}"/>
+              </a:ext>
+            </a:extLst>
+          </p:cNvPr>
+          <p:cNvSpPr txBox="1"/>
           <p:nvPr/>
         </p:nvSpPr>
         <p:spPr>
           <a:xfrm>
-            <a:off x="1110691" y="952500"/>
-            <a:ext cx="16066617" cy="8464954"/>
+            <a:off x="7734301" y="291566"/>
+            <a:ext cx="2971800" cy="769441"/>
           </a:xfrm>
-          <a:custGeom>
+          <a:prstGeom prst="rect">
             <a:avLst/>
-            <a:gdLst/>
-            <a:ahLst/>
-            <a:cxnLst/>
-            <a:rect l="l" t="t" r="r" b="b"/>
-            <a:pathLst>
-              <a:path w="16066617" h="7931554">
-                <a:moveTo>
-                  <a:pt x="0" y="0"/>
-                </a:moveTo>
-                <a:lnTo>
-                  <a:pt x="16066617" y="0"/>
-                </a:lnTo>
-                <a:lnTo>
-                  <a:pt x="16066617" y="7931554"/>
-                </a:lnTo>
-                <a:lnTo>
-                  <a:pt x="0" y="7931554"/>
-                </a:lnTo>
-                <a:lnTo>
-                  <a:pt x="0" y="0"/>
-                </a:lnTo>
-                <a:close/>
-              </a:path>
-            </a:pathLst>
-          </a:custGeom>
-          <a:blipFill>
-            <a:blip r:embed="rId2"/>
-            <a:stretch>
-              <a:fillRect l="-1268" t="-482" b="-482"/>
-            </a:stretch>
-          </a:blipFill>
+          </a:prstGeom>
+          <a:noFill/>
         </p:spPr>
+        <p:txBody>
+          <a:bodyPr wrap="square" rtlCol="0">
+            <a:spAutoFit/>
+          </a:bodyPr>
+          <a:lstStyle/>
+          <a:p>
+            <a:r>
+              <a:rPr lang="en-US" sz="4400" dirty="0">
+                <a:solidFill>
+                  <a:schemeClr val="bg2"/>
+                </a:solidFill>
+                <a:latin typeface="Roca Two" panose="020B0604020202020204" charset="0"/>
+              </a:rPr>
+              <a:t>Results</a:t>
+            </a:r>
+            <a:endParaRPr lang="en-IN" sz="4400" dirty="0">
+              <a:solidFill>
+                <a:schemeClr val="bg2"/>
+              </a:solidFill>
+              <a:latin typeface="Roca Two" panose="020B0604020202020204" charset="0"/>
+            </a:endParaRPr>
+          </a:p>
+        </p:txBody>
       </p:sp>
     </p:spTree>
   </p:cSld>
@@ -10863,40 +13276,45 @@
         </p:nvSpPr>
         <p:spPr>
           <a:xfrm>
-            <a:off x="5514141" y="-213044"/>
-            <a:ext cx="12261673" cy="10636889"/>
+            <a:off x="5687110" y="-91671"/>
+            <a:ext cx="12088704" cy="10479792"/>
           </a:xfrm>
           <a:prstGeom prst="rect">
             <a:avLst/>
           </a:prstGeom>
         </p:spPr>
         <p:txBody>
-          <a:bodyPr lIns="0" tIns="0" rIns="0" bIns="0" rtlCol="0" anchor="t">
+          <a:bodyPr wrap="square" lIns="0" tIns="0" rIns="0" bIns="0" rtlCol="0" anchor="t">
             <a:spAutoFit/>
           </a:bodyPr>
           <a:lstStyle/>
           <a:p>
             <a:pPr algn="just">
               <a:lnSpc>
-                <a:spcPts val="4224"/>
+                <a:spcPct val="150000"/>
               </a:lnSpc>
             </a:pPr>
-            <a:endParaRPr dirty="0"/>
-          </a:p>
-          <a:p>
-            <a:pPr marL="608098" lvl="1" indent="-304049" algn="just">
+            <a:endParaRPr sz="2400" dirty="0">
+              <a:solidFill>
+                <a:schemeClr val="bg2"/>
+              </a:solidFill>
+              <a:latin typeface="Roca Two" panose="020B0604020202020204" charset="0"/>
+            </a:endParaRPr>
+          </a:p>
+          <a:p>
+            <a:pPr marL="761249" lvl="1" indent="-457200" algn="just">
               <a:lnSpc>
-                <a:spcPts val="4224"/>
+                <a:spcPct val="150000"/>
               </a:lnSpc>
-              <a:buFont typeface="Arial"/>
+              <a:buFont typeface="Arial" panose="020B0604020202020204" pitchFamily="34" charset="0"/>
               <a:buChar char="•"/>
             </a:pPr>
             <a:r>
-              <a:rPr lang="en-US" sz="2816" spc="112" dirty="0">
-                <a:solidFill>
-                  <a:srgbClr val="FFFFFF"/>
-                </a:solidFill>
-                <a:latin typeface="Roca Two"/>
+              <a:rPr lang="en-US" sz="2400" spc="112" dirty="0">
+                <a:solidFill>
+                  <a:schemeClr val="bg2"/>
+                </a:solidFill>
+                <a:latin typeface="Roca Two" panose="020B0604020202020204" charset="0"/>
                 <a:ea typeface="Roca Two"/>
                 <a:cs typeface="Roca Two"/>
                 <a:sym typeface="Roca Two"/>
@@ -10905,19 +13323,19 @@
             </a:r>
           </a:p>
           <a:p>
-            <a:pPr marL="608098" lvl="1" indent="-304049" algn="just">
+            <a:pPr marL="761249" lvl="1" indent="-457200" algn="just">
               <a:lnSpc>
-                <a:spcPts val="4224"/>
+                <a:spcPct val="150000"/>
               </a:lnSpc>
-              <a:buFont typeface="Arial"/>
+              <a:buFont typeface="Arial" panose="020B0604020202020204" pitchFamily="34" charset="0"/>
               <a:buChar char="•"/>
             </a:pPr>
             <a:r>
-              <a:rPr lang="en-US" sz="2816" spc="112" dirty="0">
-                <a:solidFill>
-                  <a:srgbClr val="FFFFFF"/>
-                </a:solidFill>
-                <a:latin typeface="Roca Two"/>
+              <a:rPr lang="en-US" sz="2400" spc="112" dirty="0">
+                <a:solidFill>
+                  <a:schemeClr val="bg2"/>
+                </a:solidFill>
+                <a:latin typeface="Roca Two" panose="020B0604020202020204" charset="0"/>
                 <a:ea typeface="Roca Two"/>
                 <a:cs typeface="Roca Two"/>
                 <a:sym typeface="Roca Two"/>
@@ -10926,19 +13344,19 @@
             </a:r>
           </a:p>
           <a:p>
-            <a:pPr marL="608098" lvl="1" indent="-304049" algn="just">
+            <a:pPr marL="761249" lvl="1" indent="-457200" algn="just">
               <a:lnSpc>
-                <a:spcPts val="4224"/>
+                <a:spcPct val="150000"/>
               </a:lnSpc>
-              <a:buFont typeface="Arial"/>
+              <a:buFont typeface="Arial" panose="020B0604020202020204" pitchFamily="34" charset="0"/>
               <a:buChar char="•"/>
             </a:pPr>
             <a:r>
-              <a:rPr lang="en-US" sz="2816" spc="112" dirty="0">
-                <a:solidFill>
-                  <a:srgbClr val="FFFFFF"/>
-                </a:solidFill>
-                <a:latin typeface="Roca Two"/>
+              <a:rPr lang="en-US" sz="2400" spc="112" dirty="0">
+                <a:solidFill>
+                  <a:schemeClr val="bg2"/>
+                </a:solidFill>
+                <a:latin typeface="Roca Two" panose="020B0604020202020204" charset="0"/>
                 <a:ea typeface="Roca Two"/>
                 <a:cs typeface="Roca Two"/>
                 <a:sym typeface="Roca Two"/>
@@ -10947,157 +13365,270 @@
             </a:r>
           </a:p>
           <a:p>
-            <a:pPr marL="608098" lvl="1" indent="-304049" algn="just">
+            <a:pPr marL="457200" lvl="0" indent="-457200" algn="just">
               <a:lnSpc>
-                <a:spcPts val="4224"/>
+                <a:spcPct val="150000"/>
               </a:lnSpc>
-              <a:buFont typeface="Arial"/>
+              <a:buFont typeface="Arial" panose="020B0604020202020204" pitchFamily="34" charset="0"/>
               <a:buChar char="•"/>
             </a:pPr>
             <a:r>
-              <a:rPr lang="en-US" sz="2816" spc="112" dirty="0" err="1">
-                <a:solidFill>
-                  <a:srgbClr val="FFFFFF"/>
-                </a:solidFill>
-                <a:latin typeface="Roca Two"/>
-                <a:ea typeface="Roca Two"/>
-                <a:cs typeface="Roca Two"/>
-                <a:sym typeface="Roca Two"/>
-              </a:rPr>
-              <a:t>DataForge</a:t>
-            </a:r>
-            <a:r>
-              <a:rPr lang="en-US" sz="2816" spc="112" dirty="0">
-                <a:solidFill>
-                  <a:srgbClr val="FFFFFF"/>
-                </a:solidFill>
-                <a:latin typeface="Roca Two"/>
-                <a:ea typeface="Roca Two"/>
-                <a:cs typeface="Roca Two"/>
-                <a:sym typeface="Roca Two"/>
-              </a:rPr>
-              <a:t> was developed to integrate and improve the quality of manufacturing data.</a:t>
-            </a:r>
-          </a:p>
-          <a:p>
-            <a:pPr marL="608098" lvl="1" indent="-304049" algn="just">
+              <a:rPr lang="en-IN" sz="2400" b="1" dirty="0">
+                <a:solidFill>
+                  <a:schemeClr val="bg2"/>
+                </a:solidFill>
+                <a:latin typeface="Roca Two" panose="020B0604020202020204" charset="0"/>
+              </a:rPr>
+              <a:t> Automated ETL:</a:t>
+            </a:r>
+            <a:r>
+              <a:rPr lang="en-IN" sz="2400" dirty="0">
+                <a:solidFill>
+                  <a:schemeClr val="bg2"/>
+                </a:solidFill>
+                <a:latin typeface="Roca Two" panose="020B0604020202020204" charset="0"/>
+              </a:rPr>
+              <a:t> Successfully automated the extraction, transformation, and processing of manufacturing data.</a:t>
+            </a:r>
+          </a:p>
+          <a:p>
+            <a:pPr marL="457200" lvl="0" indent="-457200" algn="just">
               <a:lnSpc>
-                <a:spcPts val="4224"/>
+                <a:spcPct val="150000"/>
               </a:lnSpc>
-              <a:buFont typeface="Arial"/>
+              <a:buFont typeface="Arial" panose="020B0604020202020204" pitchFamily="34" charset="0"/>
               <a:buChar char="•"/>
             </a:pPr>
             <a:r>
-              <a:rPr lang="en-US" sz="2816" spc="112" dirty="0">
-                <a:solidFill>
-                  <a:srgbClr val="FFFFFF"/>
-                </a:solidFill>
-                <a:latin typeface="Roca Two"/>
-                <a:ea typeface="Roca Two"/>
-                <a:cs typeface="Roca Two"/>
-                <a:sym typeface="Roca Two"/>
-              </a:rPr>
-              <a:t>The platform uses ETL for data extraction and transformation, Apache Kafka for real-time data ingestion, and Apache </a:t>
-            </a:r>
-            <a:r>
-              <a:rPr lang="en-US" sz="2816" spc="112" dirty="0" err="1">
-                <a:solidFill>
-                  <a:srgbClr val="FFFFFF"/>
-                </a:solidFill>
-                <a:latin typeface="Roca Two"/>
-                <a:ea typeface="Roca Two"/>
-                <a:cs typeface="Roca Two"/>
-                <a:sym typeface="Roca Two"/>
-              </a:rPr>
-              <a:t>PySpark</a:t>
-            </a:r>
-            <a:r>
-              <a:rPr lang="en-US" sz="2816" spc="112" dirty="0">
-                <a:solidFill>
-                  <a:srgbClr val="FFFFFF"/>
-                </a:solidFill>
-                <a:latin typeface="Roca Two"/>
-                <a:ea typeface="Roca Two"/>
-                <a:cs typeface="Roca Two"/>
-                <a:sym typeface="Roca Two"/>
-              </a:rPr>
-              <a:t> for scalable data processing.</a:t>
-            </a:r>
-          </a:p>
-          <a:p>
-            <a:pPr marL="608098" lvl="1" indent="-304049" algn="just">
+              <a:rPr lang="en-IN" sz="2400" b="1" dirty="0">
+                <a:solidFill>
+                  <a:schemeClr val="bg2"/>
+                </a:solidFill>
+                <a:latin typeface="Roca Two" panose="020B0604020202020204" charset="0"/>
+              </a:rPr>
+              <a:t>  Data Quality:</a:t>
+            </a:r>
+            <a:r>
+              <a:rPr lang="en-IN" sz="2400" dirty="0">
+                <a:solidFill>
+                  <a:schemeClr val="bg2"/>
+                </a:solidFill>
+                <a:latin typeface="Roca Two" panose="020B0604020202020204" charset="0"/>
+              </a:rPr>
+              <a:t> Detected missing, duplicate, inconsistent, and invalid records through automated validation.</a:t>
+            </a:r>
+          </a:p>
+          <a:p>
+            <a:pPr marL="457200" lvl="0" indent="-457200" algn="just">
               <a:lnSpc>
-                <a:spcPts val="4224"/>
+                <a:spcPct val="150000"/>
               </a:lnSpc>
-              <a:buFont typeface="Arial"/>
+              <a:buFont typeface="Arial" panose="020B0604020202020204" pitchFamily="34" charset="0"/>
               <a:buChar char="•"/>
             </a:pPr>
             <a:r>
-              <a:rPr lang="en-US" sz="2816" spc="112" dirty="0">
-                <a:solidFill>
-                  <a:srgbClr val="FFFFFF"/>
-                </a:solidFill>
-                <a:latin typeface="Roca Two"/>
-                <a:ea typeface="Roca Two"/>
-                <a:cs typeface="Roca Two"/>
-                <a:sym typeface="Roca Two"/>
-              </a:rPr>
-              <a:t>Automated data quality checks identify and handle errors and improve data reliability.</a:t>
-            </a:r>
-          </a:p>
-          <a:p>
-            <a:pPr marL="608098" lvl="1" indent="-304049" algn="just">
+              <a:rPr lang="en-IN" sz="2400" b="1" dirty="0">
+                <a:solidFill>
+                  <a:schemeClr val="bg2"/>
+                </a:solidFill>
+                <a:latin typeface="Roca Two" panose="020B0604020202020204" charset="0"/>
+              </a:rPr>
+              <a:t>Quality Improvement:</a:t>
+            </a:r>
+            <a:r>
+              <a:rPr lang="en-IN" sz="2400" dirty="0">
+                <a:solidFill>
+                  <a:schemeClr val="bg2"/>
+                </a:solidFill>
+                <a:latin typeface="Roca Two" panose="020B0604020202020204" charset="0"/>
+              </a:rPr>
+              <a:t> Improved demonstrated data quality from </a:t>
+            </a:r>
+            <a:r>
+              <a:rPr lang="en-IN" sz="2400" b="1" dirty="0">
+                <a:solidFill>
+                  <a:schemeClr val="bg2"/>
+                </a:solidFill>
+                <a:latin typeface="Roca Two" panose="020B0604020202020204" charset="0"/>
+              </a:rPr>
+              <a:t>91.3% to 100%</a:t>
+            </a:r>
+            <a:r>
+              <a:rPr lang="en-IN" sz="2400" dirty="0">
+                <a:solidFill>
+                  <a:schemeClr val="bg2"/>
+                </a:solidFill>
+                <a:latin typeface="Roca Two" panose="020B0604020202020204" charset="0"/>
+              </a:rPr>
+              <a:t>.</a:t>
+            </a:r>
+          </a:p>
+          <a:p>
+            <a:pPr marL="457200" lvl="0" indent="-457200" algn="just">
               <a:lnSpc>
-                <a:spcPts val="4224"/>
+                <a:spcPct val="150000"/>
               </a:lnSpc>
-              <a:buFont typeface="Arial"/>
+              <a:buFont typeface="Arial" panose="020B0604020202020204" pitchFamily="34" charset="0"/>
               <a:buChar char="•"/>
             </a:pPr>
             <a:r>
-              <a:rPr lang="en-US" sz="2816" spc="112" dirty="0">
-                <a:solidFill>
-                  <a:srgbClr val="FFFFFF"/>
-                </a:solidFill>
-                <a:latin typeface="Roca Two"/>
-                <a:ea typeface="Roca Two"/>
-                <a:cs typeface="Roca Two"/>
-                <a:sym typeface="Roca Two"/>
-              </a:rPr>
-              <a:t>The final outcome is a centralized, clean, validated, and analytics-ready dataset.</a:t>
-            </a:r>
-          </a:p>
-          <a:p>
-            <a:pPr marL="608098" lvl="1" indent="-304049" algn="just">
+              <a:rPr lang="en-IN" sz="2400" b="1" dirty="0">
+                <a:solidFill>
+                  <a:schemeClr val="bg2"/>
+                </a:solidFill>
+                <a:latin typeface="Roca Two" panose="020B0604020202020204" charset="0"/>
+              </a:rPr>
+              <a:t>Invalid Record Detection:</a:t>
+            </a:r>
+            <a:r>
+              <a:rPr lang="en-IN" sz="2400" dirty="0">
+                <a:solidFill>
+                  <a:schemeClr val="bg2"/>
+                </a:solidFill>
+                <a:latin typeface="Roca Two" panose="020B0604020202020204" charset="0"/>
+              </a:rPr>
+              <a:t> Increased invalid-record detection from </a:t>
+            </a:r>
+            <a:r>
+              <a:rPr lang="en-IN" sz="2400" b="1" dirty="0">
+                <a:solidFill>
+                  <a:schemeClr val="bg2"/>
+                </a:solidFill>
+                <a:latin typeface="Roca Two" panose="020B0604020202020204" charset="0"/>
+              </a:rPr>
+              <a:t>4.3% to 12.8%</a:t>
+            </a:r>
+            <a:r>
+              <a:rPr lang="en-IN" sz="2400" dirty="0">
+                <a:solidFill>
+                  <a:schemeClr val="bg2"/>
+                </a:solidFill>
+                <a:latin typeface="Roca Two" panose="020B0604020202020204" charset="0"/>
+              </a:rPr>
+              <a:t> compared with the existing approach.</a:t>
+            </a:r>
+          </a:p>
+          <a:p>
+            <a:pPr marL="457200" lvl="0" indent="-457200" algn="just">
               <a:lnSpc>
-                <a:spcPts val="4224"/>
+                <a:spcPct val="150000"/>
               </a:lnSpc>
-              <a:buFont typeface="Arial"/>
+              <a:buFont typeface="Arial" panose="020B0604020202020204" pitchFamily="34" charset="0"/>
               <a:buChar char="•"/>
             </a:pPr>
             <a:r>
-              <a:rPr lang="en-US" sz="2816" spc="112" dirty="0">
-                <a:solidFill>
-                  <a:srgbClr val="FFFFFF"/>
-                </a:solidFill>
-                <a:latin typeface="Roca Two"/>
-                <a:ea typeface="Roca Two"/>
-                <a:cs typeface="Roca Two"/>
-                <a:sym typeface="Roca Two"/>
-              </a:rPr>
-              <a:t>This project reduces manual effort, improves data accuracy, and helps manufacturing organizations make better data-driven decisions.</a:t>
-            </a:r>
-          </a:p>
-          <a:p>
-            <a:pPr algn="just">
+              <a:rPr lang="en-IN" sz="2400" b="1" dirty="0">
+                <a:solidFill>
+                  <a:schemeClr val="bg2"/>
+                </a:solidFill>
+                <a:latin typeface="Roca Two" panose="020B0604020202020204" charset="0"/>
+              </a:rPr>
+              <a:t>Processing Performance:</a:t>
+            </a:r>
+            <a:r>
+              <a:rPr lang="en-IN" sz="2400" dirty="0">
+                <a:solidFill>
+                  <a:schemeClr val="bg2"/>
+                </a:solidFill>
+                <a:latin typeface="Roca Two" panose="020B0604020202020204" charset="0"/>
+              </a:rPr>
+              <a:t> Achieved </a:t>
+            </a:r>
+            <a:r>
+              <a:rPr lang="en-IN" sz="2400" b="1" dirty="0">
+                <a:solidFill>
+                  <a:schemeClr val="bg2"/>
+                </a:solidFill>
+                <a:latin typeface="Roca Two" panose="020B0604020202020204" charset="0"/>
+              </a:rPr>
+              <a:t>60.6 K records/min</a:t>
+            </a:r>
+            <a:r>
+              <a:rPr lang="en-IN" sz="2400" dirty="0">
+                <a:solidFill>
+                  <a:schemeClr val="bg2"/>
+                </a:solidFill>
+                <a:latin typeface="Roca Two" panose="020B0604020202020204" charset="0"/>
+              </a:rPr>
+              <a:t> throughput and </a:t>
+            </a:r>
+            <a:r>
+              <a:rPr lang="en-IN" sz="2400" b="1" dirty="0">
+                <a:solidFill>
+                  <a:schemeClr val="bg2"/>
+                </a:solidFill>
+                <a:latin typeface="Roca Two" panose="020B0604020202020204" charset="0"/>
+              </a:rPr>
+              <a:t>1.50 sec/1K records</a:t>
+            </a:r>
+            <a:r>
+              <a:rPr lang="en-IN" sz="2400" dirty="0">
+                <a:solidFill>
+                  <a:schemeClr val="bg2"/>
+                </a:solidFill>
+                <a:latin typeface="Roca Two" panose="020B0604020202020204" charset="0"/>
+              </a:rPr>
+              <a:t> processing time.</a:t>
+            </a:r>
+          </a:p>
+          <a:p>
+            <a:pPr marL="457200" lvl="0" indent="-457200" algn="just">
               <a:lnSpc>
-                <a:spcPts val="4224"/>
+                <a:spcPct val="150000"/>
               </a:lnSpc>
+              <a:buFont typeface="Arial" panose="020B0604020202020204" pitchFamily="34" charset="0"/>
+              <a:buChar char="•"/>
             </a:pPr>
-            <a:endParaRPr lang="en-US" sz="2816" spc="112" dirty="0">
+            <a:r>
+              <a:rPr lang="en-IN" sz="2400" b="1" dirty="0">
+                <a:solidFill>
+                  <a:schemeClr val="bg2"/>
+                </a:solidFill>
+                <a:latin typeface="Roca Two" panose="020B0604020202020204" charset="0"/>
+              </a:rPr>
+              <a:t>Reliable Output:</a:t>
+            </a:r>
+            <a:r>
+              <a:rPr lang="en-IN" sz="2400" dirty="0">
+                <a:solidFill>
+                  <a:schemeClr val="bg2"/>
+                </a:solidFill>
+                <a:latin typeface="Roca Two" panose="020B0604020202020204" charset="0"/>
+              </a:rPr>
+              <a:t> Produced </a:t>
+            </a:r>
+            <a:r>
+              <a:rPr lang="en-IN" sz="2400" b="1" dirty="0">
+                <a:solidFill>
+                  <a:schemeClr val="bg2"/>
+                </a:solidFill>
+                <a:latin typeface="Roca Two" panose="020B0604020202020204" charset="0"/>
+              </a:rPr>
+              <a:t>clean, validated, and analytics-ready manufacturing data</a:t>
+            </a:r>
+            <a:r>
+              <a:rPr lang="en-IN" sz="2400" dirty="0">
+                <a:solidFill>
+                  <a:schemeClr val="bg2"/>
+                </a:solidFill>
+                <a:latin typeface="Roca Two" panose="020B0604020202020204" charset="0"/>
+              </a:rPr>
+              <a:t>.</a:t>
+            </a:r>
+          </a:p>
+          <a:p>
+            <a:pPr marL="457200" indent="-457200" algn="just">
+              <a:lnSpc>
+                <a:spcPct val="150000"/>
+              </a:lnSpc>
+              <a:buFont typeface="Arial" panose="020B0604020202020204" pitchFamily="34" charset="0"/>
+              <a:buChar char="•"/>
+            </a:pPr>
+            <a:endParaRPr lang="en-US" sz="2400" spc="112" dirty="0">
               <a:solidFill>
-                <a:srgbClr val="FFFFFF"/>
+                <a:schemeClr val="bg2"/>
               </a:solidFill>
-              <a:latin typeface="Roca Two"/>
+              <a:latin typeface="Roca Two" panose="020B0604020202020204" charset="0"/>
               <a:ea typeface="Roca Two"/>
               <a:cs typeface="Roca Two"/>
               <a:sym typeface="Roca Two"/>
@@ -11234,403 +13765,101 @@
       </p:grpSpPr>
       <p:sp>
         <p:nvSpPr>
-          <p:cNvPr id="2" name="TextBox 2"/>
-          <p:cNvSpPr txBox="1"/>
+          <p:cNvPr id="2" name="Freeform 2"/>
+          <p:cNvSpPr/>
           <p:nvPr/>
         </p:nvSpPr>
         <p:spPr>
           <a:xfrm>
-            <a:off x="562003" y="963931"/>
-            <a:ext cx="17163994" cy="8359138"/>
+            <a:off x="0" y="2171700"/>
+            <a:ext cx="18288000" cy="6630753"/>
           </a:xfrm>
-          <a:prstGeom prst="rect">
+          <a:custGeom>
             <a:avLst/>
-          </a:prstGeom>
+            <a:gdLst/>
+            <a:ahLst/>
+            <a:cxnLst/>
+            <a:rect l="l" t="t" r="r" b="b"/>
+            <a:pathLst>
+              <a:path w="18288000" h="6630753">
+                <a:moveTo>
+                  <a:pt x="0" y="0"/>
+                </a:moveTo>
+                <a:lnTo>
+                  <a:pt x="18288000" y="0"/>
+                </a:lnTo>
+                <a:lnTo>
+                  <a:pt x="18288000" y="6630753"/>
+                </a:lnTo>
+                <a:lnTo>
+                  <a:pt x="0" y="6630753"/>
+                </a:lnTo>
+                <a:lnTo>
+                  <a:pt x="0" y="0"/>
+                </a:lnTo>
+                <a:close/>
+              </a:path>
+            </a:pathLst>
+          </a:custGeom>
+          <a:blipFill>
+            <a:blip r:embed="rId2"/>
+            <a:stretch>
+              <a:fillRect l="-4492" r="-2881" b="-1105"/>
+            </a:stretch>
+          </a:blipFill>
         </p:spPr>
-        <p:txBody>
-          <a:bodyPr lIns="0" tIns="0" rIns="0" bIns="0" rtlCol="0" anchor="t">
-            <a:spAutoFit/>
-          </a:bodyPr>
-          <a:lstStyle/>
-          <a:p>
-            <a:pPr algn="just">
-              <a:lnSpc>
-                <a:spcPts val="3360"/>
-              </a:lnSpc>
-              <a:spcBef>
-                <a:spcPct val="0"/>
-              </a:spcBef>
-            </a:pPr>
-            <a:r>
-              <a:rPr lang="en-US" sz="2400" b="1" dirty="0">
-                <a:solidFill>
-                  <a:srgbClr val="FFFFFF"/>
-                </a:solidFill>
-                <a:latin typeface="Roca Two Bold"/>
-                <a:ea typeface="Roca Two Bold"/>
-                <a:cs typeface="Roca Two Bold"/>
-                <a:sym typeface="Roca Two Bold"/>
-              </a:rPr>
-              <a:t>Code Quality</a:t>
-            </a:r>
-          </a:p>
-          <a:p>
-            <a:pPr marL="518175" lvl="1" indent="-259087" algn="l">
-              <a:lnSpc>
-                <a:spcPts val="3360"/>
-              </a:lnSpc>
-              <a:buFont typeface="Arial"/>
-              <a:buChar char="•"/>
-            </a:pPr>
-            <a:r>
-              <a:rPr lang="en-US" sz="2400" b="1" dirty="0">
-                <a:solidFill>
-                  <a:srgbClr val="FFFFFF"/>
-                </a:solidFill>
-                <a:latin typeface="Roca Two Bold"/>
-                <a:ea typeface="Roca Two Bold"/>
-                <a:cs typeface="Roca Two Bold"/>
-                <a:sym typeface="Roca Two Bold"/>
-              </a:rPr>
-              <a:t>Modular Design: ETL, data quality, storage, and dashboard components are organized into separate modules for easier maintenance.</a:t>
-            </a:r>
-          </a:p>
-          <a:p>
-            <a:pPr marL="518175" lvl="1" indent="-259087" algn="l">
-              <a:lnSpc>
-                <a:spcPts val="3360"/>
-              </a:lnSpc>
-              <a:buFont typeface="Arial"/>
-              <a:buChar char="•"/>
-            </a:pPr>
-            <a:r>
-              <a:rPr lang="en-US" sz="2400" b="1" dirty="0">
-                <a:solidFill>
-                  <a:srgbClr val="FFFFFF"/>
-                </a:solidFill>
-                <a:latin typeface="Roca Two Bold"/>
-                <a:ea typeface="Roca Two Bold"/>
-                <a:cs typeface="Roca Two Bold"/>
-                <a:sym typeface="Roca Two Bold"/>
-              </a:rPr>
-              <a:t>Readable &amp; Structured Code: Clear naming, organized functions, and consistent coding practices are followed.</a:t>
-            </a:r>
-          </a:p>
-          <a:p>
-            <a:pPr marL="518175" lvl="1" indent="-259087" algn="l">
-              <a:lnSpc>
-                <a:spcPts val="3360"/>
-              </a:lnSpc>
-              <a:buFont typeface="Arial"/>
-              <a:buChar char="•"/>
-            </a:pPr>
-            <a:r>
-              <a:rPr lang="en-US" sz="2400" b="1" dirty="0">
-                <a:solidFill>
-                  <a:srgbClr val="FFFFFF"/>
-                </a:solidFill>
-                <a:latin typeface="Roca Two Bold"/>
-                <a:ea typeface="Roca Two Bold"/>
-                <a:cs typeface="Roca Two Bold"/>
-                <a:sym typeface="Roca Two Bold"/>
-              </a:rPr>
-              <a:t>Error Handling: Data validation and exception handling help manage missing, invalid, and inconsistent manufacturing data.</a:t>
-            </a:r>
-          </a:p>
-          <a:p>
-            <a:pPr marL="518175" lvl="1" indent="-259087" algn="l">
-              <a:lnSpc>
-                <a:spcPts val="3360"/>
-              </a:lnSpc>
-              <a:buFont typeface="Arial"/>
-              <a:buChar char="•"/>
-            </a:pPr>
-            <a:r>
-              <a:rPr lang="en-US" sz="2400" b="1" dirty="0">
-                <a:solidFill>
-                  <a:srgbClr val="FFFFFF"/>
-                </a:solidFill>
-                <a:latin typeface="Roca Two Bold"/>
-                <a:ea typeface="Roca Two Bold"/>
-                <a:cs typeface="Roca Two Bold"/>
-                <a:sym typeface="Roca Two Bold"/>
-              </a:rPr>
-              <a:t>Data Quality Checks: Automated validation rules are used to identify and separate invalid records from clean data.</a:t>
-            </a:r>
-          </a:p>
-          <a:p>
-            <a:pPr marL="518175" lvl="1" indent="-259087" algn="l">
-              <a:lnSpc>
-                <a:spcPts val="3360"/>
-              </a:lnSpc>
-              <a:buFont typeface="Arial"/>
-              <a:buChar char="•"/>
-            </a:pPr>
-            <a:r>
-              <a:rPr lang="en-US" sz="2400" b="1" dirty="0">
-                <a:solidFill>
-                  <a:srgbClr val="FFFFFF"/>
-                </a:solidFill>
-                <a:latin typeface="Roca Two Bold"/>
-                <a:ea typeface="Roca Two Bold"/>
-                <a:cs typeface="Roca Two Bold"/>
-                <a:sym typeface="Roca Two Bold"/>
-              </a:rPr>
-              <a:t>Version Control: Git is used for tracking code changes and managing project development.</a:t>
-            </a:r>
-          </a:p>
-          <a:p>
-            <a:pPr algn="l">
-              <a:lnSpc>
-                <a:spcPts val="3360"/>
-              </a:lnSpc>
-            </a:pPr>
-            <a:endParaRPr lang="en-US" sz="2400" b="1" dirty="0">
-              <a:solidFill>
-                <a:srgbClr val="FFFFFF"/>
-              </a:solidFill>
-              <a:latin typeface="Roca Two Bold"/>
-              <a:ea typeface="Roca Two Bold"/>
-              <a:cs typeface="Roca Two Bold"/>
-              <a:sym typeface="Roca Two Bold"/>
-            </a:endParaRPr>
-          </a:p>
-          <a:p>
-            <a:pPr algn="l">
-              <a:lnSpc>
-                <a:spcPts val="3360"/>
-              </a:lnSpc>
-            </a:pPr>
-            <a:r>
-              <a:rPr lang="en-US" sz="2400" b="1" dirty="0">
-                <a:solidFill>
-                  <a:srgbClr val="FFFFFF"/>
-                </a:solidFill>
-                <a:latin typeface="Roca Two Bold"/>
-                <a:ea typeface="Roca Two Bold"/>
-                <a:cs typeface="Roca Two Bold"/>
-                <a:sym typeface="Roca Two Bold"/>
-              </a:rPr>
-              <a:t>Functionality</a:t>
-            </a:r>
-          </a:p>
-          <a:p>
-            <a:pPr marL="518175" lvl="1" indent="-259087" algn="l">
-              <a:lnSpc>
-                <a:spcPts val="3360"/>
-              </a:lnSpc>
-              <a:buFont typeface="Arial"/>
-              <a:buChar char="•"/>
-            </a:pPr>
-            <a:r>
-              <a:rPr lang="en-US" sz="2400" b="1" dirty="0">
-                <a:solidFill>
-                  <a:srgbClr val="FFFFFF"/>
-                </a:solidFill>
-                <a:latin typeface="Roca Two Bold"/>
-                <a:ea typeface="Roca Two Bold"/>
-                <a:cs typeface="Roca Two Bold"/>
-                <a:sym typeface="Roca Two Bold"/>
-              </a:rPr>
-              <a:t>Data Generation: Simulated manufacturing data is generated to represent production, sensor, inventory, maintenance, and quality records.</a:t>
-            </a:r>
-          </a:p>
-          <a:p>
-            <a:pPr marL="518175" lvl="1" indent="-259087" algn="l">
-              <a:lnSpc>
-                <a:spcPts val="3360"/>
-              </a:lnSpc>
-              <a:buFont typeface="Arial"/>
-              <a:buChar char="•"/>
-            </a:pPr>
-            <a:r>
-              <a:rPr lang="en-US" sz="2400" b="1" dirty="0">
-                <a:solidFill>
-                  <a:srgbClr val="FFFFFF"/>
-                </a:solidFill>
-                <a:latin typeface="Roca Two Bold"/>
-                <a:ea typeface="Roca Two Bold"/>
-                <a:cs typeface="Roca Two Bold"/>
-                <a:sym typeface="Roca Two Bold"/>
-              </a:rPr>
-              <a:t>Local Data Ingestion: </a:t>
-            </a:r>
-            <a:r>
-              <a:rPr lang="en-US" sz="2400" b="1" dirty="0" err="1">
-                <a:solidFill>
-                  <a:srgbClr val="FFFFFF"/>
-                </a:solidFill>
-                <a:latin typeface="Roca Two Bold"/>
-                <a:ea typeface="Roca Two Bold"/>
-                <a:cs typeface="Roca Two Bold"/>
-                <a:sym typeface="Roca Two Bold"/>
-              </a:rPr>
-              <a:t>FileBus</a:t>
-            </a:r>
-            <a:r>
-              <a:rPr lang="en-US" sz="2400" b="1" dirty="0">
-                <a:solidFill>
-                  <a:srgbClr val="FFFFFF"/>
-                </a:solidFill>
-                <a:latin typeface="Roca Two Bold"/>
-                <a:ea typeface="Roca Two Bold"/>
-                <a:cs typeface="Roca Two Bold"/>
-                <a:sym typeface="Roca Two Bold"/>
-              </a:rPr>
-              <a:t> is used to simulate the streaming/topic layer for the laptop demonstration.</a:t>
-            </a:r>
-          </a:p>
-          <a:p>
-            <a:pPr marL="518175" lvl="1" indent="-259087" algn="l">
-              <a:lnSpc>
-                <a:spcPts val="3360"/>
-              </a:lnSpc>
-              <a:buFont typeface="Arial"/>
-              <a:buChar char="•"/>
-            </a:pPr>
-            <a:r>
-              <a:rPr lang="en-US" sz="2400" b="1" dirty="0">
-                <a:solidFill>
-                  <a:srgbClr val="FFFFFF"/>
-                </a:solidFill>
-                <a:latin typeface="Roca Two Bold"/>
-                <a:ea typeface="Roca Two Bold"/>
-                <a:cs typeface="Roca Two Bold"/>
-                <a:sym typeface="Roca Two Bold"/>
-              </a:rPr>
-              <a:t>ETL Processing: Pandas performs data cleaning, transformation, validation, and preparation.</a:t>
-            </a:r>
-          </a:p>
-          <a:p>
-            <a:pPr marL="518175" lvl="1" indent="-259087" algn="l">
-              <a:lnSpc>
-                <a:spcPts val="3360"/>
-              </a:lnSpc>
-              <a:buFont typeface="Arial"/>
-              <a:buChar char="•"/>
-            </a:pPr>
-            <a:r>
-              <a:rPr lang="en-US" sz="2400" b="1" dirty="0">
-                <a:solidFill>
-                  <a:srgbClr val="FFFFFF"/>
-                </a:solidFill>
-                <a:latin typeface="Roca Two Bold"/>
-                <a:ea typeface="Roca Two Bold"/>
-                <a:cs typeface="Roca Two Bold"/>
-                <a:sym typeface="Roca Two Bold"/>
-              </a:rPr>
-              <a:t>Data Quality Validation: Quality checks identify missing, duplicate, inconsistent, and invalid records.</a:t>
-            </a:r>
-          </a:p>
-          <a:p>
-            <a:pPr marL="518175" lvl="1" indent="-259087" algn="l">
-              <a:lnSpc>
-                <a:spcPts val="3360"/>
-              </a:lnSpc>
-              <a:buFont typeface="Arial"/>
-              <a:buChar char="•"/>
-            </a:pPr>
-            <a:r>
-              <a:rPr lang="en-US" sz="2400" b="1" dirty="0">
-                <a:solidFill>
-                  <a:srgbClr val="FFFFFF"/>
-                </a:solidFill>
-                <a:latin typeface="Roca Two Bold"/>
-                <a:ea typeface="Roca Two Bold"/>
-                <a:cs typeface="Roca Two Bold"/>
-                <a:sym typeface="Roca Two Bold"/>
-              </a:rPr>
-              <a:t>Data Quarantine: Invalid records are separated while valid records are retained for further processing.</a:t>
-            </a:r>
-          </a:p>
-          <a:p>
-            <a:pPr marL="518175" lvl="1" indent="-259087" algn="l">
-              <a:lnSpc>
-                <a:spcPts val="3360"/>
-              </a:lnSpc>
-              <a:buFont typeface="Arial"/>
-              <a:buChar char="•"/>
-            </a:pPr>
-            <a:r>
-              <a:rPr lang="en-US" sz="2400" b="1" dirty="0">
-                <a:solidFill>
-                  <a:srgbClr val="FFFFFF"/>
-                </a:solidFill>
-                <a:latin typeface="Roca Two Bold"/>
-                <a:ea typeface="Roca Two Bold"/>
-                <a:cs typeface="Roca Two Bold"/>
-                <a:sym typeface="Roca Two Bold"/>
-              </a:rPr>
-              <a:t>Data Storage: SQLite stores the cleaned and validated manufacturing data in the local demo.</a:t>
-            </a:r>
-          </a:p>
-          <a:p>
-            <a:pPr marL="518175" lvl="1" indent="-259087" algn="l">
-              <a:lnSpc>
-                <a:spcPts val="3360"/>
-              </a:lnSpc>
-              <a:buFont typeface="Arial"/>
-              <a:buChar char="•"/>
-            </a:pPr>
-            <a:r>
-              <a:rPr lang="en-US" sz="2400" b="1" dirty="0">
-                <a:solidFill>
-                  <a:srgbClr val="FFFFFF"/>
-                </a:solidFill>
-                <a:latin typeface="Roca Two Bold"/>
-                <a:ea typeface="Roca Two Bold"/>
-                <a:cs typeface="Roca Two Bold"/>
-                <a:sym typeface="Roca Two Bold"/>
-              </a:rPr>
-              <a:t>Dashboard: Displays quality improvement, valid and quarantined records, source-wise results, and raw vs. cleaned data.</a:t>
-            </a:r>
-          </a:p>
-          <a:p>
-            <a:pPr marL="518175" lvl="1" indent="-259087" algn="l">
-              <a:lnSpc>
-                <a:spcPts val="3360"/>
-              </a:lnSpc>
-              <a:buFont typeface="Arial"/>
-              <a:buChar char="•"/>
-            </a:pPr>
-            <a:r>
-              <a:rPr lang="en-US" sz="2400" b="1" dirty="0">
-                <a:solidFill>
-                  <a:srgbClr val="FFFFFF"/>
-                </a:solidFill>
-                <a:latin typeface="Roca Two Bold"/>
-                <a:ea typeface="Roca Two Bold"/>
-                <a:cs typeface="Roca Two Bold"/>
-                <a:sym typeface="Roca Two Bold"/>
-              </a:rPr>
-              <a:t>Production Scalability: The architecture can be extended to Kafka, </a:t>
-            </a:r>
-            <a:r>
-              <a:rPr lang="en-US" sz="2400" b="1" dirty="0" err="1">
-                <a:solidFill>
-                  <a:srgbClr val="FFFFFF"/>
-                </a:solidFill>
-                <a:latin typeface="Roca Two Bold"/>
-                <a:ea typeface="Roca Two Bold"/>
-                <a:cs typeface="Roca Two Bold"/>
-                <a:sym typeface="Roca Two Bold"/>
-              </a:rPr>
-              <a:t>PySpark</a:t>
-            </a:r>
-            <a:r>
-              <a:rPr lang="en-US" sz="2400" b="1" dirty="0">
-                <a:solidFill>
-                  <a:srgbClr val="FFFFFF"/>
-                </a:solidFill>
-                <a:latin typeface="Roca Two Bold"/>
-                <a:ea typeface="Roca Two Bold"/>
-                <a:cs typeface="Roca Two Bold"/>
-                <a:sym typeface="Roca Two Bold"/>
-              </a:rPr>
-              <a:t>, and MySQL for full deployment.</a:t>
-            </a:r>
-          </a:p>
-        </p:txBody>
+      </p:sp>
+      <p:sp>
+        <p:nvSpPr>
+          <p:cNvPr id="4" name="Freeform 3">
+            <a:extLst>
+              <a:ext uri="{FF2B5EF4-FFF2-40B4-BE49-F238E27FC236}">
+                <a16:creationId xmlns:a16="http://schemas.microsoft.com/office/drawing/2014/main" id="{C84A9DE6-27B9-1FEF-D101-238513B90A8B}"/>
+              </a:ext>
+            </a:extLst>
+          </p:cNvPr>
+          <p:cNvSpPr/>
+          <p:nvPr/>
+        </p:nvSpPr>
+        <p:spPr>
+          <a:xfrm>
+            <a:off x="0" y="-194638"/>
+            <a:ext cx="2881617" cy="1223338"/>
+          </a:xfrm>
+          <a:custGeom>
+            <a:avLst/>
+            <a:gdLst/>
+            <a:ahLst/>
+            <a:cxnLst/>
+            <a:rect l="l" t="t" r="r" b="b"/>
+            <a:pathLst>
+              <a:path w="2881617" h="1223338">
+                <a:moveTo>
+                  <a:pt x="0" y="0"/>
+                </a:moveTo>
+                <a:lnTo>
+                  <a:pt x="2881617" y="0"/>
+                </a:lnTo>
+                <a:lnTo>
+                  <a:pt x="2881617" y="1223338"/>
+                </a:lnTo>
+                <a:lnTo>
+                  <a:pt x="0" y="1223338"/>
+                </a:lnTo>
+                <a:lnTo>
+                  <a:pt x="0" y="0"/>
+                </a:lnTo>
+                <a:close/>
+              </a:path>
+            </a:pathLst>
+          </a:custGeom>
+          <a:blipFill>
+            <a:blip r:embed="rId3"/>
+            <a:stretch>
+              <a:fillRect t="-46829" b="-28253"/>
+            </a:stretch>
+          </a:blipFill>
+        </p:spPr>
       </p:sp>
     </p:spTree>
   </p:cSld>
@@ -11641,6 +13870,1040 @@
 </file>
 
 <file path=ppt/slides/slide21.xml><?xml version="1.0" encoding="utf-8"?>
+<p:sld xmlns:a="http://schemas.openxmlformats.org/drawingml/2006/main" xmlns:r="http://schemas.openxmlformats.org/officeDocument/2006/relationships" xmlns:p="http://schemas.openxmlformats.org/presentationml/2006/main">
+  <p:cSld>
+    <p:bg>
+      <p:bgPr>
+        <a:solidFill>
+          <a:srgbClr val="DC882D"/>
+        </a:solidFill>
+        <a:effectLst/>
+      </p:bgPr>
+    </p:bg>
+    <p:spTree>
+      <p:nvGrpSpPr>
+        <p:cNvPr id="1" name=""/>
+        <p:cNvGrpSpPr/>
+        <p:nvPr/>
+      </p:nvGrpSpPr>
+      <p:grpSpPr>
+        <a:xfrm>
+          <a:off x="0" y="0"/>
+          <a:ext cx="0" cy="0"/>
+          <a:chOff x="0" y="0"/>
+          <a:chExt cx="0" cy="0"/>
+        </a:xfrm>
+      </p:grpSpPr>
+      <p:sp>
+        <p:nvSpPr>
+          <p:cNvPr id="2" name="Freeform 2"/>
+          <p:cNvSpPr/>
+          <p:nvPr/>
+        </p:nvSpPr>
+        <p:spPr>
+          <a:xfrm>
+            <a:off x="1110691" y="1409700"/>
+            <a:ext cx="16066617" cy="8464954"/>
+          </a:xfrm>
+          <a:custGeom>
+            <a:avLst/>
+            <a:gdLst/>
+            <a:ahLst/>
+            <a:cxnLst/>
+            <a:rect l="l" t="t" r="r" b="b"/>
+            <a:pathLst>
+              <a:path w="16066617" h="7931554">
+                <a:moveTo>
+                  <a:pt x="0" y="0"/>
+                </a:moveTo>
+                <a:lnTo>
+                  <a:pt x="16066617" y="0"/>
+                </a:lnTo>
+                <a:lnTo>
+                  <a:pt x="16066617" y="7931554"/>
+                </a:lnTo>
+                <a:lnTo>
+                  <a:pt x="0" y="7931554"/>
+                </a:lnTo>
+                <a:lnTo>
+                  <a:pt x="0" y="0"/>
+                </a:lnTo>
+                <a:close/>
+              </a:path>
+            </a:pathLst>
+          </a:custGeom>
+          <a:blipFill>
+            <a:blip r:embed="rId2"/>
+            <a:stretch>
+              <a:fillRect l="-1268" t="-482" b="-482"/>
+            </a:stretch>
+          </a:blipFill>
+        </p:spPr>
+        <p:txBody>
+          <a:bodyPr/>
+          <a:lstStyle/>
+          <a:p>
+            <a:endParaRPr lang="en-IN" dirty="0"/>
+          </a:p>
+        </p:txBody>
+      </p:sp>
+      <p:sp>
+        <p:nvSpPr>
+          <p:cNvPr id="4" name="Freeform 3">
+            <a:extLst>
+              <a:ext uri="{FF2B5EF4-FFF2-40B4-BE49-F238E27FC236}">
+                <a16:creationId xmlns:a16="http://schemas.microsoft.com/office/drawing/2014/main" id="{4460941A-BFEE-27CC-0D7E-C463A3290DE3}"/>
+              </a:ext>
+            </a:extLst>
+          </p:cNvPr>
+          <p:cNvSpPr/>
+          <p:nvPr/>
+        </p:nvSpPr>
+        <p:spPr>
+          <a:xfrm>
+            <a:off x="0" y="-194638"/>
+            <a:ext cx="2881617" cy="1223338"/>
+          </a:xfrm>
+          <a:custGeom>
+            <a:avLst/>
+            <a:gdLst/>
+            <a:ahLst/>
+            <a:cxnLst/>
+            <a:rect l="l" t="t" r="r" b="b"/>
+            <a:pathLst>
+              <a:path w="2881617" h="1223338">
+                <a:moveTo>
+                  <a:pt x="0" y="0"/>
+                </a:moveTo>
+                <a:lnTo>
+                  <a:pt x="2881617" y="0"/>
+                </a:lnTo>
+                <a:lnTo>
+                  <a:pt x="2881617" y="1223338"/>
+                </a:lnTo>
+                <a:lnTo>
+                  <a:pt x="0" y="1223338"/>
+                </a:lnTo>
+                <a:lnTo>
+                  <a:pt x="0" y="0"/>
+                </a:lnTo>
+                <a:close/>
+              </a:path>
+            </a:pathLst>
+          </a:custGeom>
+          <a:blipFill>
+            <a:blip r:embed="rId3"/>
+            <a:stretch>
+              <a:fillRect t="-46829" b="-28253"/>
+            </a:stretch>
+          </a:blipFill>
+        </p:spPr>
+      </p:sp>
+    </p:spTree>
+  </p:cSld>
+  <p:clrMapOvr>
+    <a:masterClrMapping/>
+  </p:clrMapOvr>
+</p:sld>
+</file>
+
+<file path=ppt/slides/slide22.xml><?xml version="1.0" encoding="utf-8"?>
+<p:sld xmlns:a="http://schemas.openxmlformats.org/drawingml/2006/main" xmlns:r="http://schemas.openxmlformats.org/officeDocument/2006/relationships" xmlns:p="http://schemas.openxmlformats.org/presentationml/2006/main">
+  <p:cSld>
+    <p:bg>
+      <p:bgPr>
+        <a:solidFill>
+          <a:srgbClr val="DC882D"/>
+        </a:solidFill>
+        <a:effectLst/>
+      </p:bgPr>
+    </p:bg>
+    <p:spTree>
+      <p:nvGrpSpPr>
+        <p:cNvPr id="1" name="">
+          <a:extLst>
+            <a:ext uri="{FF2B5EF4-FFF2-40B4-BE49-F238E27FC236}">
+              <a16:creationId xmlns:a16="http://schemas.microsoft.com/office/drawing/2014/main" id="{873BA906-C29A-AB3F-CB01-6124462BB433}"/>
+            </a:ext>
+          </a:extLst>
+        </p:cNvPr>
+        <p:cNvGrpSpPr/>
+        <p:nvPr/>
+      </p:nvGrpSpPr>
+      <p:grpSpPr>
+        <a:xfrm>
+          <a:off x="0" y="0"/>
+          <a:ext cx="0" cy="0"/>
+          <a:chOff x="0" y="0"/>
+          <a:chExt cx="0" cy="0"/>
+        </a:xfrm>
+      </p:grpSpPr>
+      <p:sp>
+        <p:nvSpPr>
+          <p:cNvPr id="4" name="Freeform 3">
+            <a:extLst>
+              <a:ext uri="{FF2B5EF4-FFF2-40B4-BE49-F238E27FC236}">
+                <a16:creationId xmlns:a16="http://schemas.microsoft.com/office/drawing/2014/main" id="{BCC48516-E60B-B14F-6B9E-143A82558CB4}"/>
+              </a:ext>
+            </a:extLst>
+          </p:cNvPr>
+          <p:cNvSpPr/>
+          <p:nvPr/>
+        </p:nvSpPr>
+        <p:spPr>
+          <a:xfrm>
+            <a:off x="0" y="-194638"/>
+            <a:ext cx="2881617" cy="1223338"/>
+          </a:xfrm>
+          <a:custGeom>
+            <a:avLst/>
+            <a:gdLst/>
+            <a:ahLst/>
+            <a:cxnLst/>
+            <a:rect l="l" t="t" r="r" b="b"/>
+            <a:pathLst>
+              <a:path w="2881617" h="1223338">
+                <a:moveTo>
+                  <a:pt x="0" y="0"/>
+                </a:moveTo>
+                <a:lnTo>
+                  <a:pt x="2881617" y="0"/>
+                </a:lnTo>
+                <a:lnTo>
+                  <a:pt x="2881617" y="1223338"/>
+                </a:lnTo>
+                <a:lnTo>
+                  <a:pt x="0" y="1223338"/>
+                </a:lnTo>
+                <a:lnTo>
+                  <a:pt x="0" y="0"/>
+                </a:lnTo>
+                <a:close/>
+              </a:path>
+            </a:pathLst>
+          </a:custGeom>
+          <a:blipFill>
+            <a:blip r:embed="rId2"/>
+            <a:stretch>
+              <a:fillRect t="-46829" b="-28253"/>
+            </a:stretch>
+          </a:blipFill>
+        </p:spPr>
+      </p:sp>
+      <p:sp>
+        <p:nvSpPr>
+          <p:cNvPr id="3" name="TextBox 2">
+            <a:extLst>
+              <a:ext uri="{FF2B5EF4-FFF2-40B4-BE49-F238E27FC236}">
+                <a16:creationId xmlns:a16="http://schemas.microsoft.com/office/drawing/2014/main" id="{4B676355-F24A-E288-144C-6999E7FD8B64}"/>
+              </a:ext>
+            </a:extLst>
+          </p:cNvPr>
+          <p:cNvSpPr txBox="1"/>
+          <p:nvPr/>
+        </p:nvSpPr>
+        <p:spPr>
+          <a:xfrm>
+            <a:off x="1143000" y="1943100"/>
+            <a:ext cx="15621000" cy="6501780"/>
+          </a:xfrm>
+          <a:prstGeom prst="rect">
+            <a:avLst/>
+          </a:prstGeom>
+          <a:noFill/>
+        </p:spPr>
+        <p:txBody>
+          <a:bodyPr wrap="square">
+            <a:spAutoFit/>
+          </a:bodyPr>
+          <a:lstStyle/>
+          <a:p>
+            <a:pPr algn="just">
+              <a:lnSpc>
+                <a:spcPct val="150000"/>
+              </a:lnSpc>
+            </a:pPr>
+            <a:r>
+              <a:rPr lang="en-IN" sz="2800" dirty="0" err="1">
+                <a:solidFill>
+                  <a:schemeClr val="bg2"/>
+                </a:solidFill>
+                <a:latin typeface="Roca Two" panose="020B0604020202020204" charset="0"/>
+              </a:rPr>
+              <a:t>DataForge</a:t>
+            </a:r>
+            <a:r>
+              <a:rPr lang="en-IN" sz="2800" dirty="0">
+                <a:solidFill>
+                  <a:schemeClr val="bg2"/>
+                </a:solidFill>
+                <a:latin typeface="Roca Two" panose="020B0604020202020204" charset="0"/>
+              </a:rPr>
+              <a:t> automates the </a:t>
+            </a:r>
+            <a:r>
+              <a:rPr lang="en-IN" sz="2800" b="1" dirty="0">
+                <a:solidFill>
+                  <a:schemeClr val="bg2"/>
+                </a:solidFill>
+                <a:latin typeface="Roca Two" panose="020B0604020202020204" charset="0"/>
+              </a:rPr>
+              <a:t>manufacturing data-processing and ETL process</a:t>
+            </a:r>
+            <a:r>
+              <a:rPr lang="en-IN" sz="2800" dirty="0">
+                <a:solidFill>
+                  <a:schemeClr val="bg2"/>
+                </a:solidFill>
+                <a:latin typeface="Roca Two" panose="020B0604020202020204" charset="0"/>
+              </a:rPr>
+              <a:t> and performs </a:t>
+            </a:r>
+            <a:r>
+              <a:rPr lang="en-IN" sz="2800" b="1" dirty="0">
+                <a:solidFill>
+                  <a:schemeClr val="bg2"/>
+                </a:solidFill>
+                <a:latin typeface="Roca Two" panose="020B0604020202020204" charset="0"/>
+              </a:rPr>
+              <a:t>automated data-quality checks</a:t>
+            </a:r>
+            <a:r>
+              <a:rPr lang="en-IN" sz="2800" dirty="0">
+                <a:solidFill>
+                  <a:schemeClr val="bg2"/>
+                </a:solidFill>
+                <a:latin typeface="Roca Two" panose="020B0604020202020204" charset="0"/>
+              </a:rPr>
+              <a:t> for missing, duplicate, inconsistent, and invalid records. It achieves a </a:t>
+            </a:r>
+            <a:r>
+              <a:rPr lang="en-IN" sz="2800" b="1" dirty="0">
+                <a:solidFill>
+                  <a:schemeClr val="bg2"/>
+                </a:solidFill>
+                <a:latin typeface="Roca Two" panose="020B0604020202020204" charset="0"/>
+              </a:rPr>
+              <a:t>throughput of 60.6 K records/min</a:t>
+            </a:r>
+            <a:r>
+              <a:rPr lang="en-IN" sz="2800" dirty="0">
+                <a:solidFill>
+                  <a:schemeClr val="bg2"/>
+                </a:solidFill>
+                <a:latin typeface="Roca Two" panose="020B0604020202020204" charset="0"/>
+              </a:rPr>
+              <a:t>, compared with </a:t>
+            </a:r>
+            <a:r>
+              <a:rPr lang="en-IN" sz="2800" b="1" dirty="0">
+                <a:solidFill>
+                  <a:schemeClr val="bg2"/>
+                </a:solidFill>
+                <a:latin typeface="Roca Two" panose="020B0604020202020204" charset="0"/>
+              </a:rPr>
+              <a:t>77.7 K records/min</a:t>
+            </a:r>
+            <a:r>
+              <a:rPr lang="en-IN" sz="2800" dirty="0">
+                <a:solidFill>
+                  <a:schemeClr val="bg2"/>
+                </a:solidFill>
+                <a:latin typeface="Roca Two" panose="020B0604020202020204" charset="0"/>
+              </a:rPr>
+              <a:t> in the existing approach, and takes </a:t>
+            </a:r>
+            <a:r>
+              <a:rPr lang="en-IN" sz="2800" b="1" dirty="0">
+                <a:solidFill>
+                  <a:schemeClr val="bg2"/>
+                </a:solidFill>
+                <a:latin typeface="Roca Two" panose="020B0604020202020204" charset="0"/>
+              </a:rPr>
+              <a:t>1.50 sec/1K records</a:t>
+            </a:r>
+            <a:r>
+              <a:rPr lang="en-IN" sz="2800" dirty="0">
+                <a:solidFill>
+                  <a:schemeClr val="bg2"/>
+                </a:solidFill>
+                <a:latin typeface="Roca Two" panose="020B0604020202020204" charset="0"/>
+              </a:rPr>
+              <a:t> compared with </a:t>
+            </a:r>
+            <a:r>
+              <a:rPr lang="en-IN" sz="2800" b="1" dirty="0">
+                <a:solidFill>
+                  <a:schemeClr val="bg2"/>
+                </a:solidFill>
+                <a:latin typeface="Roca Two" panose="020B0604020202020204" charset="0"/>
+              </a:rPr>
+              <a:t>0.77 sec/1K records</a:t>
+            </a:r>
+            <a:r>
+              <a:rPr lang="en-IN" sz="2800" dirty="0">
+                <a:solidFill>
+                  <a:schemeClr val="bg2"/>
+                </a:solidFill>
+                <a:latin typeface="Roca Two" panose="020B0604020202020204" charset="0"/>
+              </a:rPr>
+              <a:t>. </a:t>
+            </a:r>
+            <a:r>
+              <a:rPr lang="en-IN" sz="2800" dirty="0" err="1">
+                <a:solidFill>
+                  <a:schemeClr val="bg2"/>
+                </a:solidFill>
+                <a:latin typeface="Roca Two" panose="020B0604020202020204" charset="0"/>
+              </a:rPr>
+              <a:t>DataForge</a:t>
+            </a:r>
+            <a:r>
+              <a:rPr lang="en-IN" sz="2800" dirty="0">
+                <a:solidFill>
+                  <a:schemeClr val="bg2"/>
+                </a:solidFill>
+                <a:latin typeface="Roca Two" panose="020B0604020202020204" charset="0"/>
+              </a:rPr>
+              <a:t> detects </a:t>
+            </a:r>
+            <a:r>
+              <a:rPr lang="en-IN" sz="2800" b="1" dirty="0">
+                <a:solidFill>
+                  <a:schemeClr val="bg2"/>
+                </a:solidFill>
+                <a:latin typeface="Roca Two" panose="020B0604020202020204" charset="0"/>
+              </a:rPr>
+              <a:t>12.8% invalid records</a:t>
+            </a:r>
+            <a:r>
+              <a:rPr lang="en-IN" sz="2800" dirty="0">
+                <a:solidFill>
+                  <a:schemeClr val="bg2"/>
+                </a:solidFill>
+                <a:latin typeface="Roca Two" panose="020B0604020202020204" charset="0"/>
+              </a:rPr>
+              <a:t>, compared with only </a:t>
+            </a:r>
+            <a:r>
+              <a:rPr lang="en-IN" sz="2800" b="1" dirty="0">
+                <a:solidFill>
+                  <a:schemeClr val="bg2"/>
+                </a:solidFill>
+                <a:latin typeface="Roca Two" panose="020B0604020202020204" charset="0"/>
+              </a:rPr>
+              <a:t>4.3%</a:t>
+            </a:r>
+            <a:r>
+              <a:rPr lang="en-IN" sz="2800" dirty="0">
+                <a:solidFill>
+                  <a:schemeClr val="bg2"/>
+                </a:solidFill>
+                <a:latin typeface="Roca Two" panose="020B0604020202020204" charset="0"/>
+              </a:rPr>
+              <a:t> in the existing approach, and the demonstrated implementation improved data quality from </a:t>
+            </a:r>
+            <a:r>
+              <a:rPr lang="en-IN" sz="2800" b="1" dirty="0">
+                <a:solidFill>
+                  <a:schemeClr val="bg2"/>
+                </a:solidFill>
+                <a:latin typeface="Roca Two" panose="020B0604020202020204" charset="0"/>
+              </a:rPr>
+              <a:t>91.3% to 100%</a:t>
+            </a:r>
+            <a:r>
+              <a:rPr lang="en-IN" sz="2800" dirty="0">
+                <a:solidFill>
+                  <a:schemeClr val="bg2"/>
+                </a:solidFill>
+                <a:latin typeface="Roca Two" panose="020B0604020202020204" charset="0"/>
+              </a:rPr>
+              <a:t>. Although </a:t>
+            </a:r>
+            <a:r>
+              <a:rPr lang="en-IN" sz="2800" dirty="0" err="1">
+                <a:solidFill>
+                  <a:schemeClr val="bg2"/>
+                </a:solidFill>
+                <a:latin typeface="Roca Two" panose="020B0604020202020204" charset="0"/>
+              </a:rPr>
+              <a:t>DataForge</a:t>
+            </a:r>
+            <a:r>
+              <a:rPr lang="en-IN" sz="2800" dirty="0">
+                <a:solidFill>
+                  <a:schemeClr val="bg2"/>
+                </a:solidFill>
+                <a:latin typeface="Roca Two" panose="020B0604020202020204" charset="0"/>
+              </a:rPr>
+              <a:t> introduces some </a:t>
+            </a:r>
+            <a:r>
+              <a:rPr lang="en-IN" sz="2800" b="1" dirty="0">
+                <a:solidFill>
+                  <a:schemeClr val="bg2"/>
+                </a:solidFill>
+                <a:latin typeface="Roca Two" panose="020B0604020202020204" charset="0"/>
+              </a:rPr>
+              <a:t>processing overhead</a:t>
+            </a:r>
+            <a:r>
+              <a:rPr lang="en-IN" sz="2800" dirty="0">
+                <a:solidFill>
+                  <a:schemeClr val="bg2"/>
+                </a:solidFill>
+                <a:latin typeface="Roca Two" panose="020B0604020202020204" charset="0"/>
+              </a:rPr>
+              <a:t>, it provides </a:t>
+            </a:r>
+            <a:r>
+              <a:rPr lang="en-IN" sz="2800" b="1" dirty="0">
+                <a:solidFill>
+                  <a:schemeClr val="bg2"/>
+                </a:solidFill>
+                <a:latin typeface="Roca Two" panose="020B0604020202020204" charset="0"/>
+              </a:rPr>
+              <a:t>better error detection and data reliability</a:t>
+            </a:r>
+            <a:r>
+              <a:rPr lang="en-IN" sz="2800" dirty="0">
+                <a:solidFill>
+                  <a:schemeClr val="bg2"/>
+                </a:solidFill>
+                <a:latin typeface="Roca Two" panose="020B0604020202020204" charset="0"/>
+              </a:rPr>
+              <a:t>. Overall, the system produces </a:t>
+            </a:r>
+            <a:r>
+              <a:rPr lang="en-IN" sz="2800" b="1" dirty="0">
+                <a:solidFill>
+                  <a:schemeClr val="bg2"/>
+                </a:solidFill>
+                <a:latin typeface="Roca Two" panose="020B0604020202020204" charset="0"/>
+              </a:rPr>
+              <a:t>clean, validated, and analytics-ready manufacturing data</a:t>
+            </a:r>
+            <a:r>
+              <a:rPr lang="en-IN" sz="2800" dirty="0">
+                <a:solidFill>
+                  <a:schemeClr val="bg2"/>
+                </a:solidFill>
+                <a:latin typeface="Roca Two" panose="020B0604020202020204" charset="0"/>
+              </a:rPr>
+              <a:t>, focusing more on </a:t>
+            </a:r>
+            <a:r>
+              <a:rPr lang="en-IN" sz="2800" b="1" dirty="0">
+                <a:solidFill>
+                  <a:schemeClr val="bg2"/>
+                </a:solidFill>
+                <a:latin typeface="Roca Two" panose="020B0604020202020204" charset="0"/>
+              </a:rPr>
+              <a:t>data quality and reliability rather than only processing speed</a:t>
+            </a:r>
+            <a:r>
+              <a:rPr lang="en-IN" sz="2800" dirty="0">
+                <a:solidFill>
+                  <a:schemeClr val="bg2"/>
+                </a:solidFill>
+                <a:latin typeface="Roca Two" panose="020B0604020202020204" charset="0"/>
+              </a:rPr>
+              <a:t>.</a:t>
+            </a:r>
+          </a:p>
+        </p:txBody>
+      </p:sp>
+      <p:sp>
+        <p:nvSpPr>
+          <p:cNvPr id="5" name="TextBox 4">
+            <a:extLst>
+              <a:ext uri="{FF2B5EF4-FFF2-40B4-BE49-F238E27FC236}">
+                <a16:creationId xmlns:a16="http://schemas.microsoft.com/office/drawing/2014/main" id="{A521B974-5D8D-6C56-6EA6-6333D0400425}"/>
+              </a:ext>
+            </a:extLst>
+          </p:cNvPr>
+          <p:cNvSpPr txBox="1"/>
+          <p:nvPr/>
+        </p:nvSpPr>
+        <p:spPr>
+          <a:xfrm>
+            <a:off x="6934200" y="723900"/>
+            <a:ext cx="5105400" cy="830997"/>
+          </a:xfrm>
+          <a:prstGeom prst="rect">
+            <a:avLst/>
+          </a:prstGeom>
+          <a:noFill/>
+        </p:spPr>
+        <p:txBody>
+          <a:bodyPr wrap="square" rtlCol="0">
+            <a:spAutoFit/>
+          </a:bodyPr>
+          <a:lstStyle/>
+          <a:p>
+            <a:r>
+              <a:rPr lang="en-US" sz="4800" dirty="0">
+                <a:solidFill>
+                  <a:schemeClr val="bg2"/>
+                </a:solidFill>
+                <a:latin typeface="Roca Two" panose="020B0604020202020204" charset="0"/>
+              </a:rPr>
+              <a:t>Conclusion</a:t>
+            </a:r>
+            <a:endParaRPr lang="en-IN" sz="4800" dirty="0">
+              <a:solidFill>
+                <a:schemeClr val="bg2"/>
+              </a:solidFill>
+              <a:latin typeface="Roca Two" panose="020B0604020202020204" charset="0"/>
+            </a:endParaRPr>
+          </a:p>
+        </p:txBody>
+      </p:sp>
+    </p:spTree>
+    <p:extLst>
+      <p:ext uri="{BB962C8B-B14F-4D97-AF65-F5344CB8AC3E}">
+        <p14:creationId xmlns:p14="http://schemas.microsoft.com/office/powerpoint/2010/main" val="1477619284"/>
+      </p:ext>
+    </p:extLst>
+  </p:cSld>
+  <p:clrMapOvr>
+    <a:masterClrMapping/>
+  </p:clrMapOvr>
+</p:sld>
+</file>
+
+<file path=ppt/slides/slide23.xml><?xml version="1.0" encoding="utf-8"?>
+<p:sld xmlns:a="http://schemas.openxmlformats.org/drawingml/2006/main" xmlns:r="http://schemas.openxmlformats.org/officeDocument/2006/relationships" xmlns:p="http://schemas.openxmlformats.org/presentationml/2006/main">
+  <p:cSld>
+    <p:bg>
+      <p:bgPr>
+        <a:solidFill>
+          <a:srgbClr val="DC882D"/>
+        </a:solidFill>
+        <a:effectLst/>
+      </p:bgPr>
+    </p:bg>
+    <p:spTree>
+      <p:nvGrpSpPr>
+        <p:cNvPr id="1" name="">
+          <a:extLst>
+            <a:ext uri="{FF2B5EF4-FFF2-40B4-BE49-F238E27FC236}">
+              <a16:creationId xmlns:a16="http://schemas.microsoft.com/office/drawing/2014/main" id="{3B9B7832-2F6F-D902-DDDC-BC06F0B45EBE}"/>
+            </a:ext>
+          </a:extLst>
+        </p:cNvPr>
+        <p:cNvGrpSpPr/>
+        <p:nvPr/>
+      </p:nvGrpSpPr>
+      <p:grpSpPr>
+        <a:xfrm>
+          <a:off x="0" y="0"/>
+          <a:ext cx="0" cy="0"/>
+          <a:chOff x="0" y="0"/>
+          <a:chExt cx="0" cy="0"/>
+        </a:xfrm>
+      </p:grpSpPr>
+      <p:sp>
+        <p:nvSpPr>
+          <p:cNvPr id="2" name="TextBox 2">
+            <a:extLst>
+              <a:ext uri="{FF2B5EF4-FFF2-40B4-BE49-F238E27FC236}">
+                <a16:creationId xmlns:a16="http://schemas.microsoft.com/office/drawing/2014/main" id="{9B2A0051-9B63-F56E-7C2F-96C00CD114BF}"/>
+              </a:ext>
+            </a:extLst>
+          </p:cNvPr>
+          <p:cNvSpPr txBox="1"/>
+          <p:nvPr/>
+        </p:nvSpPr>
+        <p:spPr>
+          <a:xfrm>
+            <a:off x="914400" y="2247900"/>
+            <a:ext cx="16459200" cy="6601807"/>
+          </a:xfrm>
+          <a:prstGeom prst="rect">
+            <a:avLst/>
+          </a:prstGeom>
+        </p:spPr>
+        <p:txBody>
+          <a:bodyPr wrap="square" lIns="0" tIns="0" rIns="0" bIns="0" rtlCol="0" anchor="t">
+            <a:spAutoFit/>
+          </a:bodyPr>
+          <a:lstStyle/>
+          <a:p>
+            <a:pPr algn="just">
+              <a:lnSpc>
+                <a:spcPct val="150000"/>
+              </a:lnSpc>
+            </a:pPr>
+            <a:r>
+              <a:rPr lang="en-IN" sz="2400" b="1" dirty="0">
+                <a:solidFill>
+                  <a:schemeClr val="bg2"/>
+                </a:solidFill>
+                <a:latin typeface="Roca Two" panose="020B0604020202020204" charset="0"/>
+              </a:rPr>
+              <a:t>[1]</a:t>
+            </a:r>
+            <a:r>
+              <a:rPr lang="en-IN" sz="2400" dirty="0">
+                <a:solidFill>
+                  <a:schemeClr val="bg2"/>
+                </a:solidFill>
+                <a:latin typeface="Roca Two" panose="020B0604020202020204" charset="0"/>
+              </a:rPr>
+              <a:t> </a:t>
+            </a:r>
+            <a:r>
+              <a:rPr lang="en-IN" sz="2400" dirty="0" err="1">
+                <a:solidFill>
+                  <a:schemeClr val="bg2"/>
+                </a:solidFill>
+                <a:latin typeface="Roca Two" panose="020B0604020202020204" charset="0"/>
+              </a:rPr>
+              <a:t>Hramov</a:t>
+            </a:r>
+            <a:r>
+              <a:rPr lang="en-IN" sz="2400" dirty="0">
+                <a:solidFill>
+                  <a:schemeClr val="bg2"/>
+                </a:solidFill>
+                <a:latin typeface="Roca Two" panose="020B0604020202020204" charset="0"/>
+              </a:rPr>
+              <a:t>, Alexander E., and Alexander N. </a:t>
+            </a:r>
+            <a:r>
+              <a:rPr lang="en-IN" sz="2400" dirty="0" err="1">
+                <a:solidFill>
+                  <a:schemeClr val="bg2"/>
+                </a:solidFill>
+                <a:latin typeface="Roca Two" panose="020B0604020202020204" charset="0"/>
+              </a:rPr>
+              <a:t>Pisarchik</a:t>
+            </a:r>
+            <a:r>
+              <a:rPr lang="en-IN" sz="2400" dirty="0">
+                <a:solidFill>
+                  <a:schemeClr val="bg2"/>
+                </a:solidFill>
+                <a:latin typeface="Roca Two" panose="020B0604020202020204" charset="0"/>
+              </a:rPr>
+              <a:t>. "Big data management and quality evaluation for the implementation of AI technologies in smart manufacturing." Applied Sciences 15.22 (2025): 11905.. </a:t>
+            </a:r>
+          </a:p>
+          <a:p>
+            <a:pPr algn="just">
+              <a:lnSpc>
+                <a:spcPct val="150000"/>
+              </a:lnSpc>
+            </a:pPr>
+            <a:r>
+              <a:rPr lang="en-IN" sz="2400" b="1" dirty="0">
+                <a:solidFill>
+                  <a:schemeClr val="bg2"/>
+                </a:solidFill>
+                <a:latin typeface="Roca Two" panose="020B0604020202020204" charset="0"/>
+              </a:rPr>
+              <a:t>[2]</a:t>
+            </a:r>
+            <a:r>
+              <a:rPr lang="en-IN" sz="2400" dirty="0">
+                <a:solidFill>
+                  <a:schemeClr val="bg2"/>
+                </a:solidFill>
+                <a:latin typeface="Roca Two" panose="020B0604020202020204" charset="0"/>
+              </a:rPr>
+              <a:t> Abdelrahman, Abdelrahman A., et al. "</a:t>
+            </a:r>
+            <a:r>
+              <a:rPr lang="en-IN" sz="2400" dirty="0" err="1">
+                <a:solidFill>
+                  <a:schemeClr val="bg2"/>
+                </a:solidFill>
+                <a:latin typeface="Roca Two" panose="020B0604020202020204" charset="0"/>
+              </a:rPr>
+              <a:t>DataForge</a:t>
+            </a:r>
+            <a:r>
+              <a:rPr lang="en-IN" sz="2400" dirty="0">
+                <a:solidFill>
+                  <a:schemeClr val="bg2"/>
+                </a:solidFill>
+                <a:latin typeface="Roca Two" panose="020B0604020202020204" charset="0"/>
+              </a:rPr>
+              <a:t>: An AI-Driven Data Warehouse Schema Generator." 2025 Twelfth International Conference on Intelligent Computing and Information Systems (ICICIS). IEEE, 2025.</a:t>
+            </a:r>
+          </a:p>
+          <a:p>
+            <a:pPr algn="just">
+              <a:lnSpc>
+                <a:spcPct val="150000"/>
+              </a:lnSpc>
+            </a:pPr>
+            <a:r>
+              <a:rPr lang="en-IN" sz="2400" b="1" dirty="0">
+                <a:solidFill>
+                  <a:schemeClr val="bg2"/>
+                </a:solidFill>
+                <a:latin typeface="Roca Two" panose="020B0604020202020204" charset="0"/>
+              </a:rPr>
+              <a:t>[3]</a:t>
+            </a:r>
+            <a:r>
+              <a:rPr lang="en-IN" sz="2400" dirty="0">
+                <a:solidFill>
+                  <a:schemeClr val="bg2"/>
+                </a:solidFill>
+                <a:latin typeface="Roca Two" panose="020B0604020202020204" charset="0"/>
+              </a:rPr>
+              <a:t> Mahmud, Danish, and Md </a:t>
+            </a:r>
+            <a:r>
+              <a:rPr lang="en-IN" sz="2400" dirty="0" err="1">
+                <a:solidFill>
+                  <a:schemeClr val="bg2"/>
+                </a:solidFill>
+                <a:latin typeface="Roca Two" panose="020B0604020202020204" charset="0"/>
+              </a:rPr>
+              <a:t>Zafor</a:t>
+            </a:r>
+            <a:r>
+              <a:rPr lang="en-IN" sz="2400" dirty="0">
+                <a:solidFill>
+                  <a:schemeClr val="bg2"/>
+                </a:solidFill>
+                <a:latin typeface="Roca Two" panose="020B0604020202020204" charset="0"/>
+              </a:rPr>
+              <a:t> Ikbal. "The role of </a:t>
+            </a:r>
+            <a:r>
+              <a:rPr lang="en-IN" sz="2400" dirty="0" err="1">
+                <a:solidFill>
+                  <a:schemeClr val="bg2"/>
+                </a:solidFill>
+                <a:latin typeface="Roca Two" panose="020B0604020202020204" charset="0"/>
+              </a:rPr>
+              <a:t>etl</a:t>
+            </a:r>
+            <a:r>
+              <a:rPr lang="en-IN" sz="2400" dirty="0">
+                <a:solidFill>
+                  <a:schemeClr val="bg2"/>
+                </a:solidFill>
+                <a:latin typeface="Roca Two" panose="020B0604020202020204" charset="0"/>
+              </a:rPr>
+              <a:t> (extract-transform-load) pipelines in scalable business intelligence: A comparative study of data integration tools." ASRC Procedia: Global Perspectives in Science and Scholarship 2.1 (2022): 89-121.</a:t>
+            </a:r>
+          </a:p>
+          <a:p>
+            <a:pPr algn="just">
+              <a:lnSpc>
+                <a:spcPct val="150000"/>
+              </a:lnSpc>
+            </a:pPr>
+            <a:r>
+              <a:rPr lang="en-IN" sz="2400" b="1" dirty="0">
+                <a:solidFill>
+                  <a:schemeClr val="bg2"/>
+                </a:solidFill>
+                <a:latin typeface="Roca Two" panose="020B0604020202020204" charset="0"/>
+              </a:rPr>
+              <a:t>[4]</a:t>
+            </a:r>
+            <a:r>
+              <a:rPr lang="en-IN" sz="2400" dirty="0">
+                <a:solidFill>
+                  <a:schemeClr val="bg2"/>
+                </a:solidFill>
+                <a:latin typeface="Roca Two" panose="020B0604020202020204" charset="0"/>
+              </a:rPr>
+              <a:t> </a:t>
+            </a:r>
+            <a:r>
+              <a:rPr lang="en-IN" sz="2400" dirty="0" err="1">
+                <a:solidFill>
+                  <a:schemeClr val="bg2"/>
+                </a:solidFill>
+                <a:latin typeface="Roca Two" panose="020B0604020202020204" charset="0"/>
+              </a:rPr>
+              <a:t>Machireddy</a:t>
+            </a:r>
+            <a:r>
+              <a:rPr lang="en-IN" sz="2400" dirty="0">
+                <a:solidFill>
+                  <a:schemeClr val="bg2"/>
+                </a:solidFill>
+                <a:latin typeface="Roca Two" panose="020B0604020202020204" charset="0"/>
+              </a:rPr>
+              <a:t>, Jeshwanth Reddy. "Data quality management and performance optimization for enterprise-scale </a:t>
+            </a:r>
+            <a:r>
+              <a:rPr lang="en-IN" sz="2400" dirty="0" err="1">
+                <a:solidFill>
+                  <a:schemeClr val="bg2"/>
+                </a:solidFill>
+                <a:latin typeface="Roca Two" panose="020B0604020202020204" charset="0"/>
+              </a:rPr>
+              <a:t>etl</a:t>
+            </a:r>
+            <a:r>
+              <a:rPr lang="en-IN" sz="2400" dirty="0">
+                <a:solidFill>
+                  <a:schemeClr val="bg2"/>
+                </a:solidFill>
+                <a:latin typeface="Roca Two" panose="020B0604020202020204" charset="0"/>
+              </a:rPr>
+              <a:t> pipelines in modern analytical ecosystems." Journal of Data Science, Predictive Analytics, and Big Data Applications 8.7 (2023): 1-26.</a:t>
+            </a:r>
+          </a:p>
+          <a:p>
+            <a:pPr algn="just">
+              <a:lnSpc>
+                <a:spcPct val="150000"/>
+              </a:lnSpc>
+            </a:pPr>
+            <a:r>
+              <a:rPr lang="en-IN" sz="2400" b="1" dirty="0">
+                <a:solidFill>
+                  <a:schemeClr val="bg2"/>
+                </a:solidFill>
+                <a:latin typeface="Roca Two" panose="020B0604020202020204" charset="0"/>
+              </a:rPr>
+              <a:t>[5]</a:t>
+            </a:r>
+            <a:r>
+              <a:rPr lang="en-IN" sz="2400" dirty="0">
+                <a:solidFill>
+                  <a:schemeClr val="bg2"/>
+                </a:solidFill>
+                <a:latin typeface="Roca Two" panose="020B0604020202020204" charset="0"/>
+              </a:rPr>
+              <a:t> Gaddipati, Soma Sekhar. "AI-Augmented Data Engineering: Enhancing ETL Pipelines with Intelligent Automation and Data Quality Frameworks." Journal of Electrical Systems (2021).</a:t>
+            </a:r>
+            <a:endParaRPr lang="en-US" sz="2400" b="1" dirty="0">
+              <a:solidFill>
+                <a:schemeClr val="bg2"/>
+              </a:solidFill>
+              <a:latin typeface="Roca Two" panose="020B0604020202020204" charset="0"/>
+              <a:ea typeface="Roca Two Bold"/>
+              <a:cs typeface="Roca Two Bold"/>
+              <a:sym typeface="Roca Two Bold"/>
+            </a:endParaRPr>
+          </a:p>
+        </p:txBody>
+      </p:sp>
+      <p:sp>
+        <p:nvSpPr>
+          <p:cNvPr id="3" name="TextBox 2">
+            <a:extLst>
+              <a:ext uri="{FF2B5EF4-FFF2-40B4-BE49-F238E27FC236}">
+                <a16:creationId xmlns:a16="http://schemas.microsoft.com/office/drawing/2014/main" id="{63EFD13F-83F5-F865-EF9C-10512A41726F}"/>
+              </a:ext>
+            </a:extLst>
+          </p:cNvPr>
+          <p:cNvSpPr txBox="1"/>
+          <p:nvPr/>
+        </p:nvSpPr>
+        <p:spPr>
+          <a:xfrm>
+            <a:off x="6858000" y="402939"/>
+            <a:ext cx="8077200" cy="1015663"/>
+          </a:xfrm>
+          <a:prstGeom prst="rect">
+            <a:avLst/>
+          </a:prstGeom>
+          <a:noFill/>
+        </p:spPr>
+        <p:txBody>
+          <a:bodyPr wrap="square" rtlCol="0">
+            <a:spAutoFit/>
+          </a:bodyPr>
+          <a:lstStyle/>
+          <a:p>
+            <a:r>
+              <a:rPr lang="en-US" sz="6000" dirty="0">
+                <a:solidFill>
+                  <a:schemeClr val="bg2"/>
+                </a:solidFill>
+                <a:latin typeface="Roca Two" panose="020B0604020202020204" charset="0"/>
+              </a:rPr>
+              <a:t>References</a:t>
+            </a:r>
+            <a:endParaRPr lang="en-IN" sz="6000" dirty="0">
+              <a:solidFill>
+                <a:schemeClr val="bg2"/>
+              </a:solidFill>
+              <a:latin typeface="Roca Two" panose="020B0604020202020204" charset="0"/>
+            </a:endParaRPr>
+          </a:p>
+        </p:txBody>
+      </p:sp>
+      <p:sp>
+        <p:nvSpPr>
+          <p:cNvPr id="5" name="Freeform 3">
+            <a:extLst>
+              <a:ext uri="{FF2B5EF4-FFF2-40B4-BE49-F238E27FC236}">
+                <a16:creationId xmlns:a16="http://schemas.microsoft.com/office/drawing/2014/main" id="{4F9C8FC0-87E8-1F23-CC04-680222108499}"/>
+              </a:ext>
+            </a:extLst>
+          </p:cNvPr>
+          <p:cNvSpPr/>
+          <p:nvPr/>
+        </p:nvSpPr>
+        <p:spPr>
+          <a:xfrm>
+            <a:off x="0" y="-194638"/>
+            <a:ext cx="2881617" cy="1223338"/>
+          </a:xfrm>
+          <a:custGeom>
+            <a:avLst/>
+            <a:gdLst/>
+            <a:ahLst/>
+            <a:cxnLst/>
+            <a:rect l="l" t="t" r="r" b="b"/>
+            <a:pathLst>
+              <a:path w="2881617" h="1223338">
+                <a:moveTo>
+                  <a:pt x="0" y="0"/>
+                </a:moveTo>
+                <a:lnTo>
+                  <a:pt x="2881617" y="0"/>
+                </a:lnTo>
+                <a:lnTo>
+                  <a:pt x="2881617" y="1223338"/>
+                </a:lnTo>
+                <a:lnTo>
+                  <a:pt x="0" y="1223338"/>
+                </a:lnTo>
+                <a:lnTo>
+                  <a:pt x="0" y="0"/>
+                </a:lnTo>
+                <a:close/>
+              </a:path>
+            </a:pathLst>
+          </a:custGeom>
+          <a:blipFill>
+            <a:blip r:embed="rId2"/>
+            <a:stretch>
+              <a:fillRect t="-46829" b="-28253"/>
+            </a:stretch>
+          </a:blipFill>
+        </p:spPr>
+      </p:sp>
+    </p:spTree>
+    <p:extLst>
+      <p:ext uri="{BB962C8B-B14F-4D97-AF65-F5344CB8AC3E}">
+        <p14:creationId xmlns:p14="http://schemas.microsoft.com/office/powerpoint/2010/main" val="4234060334"/>
+      </p:ext>
+    </p:extLst>
+  </p:cSld>
+  <p:clrMapOvr>
+    <a:masterClrMapping/>
+  </p:clrMapOvr>
+</p:sld>
+</file>
+
+<file path=ppt/slides/slide24.xml><?xml version="1.0" encoding="utf-8"?>
 <p:sld xmlns:a="http://schemas.openxmlformats.org/drawingml/2006/main" xmlns:r="http://schemas.openxmlformats.org/officeDocument/2006/relationships" xmlns:p="http://schemas.openxmlformats.org/presentationml/2006/main">
   <p:cSld>
     <p:bg>
@@ -18733,4 +21996,299 @@
   <a:objectDefaults/>
   <a:extraClrSchemeLst/>
 </a:theme>
+</file>
+
+<file path=ppt/theme/theme2.xml><?xml version="1.0" encoding="utf-8"?>
+<a:theme xmlns:a="http://schemas.openxmlformats.org/drawingml/2006/main" name="Office Theme">
+  <a:themeElements>
+    <a:clrScheme name="Office">
+      <a:dk1>
+        <a:sysClr val="windowText" lastClr="000000"/>
+      </a:dk1>
+      <a:lt1>
+        <a:sysClr val="window" lastClr="FFFFFF"/>
+      </a:lt1>
+      <a:dk2>
+        <a:srgbClr val="44546A"/>
+      </a:dk2>
+      <a:lt2>
+        <a:srgbClr val="E7E6E6"/>
+      </a:lt2>
+      <a:accent1>
+        <a:srgbClr val="4472C4"/>
+      </a:accent1>
+      <a:accent2>
+        <a:srgbClr val="ED7D31"/>
+      </a:accent2>
+      <a:accent3>
+        <a:srgbClr val="A5A5A5"/>
+      </a:accent3>
+      <a:accent4>
+        <a:srgbClr val="FFC000"/>
+      </a:accent4>
+      <a:accent5>
+        <a:srgbClr val="5B9BD5"/>
+      </a:accent5>
+      <a:accent6>
+        <a:srgbClr val="70AD47"/>
+      </a:accent6>
+      <a:hlink>
+        <a:srgbClr val="0563C1"/>
+      </a:hlink>
+      <a:folHlink>
+        <a:srgbClr val="954F72"/>
+      </a:folHlink>
+    </a:clrScheme>
+    <a:fontScheme name="Office">
+      <a:majorFont>
+        <a:latin typeface="Calibri Light" panose="020F0302020204030204"/>
+        <a:ea typeface=""/>
+        <a:cs typeface=""/>
+        <a:font script="Jpan" typeface="游ゴシック Light"/>
+        <a:font script="Hang" typeface="맑은 고딕"/>
+        <a:font script="Hans" typeface="等线 Light"/>
+        <a:font script="Hant" typeface="新細明體"/>
+        <a:font script="Arab" typeface="Times New Roman"/>
+        <a:font script="Hebr" typeface="Times New Roman"/>
+        <a:font script="Thai" typeface="Angsana New"/>
+        <a:font script="Ethi" typeface="Nyala"/>
+        <a:font script="Beng" typeface="Vrinda"/>
+        <a:font script="Gujr" typeface="Shruti"/>
+        <a:font script="Khmr" typeface="MoolBoran"/>
+        <a:font script="Knda" typeface="Tunga"/>
+        <a:font script="Guru" typeface="Raavi"/>
+        <a:font script="Cans" typeface="Euphemia"/>
+        <a:font script="Cher" typeface="Plantagenet Cherokee"/>
+        <a:font script="Yiii" typeface="Microsoft Yi Baiti"/>
+        <a:font script="Tibt" typeface="Microsoft Himalaya"/>
+        <a:font script="Thaa" typeface="MV Boli"/>
+        <a:font script="Deva" typeface="Mangal"/>
+        <a:font script="Telu" typeface="Gautami"/>
+        <a:font script="Taml" typeface="Latha"/>
+        <a:font script="Syrc" typeface="Estrangelo Edessa"/>
+        <a:font script="Orya" typeface="Kalinga"/>
+        <a:font script="Mlym" typeface="Kartika"/>
+        <a:font script="Laoo" typeface="DokChampa"/>
+        <a:font script="Sinh" typeface="Iskoola Pota"/>
+        <a:font script="Mong" typeface="Mongolian Baiti"/>
+        <a:font script="Viet" typeface="Times New Roman"/>
+        <a:font script="Uigh" typeface="Microsoft Uighur"/>
+        <a:font script="Geor" typeface="Sylfaen"/>
+        <a:font script="Armn" typeface="Arial"/>
+        <a:font script="Bugi" typeface="Leelawadee UI"/>
+        <a:font script="Bopo" typeface="Microsoft JhengHei"/>
+        <a:font script="Java" typeface="Javanese Text"/>
+        <a:font script="Lisu" typeface="Segoe UI"/>
+        <a:font script="Mymr" typeface="Myanmar Text"/>
+        <a:font script="Nkoo" typeface="Ebrima"/>
+        <a:font script="Olck" typeface="Nirmala UI"/>
+        <a:font script="Osma" typeface="Ebrima"/>
+        <a:font script="Phag" typeface="Phagspa"/>
+        <a:font script="Syrn" typeface="Estrangelo Edessa"/>
+        <a:font script="Syrj" typeface="Estrangelo Edessa"/>
+        <a:font script="Syre" typeface="Estrangelo Edessa"/>
+        <a:font script="Sora" typeface="Nirmala UI"/>
+        <a:font script="Tale" typeface="Microsoft Tai Le"/>
+        <a:font script="Talu" typeface="Microsoft New Tai Lue"/>
+        <a:font script="Tfng" typeface="Ebrima"/>
+      </a:majorFont>
+      <a:minorFont>
+        <a:latin typeface="Calibri" panose="020F0502020204030204"/>
+        <a:ea typeface=""/>
+        <a:cs typeface=""/>
+        <a:font script="Jpan" typeface="游ゴシック"/>
+        <a:font script="Hang" typeface="맑은 고딕"/>
+        <a:font script="Hans" typeface="等线"/>
+        <a:font script="Hant" typeface="新細明體"/>
+        <a:font script="Arab" typeface="Arial"/>
+        <a:font script="Hebr" typeface="Arial"/>
+        <a:font script="Thai" typeface="Cordia New"/>
+        <a:font script="Ethi" typeface="Nyala"/>
+        <a:font script="Beng" typeface="Vrinda"/>
+        <a:font script="Gujr" typeface="Shruti"/>
+        <a:font script="Khmr" typeface="DaunPenh"/>
+        <a:font script="Knda" typeface="Tunga"/>
+        <a:font script="Guru" typeface="Raavi"/>
+        <a:font script="Cans" typeface="Euphemia"/>
+        <a:font script="Cher" typeface="Plantagenet Cherokee"/>
+        <a:font script="Yiii" typeface="Microsoft Yi Baiti"/>
+        <a:font script="Tibt" typeface="Microsoft Himalaya"/>
+        <a:font script="Thaa" typeface="MV Boli"/>
+        <a:font script="Deva" typeface="Mangal"/>
+        <a:font script="Telu" typeface="Gautami"/>
+        <a:font script="Taml" typeface="Latha"/>
+        <a:font script="Syrc" typeface="Estrangelo Edessa"/>
+        <a:font script="Orya" typeface="Kalinga"/>
+        <a:font script="Mlym" typeface="Kartika"/>
+        <a:font script="Laoo" typeface="DokChampa"/>
+        <a:font script="Sinh" typeface="Iskoola Pota"/>
+        <a:font script="Mong" typeface="Mongolian Baiti"/>
+        <a:font script="Viet" typeface="Arial"/>
+        <a:font script="Uigh" typeface="Microsoft Uighur"/>
+        <a:font script="Geor" typeface="Sylfaen"/>
+        <a:font script="Armn" typeface="Arial"/>
+        <a:font script="Bugi" typeface="Leelawadee UI"/>
+        <a:font script="Bopo" typeface="Microsoft JhengHei"/>
+        <a:font script="Java" typeface="Javanese Text"/>
+        <a:font script="Lisu" typeface="Segoe UI"/>
+        <a:font script="Mymr" typeface="Myanmar Text"/>
+        <a:font script="Nkoo" typeface="Ebrima"/>
+        <a:font script="Olck" typeface="Nirmala UI"/>
+        <a:font script="Osma" typeface="Ebrima"/>
+        <a:font script="Phag" typeface="Phagspa"/>
+        <a:font script="Syrn" typeface="Estrangelo Edessa"/>
+        <a:font script="Syrj" typeface="Estrangelo Edessa"/>
+        <a:font script="Syre" typeface="Estrangelo Edessa"/>
+        <a:font script="Sora" typeface="Nirmala UI"/>
+        <a:font script="Tale" typeface="Microsoft Tai Le"/>
+        <a:font script="Talu" typeface="Microsoft New Tai Lue"/>
+        <a:font script="Tfng" typeface="Ebrima"/>
+      </a:minorFont>
+    </a:fontScheme>
+    <a:fmtScheme name="Office">
+      <a:fillStyleLst>
+        <a:solidFill>
+          <a:schemeClr val="phClr"/>
+        </a:solidFill>
+        <a:gradFill rotWithShape="1">
+          <a:gsLst>
+            <a:gs pos="0">
+              <a:schemeClr val="phClr">
+                <a:lumMod val="110000"/>
+                <a:satMod val="105000"/>
+                <a:tint val="67000"/>
+              </a:schemeClr>
+            </a:gs>
+            <a:gs pos="50000">
+              <a:schemeClr val="phClr">
+                <a:lumMod val="105000"/>
+                <a:satMod val="103000"/>
+                <a:tint val="73000"/>
+              </a:schemeClr>
+            </a:gs>
+            <a:gs pos="100000">
+              <a:schemeClr val="phClr">
+                <a:lumMod val="105000"/>
+                <a:satMod val="109000"/>
+                <a:tint val="81000"/>
+              </a:schemeClr>
+            </a:gs>
+          </a:gsLst>
+          <a:lin ang="5400000" scaled="0"/>
+        </a:gradFill>
+        <a:gradFill rotWithShape="1">
+          <a:gsLst>
+            <a:gs pos="0">
+              <a:schemeClr val="phClr">
+                <a:satMod val="103000"/>
+                <a:lumMod val="102000"/>
+                <a:tint val="94000"/>
+              </a:schemeClr>
+            </a:gs>
+            <a:gs pos="50000">
+              <a:schemeClr val="phClr">
+                <a:satMod val="110000"/>
+                <a:lumMod val="100000"/>
+                <a:shade val="100000"/>
+              </a:schemeClr>
+            </a:gs>
+            <a:gs pos="100000">
+              <a:schemeClr val="phClr">
+                <a:lumMod val="99000"/>
+                <a:satMod val="120000"/>
+                <a:shade val="78000"/>
+              </a:schemeClr>
+            </a:gs>
+          </a:gsLst>
+          <a:lin ang="5400000" scaled="0"/>
+        </a:gradFill>
+      </a:fillStyleLst>
+      <a:lnStyleLst>
+        <a:ln w="6350" cap="flat" cmpd="sng" algn="ctr">
+          <a:solidFill>
+            <a:schemeClr val="phClr"/>
+          </a:solidFill>
+          <a:prstDash val="solid"/>
+          <a:miter lim="800000"/>
+        </a:ln>
+        <a:ln w="12700" cap="flat" cmpd="sng" algn="ctr">
+          <a:solidFill>
+            <a:schemeClr val="phClr"/>
+          </a:solidFill>
+          <a:prstDash val="solid"/>
+          <a:miter lim="800000"/>
+        </a:ln>
+        <a:ln w="19050" cap="flat" cmpd="sng" algn="ctr">
+          <a:solidFill>
+            <a:schemeClr val="phClr"/>
+          </a:solidFill>
+          <a:prstDash val="solid"/>
+          <a:miter lim="800000"/>
+        </a:ln>
+      </a:lnStyleLst>
+      <a:effectStyleLst>
+        <a:effectStyle>
+          <a:effectLst/>
+        </a:effectStyle>
+        <a:effectStyle>
+          <a:effectLst/>
+        </a:effectStyle>
+        <a:effectStyle>
+          <a:effectLst>
+            <a:outerShdw blurRad="57150" dist="19050" dir="5400000" algn="ctr" rotWithShape="0">
+              <a:srgbClr val="000000">
+                <a:alpha val="63000"/>
+              </a:srgbClr>
+            </a:outerShdw>
+          </a:effectLst>
+        </a:effectStyle>
+      </a:effectStyleLst>
+      <a:bgFillStyleLst>
+        <a:solidFill>
+          <a:schemeClr val="phClr"/>
+        </a:solidFill>
+        <a:solidFill>
+          <a:schemeClr val="phClr">
+            <a:tint val="95000"/>
+            <a:satMod val="170000"/>
+          </a:schemeClr>
+        </a:solidFill>
+        <a:gradFill rotWithShape="1">
+          <a:gsLst>
+            <a:gs pos="0">
+              <a:schemeClr val="phClr">
+                <a:tint val="93000"/>
+                <a:satMod val="150000"/>
+                <a:shade val="98000"/>
+                <a:lumMod val="102000"/>
+              </a:schemeClr>
+            </a:gs>
+            <a:gs pos="50000">
+              <a:schemeClr val="phClr">
+                <a:tint val="98000"/>
+                <a:satMod val="130000"/>
+                <a:shade val="90000"/>
+                <a:lumMod val="103000"/>
+              </a:schemeClr>
+            </a:gs>
+            <a:gs pos="100000">
+              <a:schemeClr val="phClr">
+                <a:shade val="63000"/>
+                <a:satMod val="120000"/>
+              </a:schemeClr>
+            </a:gs>
+          </a:gsLst>
+          <a:lin ang="5400000" scaled="0"/>
+        </a:gradFill>
+      </a:bgFillStyleLst>
+    </a:fmtScheme>
+  </a:themeElements>
+  <a:objectDefaults/>
+  <a:extraClrSchemeLst/>
+  <a:extLst>
+    <a:ext uri="{05A4C25C-085E-4340-85A3-A5531E510DB2}">
+      <thm15:themeFamily xmlns:thm15="http://schemas.microsoft.com/office/thememl/2012/main" name="Office Theme" id="{62F939B6-93AF-4DB8-9C6B-D6C7DFDC589F}" vid="{4A3C46E8-61CC-4603-A589-7422A47A8E4A}"/>
+    </a:ext>
+  </a:extLst>
+</a:theme>
 </file>